--- a/Mid-term.pptx
+++ b/Mid-term.pptx
@@ -5,10 +5,10 @@
     <p:sldMasterId id="2147483648" r:id="rId1"/>
   </p:sldMasterIdLst>
   <p:notesMasterIdLst>
-    <p:notesMasterId r:id="rId18"/>
+    <p:notesMasterId r:id="rId20"/>
   </p:notesMasterIdLst>
   <p:handoutMasterIdLst>
-    <p:handoutMasterId r:id="rId19"/>
+    <p:handoutMasterId r:id="rId21"/>
   </p:handoutMasterIdLst>
   <p:sldIdLst>
     <p:sldId id="256" r:id="rId3"/>
@@ -16,16 +16,18 @@
     <p:sldId id="291" r:id="rId5"/>
     <p:sldId id="301" r:id="rId6"/>
     <p:sldId id="302" r:id="rId7"/>
-    <p:sldId id="292" r:id="rId8"/>
-    <p:sldId id="293" r:id="rId9"/>
-    <p:sldId id="294" r:id="rId10"/>
-    <p:sldId id="300" r:id="rId11"/>
-    <p:sldId id="296" r:id="rId12"/>
-    <p:sldId id="295" r:id="rId13"/>
-    <p:sldId id="297" r:id="rId14"/>
-    <p:sldId id="299" r:id="rId15"/>
-    <p:sldId id="298" r:id="rId16"/>
-    <p:sldId id="285" r:id="rId17"/>
+    <p:sldId id="303" r:id="rId8"/>
+    <p:sldId id="304" r:id="rId9"/>
+    <p:sldId id="292" r:id="rId10"/>
+    <p:sldId id="293" r:id="rId11"/>
+    <p:sldId id="294" r:id="rId12"/>
+    <p:sldId id="300" r:id="rId13"/>
+    <p:sldId id="296" r:id="rId14"/>
+    <p:sldId id="295" r:id="rId15"/>
+    <p:sldId id="297" r:id="rId16"/>
+    <p:sldId id="299" r:id="rId17"/>
+    <p:sldId id="298" r:id="rId18"/>
+    <p:sldId id="285" r:id="rId19"/>
   </p:sldIdLst>
   <p:sldSz cx="12192000" cy="6858000"/>
   <p:notesSz cx="9144000" cy="6858000"/>
@@ -231,7 +233,7 @@
             <a:srgbClr val="A4A3A4"/>
           </p15:clr>
         </p15:guide>
-        <p15:guide id="2" pos="3834" userDrawn="1">
+        <p15:guide id="2" pos="3840" userDrawn="1">
           <p15:clr>
             <a:srgbClr val="A4A3A4"/>
           </p15:clr>
@@ -2272,7 +2274,7 @@
         <p:spPr>
           <a:xfrm>
             <a:off x="0" y="0"/>
-            <a:ext cx="4946015" cy="1216025"/>
+            <a:ext cx="5006975" cy="1216025"/>
           </a:xfrm>
           <a:prstGeom prst="rect">
             <a:avLst/>
@@ -2333,7 +2335,7 @@
                 <a:ea typeface="+mn-ea"/>
                 <a:cs typeface="+mn-cs"/>
               </a:rPr>
-              <a:t>CODE: OUTPUT</a:t>
+              <a:t>CODE: INPUT</a:t>
             </a:r>
             <a:endParaRPr kumimoji="0" lang="en-US" altLang="zh-CN" sz="3200" b="1" i="0" u="none" strike="noStrike" kern="1200" cap="none" spc="0" normalizeH="0" baseline="0" noProof="0">
               <a:ln>
@@ -2354,7 +2356,7 @@
       </p:sp>
       <p:pic>
         <p:nvPicPr>
-          <p:cNvPr id="3" name="Picture 2" descr="IMAGE 2025-04-29 13:30:51"/>
+          <p:cNvPr id="4" name="Picture 3" descr="IMAGE 2025-04-29 13:30:34"/>
           <p:cNvPicPr>
             <a:picLocks noChangeAspect="1"/>
           </p:cNvPicPr>
@@ -2368,14 +2370,299 @@
         </p:blipFill>
         <p:spPr>
           <a:xfrm>
-            <a:off x="1593215" y="1300480"/>
-            <a:ext cx="8562975" cy="4823460"/>
+            <a:off x="156210" y="2794635"/>
+            <a:ext cx="5638800" cy="2824480"/>
           </a:xfrm>
           <a:prstGeom prst="rect">
             <a:avLst/>
           </a:prstGeom>
         </p:spPr>
       </p:pic>
+      <p:pic>
+        <p:nvPicPr>
+          <p:cNvPr id="5" name="Picture 4" descr="IMAGE 2025-04-29 13:32:44"/>
+          <p:cNvPicPr>
+            <a:picLocks noChangeAspect="1"/>
+          </p:cNvPicPr>
+          <p:nvPr/>
+        </p:nvPicPr>
+        <p:blipFill>
+          <a:blip r:embed="rId3"/>
+          <a:stretch>
+            <a:fillRect/>
+          </a:stretch>
+        </p:blipFill>
+        <p:spPr>
+          <a:xfrm>
+            <a:off x="2863215" y="156845"/>
+            <a:ext cx="6878955" cy="2235835"/>
+          </a:xfrm>
+          <a:prstGeom prst="rect">
+            <a:avLst/>
+          </a:prstGeom>
+        </p:spPr>
+      </p:pic>
+      <p:pic>
+        <p:nvPicPr>
+          <p:cNvPr id="6" name="Picture 5" descr="IMAGE 2025-04-29 13:33:19"/>
+          <p:cNvPicPr>
+            <a:picLocks noChangeAspect="1"/>
+          </p:cNvPicPr>
+          <p:nvPr/>
+        </p:nvPicPr>
+        <p:blipFill>
+          <a:blip r:embed="rId4"/>
+          <a:stretch>
+            <a:fillRect/>
+          </a:stretch>
+        </p:blipFill>
+        <p:spPr>
+          <a:xfrm>
+            <a:off x="5956300" y="2794635"/>
+            <a:ext cx="6058535" cy="2589530"/>
+          </a:xfrm>
+          <a:prstGeom prst="rect">
+            <a:avLst/>
+          </a:prstGeom>
+        </p:spPr>
+      </p:pic>
+      <p:sp>
+        <p:nvSpPr>
+          <p:cNvPr id="7" name="Rectangles 6"/>
+          <p:cNvSpPr/>
+          <p:nvPr/>
+        </p:nvSpPr>
+        <p:spPr>
+          <a:xfrm>
+            <a:off x="10191750" y="387350"/>
+            <a:ext cx="1557020" cy="1584325"/>
+          </a:xfrm>
+          <a:prstGeom prst="rect">
+            <a:avLst/>
+          </a:prstGeom>
+        </p:spPr>
+        <p:style>
+          <a:lnRef idx="2">
+            <a:schemeClr val="accent1">
+              <a:lumMod val="75000"/>
+            </a:schemeClr>
+          </a:lnRef>
+          <a:fillRef idx="1">
+            <a:schemeClr val="accent1"/>
+          </a:fillRef>
+          <a:effectRef idx="0">
+            <a:srgbClr val="FFFFFF"/>
+          </a:effectRef>
+          <a:fontRef idx="minor">
+            <a:schemeClr val="lt1"/>
+          </a:fontRef>
+        </p:style>
+        <p:txBody>
+          <a:bodyPr rtlCol="0" anchor="ctr"/>
+          <a:p>
+            <a:pPr algn="ctr"/>
+            <a:r>
+              <a:rPr lang="en-US"/>
+              <a:t>Adding Patients</a:t>
+            </a:r>
+            <a:endParaRPr lang="en-US"/>
+          </a:p>
+        </p:txBody>
+      </p:sp>
+      <p:cxnSp>
+        <p:nvCxnSpPr>
+          <p:cNvPr id="8" name="Straight Arrow Connector 7"/>
+          <p:cNvCxnSpPr>
+            <a:stCxn id="7" idx="1"/>
+            <a:endCxn id="5" idx="3"/>
+          </p:cNvCxnSpPr>
+          <p:nvPr/>
+        </p:nvCxnSpPr>
+        <p:spPr>
+          <a:xfrm flipH="1">
+            <a:off x="9742170" y="1179830"/>
+            <a:ext cx="449580" cy="95250"/>
+          </a:xfrm>
+          <a:prstGeom prst="straightConnector1">
+            <a:avLst/>
+          </a:prstGeom>
+          <a:ln>
+            <a:tailEnd type="arrow"/>
+          </a:ln>
+        </p:spPr>
+        <p:style>
+          <a:lnRef idx="2">
+            <a:schemeClr val="accent1"/>
+          </a:lnRef>
+          <a:fillRef idx="0">
+            <a:srgbClr val="FFFFFF"/>
+          </a:fillRef>
+          <a:effectRef idx="0">
+            <a:srgbClr val="FFFFFF"/>
+          </a:effectRef>
+          <a:fontRef idx="minor">
+            <a:schemeClr val="tx1"/>
+          </a:fontRef>
+        </p:style>
+      </p:cxnSp>
+      <p:sp>
+        <p:nvSpPr>
+          <p:cNvPr id="9" name="Rectangles 8"/>
+          <p:cNvSpPr/>
+          <p:nvPr/>
+        </p:nvSpPr>
+        <p:spPr>
+          <a:xfrm>
+            <a:off x="1781175" y="6021070"/>
+            <a:ext cx="2388870" cy="710565"/>
+          </a:xfrm>
+          <a:prstGeom prst="rect">
+            <a:avLst/>
+          </a:prstGeom>
+        </p:spPr>
+        <p:style>
+          <a:lnRef idx="2">
+            <a:schemeClr val="accent1">
+              <a:lumMod val="75000"/>
+            </a:schemeClr>
+          </a:lnRef>
+          <a:fillRef idx="1">
+            <a:schemeClr val="accent1"/>
+          </a:fillRef>
+          <a:effectRef idx="0">
+            <a:srgbClr val="FFFFFF"/>
+          </a:effectRef>
+          <a:fontRef idx="minor">
+            <a:schemeClr val="lt1"/>
+          </a:fontRef>
+        </p:style>
+        <p:txBody>
+          <a:bodyPr rtlCol="0" anchor="ctr"/>
+          <a:p>
+            <a:pPr algn="ctr"/>
+            <a:r>
+              <a:rPr lang="en-US"/>
+              <a:t>Patient Registration</a:t>
+            </a:r>
+            <a:endParaRPr lang="en-US"/>
+          </a:p>
+        </p:txBody>
+      </p:sp>
+      <p:cxnSp>
+        <p:nvCxnSpPr>
+          <p:cNvPr id="10" name="Straight Arrow Connector 9"/>
+          <p:cNvCxnSpPr>
+            <a:stCxn id="9" idx="0"/>
+            <a:endCxn id="4" idx="2"/>
+          </p:cNvCxnSpPr>
+          <p:nvPr/>
+        </p:nvCxnSpPr>
+        <p:spPr>
+          <a:xfrm flipV="1">
+            <a:off x="2975610" y="5619115"/>
+            <a:ext cx="0" cy="401955"/>
+          </a:xfrm>
+          <a:prstGeom prst="straightConnector1">
+            <a:avLst/>
+          </a:prstGeom>
+          <a:ln>
+            <a:tailEnd type="arrow"/>
+          </a:ln>
+        </p:spPr>
+        <p:style>
+          <a:lnRef idx="2">
+            <a:schemeClr val="accent1"/>
+          </a:lnRef>
+          <a:fillRef idx="0">
+            <a:srgbClr val="FFFFFF"/>
+          </a:fillRef>
+          <a:effectRef idx="0">
+            <a:srgbClr val="FFFFFF"/>
+          </a:effectRef>
+          <a:fontRef idx="minor">
+            <a:schemeClr val="tx1"/>
+          </a:fontRef>
+        </p:style>
+      </p:cxnSp>
+      <p:sp>
+        <p:nvSpPr>
+          <p:cNvPr id="11" name="Rectangles 10"/>
+          <p:cNvSpPr/>
+          <p:nvPr/>
+        </p:nvSpPr>
+        <p:spPr>
+          <a:xfrm>
+            <a:off x="7512050" y="5904865"/>
+            <a:ext cx="2947670" cy="710565"/>
+          </a:xfrm>
+          <a:prstGeom prst="rect">
+            <a:avLst/>
+          </a:prstGeom>
+        </p:spPr>
+        <p:style>
+          <a:lnRef idx="2">
+            <a:schemeClr val="accent1">
+              <a:lumMod val="75000"/>
+            </a:schemeClr>
+          </a:lnRef>
+          <a:fillRef idx="1">
+            <a:schemeClr val="accent1"/>
+          </a:fillRef>
+          <a:effectRef idx="0">
+            <a:srgbClr val="FFFFFF"/>
+          </a:effectRef>
+          <a:fontRef idx="minor">
+            <a:schemeClr val="lt1"/>
+          </a:fontRef>
+        </p:style>
+        <p:txBody>
+          <a:bodyPr rtlCol="0" anchor="ctr"/>
+          <a:p>
+            <a:pPr algn="ctr"/>
+            <a:r>
+              <a:rPr lang="en-US"/>
+              <a:t>Confirmation of appointment</a:t>
+            </a:r>
+            <a:endParaRPr lang="en-US"/>
+          </a:p>
+        </p:txBody>
+      </p:sp>
+      <p:cxnSp>
+        <p:nvCxnSpPr>
+          <p:cNvPr id="13" name="Straight Arrow Connector 12"/>
+          <p:cNvCxnSpPr>
+            <a:stCxn id="11" idx="0"/>
+            <a:endCxn id="6" idx="2"/>
+          </p:cNvCxnSpPr>
+          <p:nvPr/>
+        </p:nvCxnSpPr>
+        <p:spPr>
+          <a:xfrm flipV="1">
+            <a:off x="8985885" y="5384165"/>
+            <a:ext cx="0" cy="520700"/>
+          </a:xfrm>
+          <a:prstGeom prst="straightConnector1">
+            <a:avLst/>
+          </a:prstGeom>
+          <a:ln>
+            <a:tailEnd type="arrow"/>
+          </a:ln>
+        </p:spPr>
+        <p:style>
+          <a:lnRef idx="2">
+            <a:schemeClr val="accent1"/>
+          </a:lnRef>
+          <a:fillRef idx="0">
+            <a:srgbClr val="FFFFFF"/>
+          </a:fillRef>
+          <a:effectRef idx="0">
+            <a:srgbClr val="FFFFFF"/>
+          </a:effectRef>
+          <a:fontRef idx="minor">
+            <a:schemeClr val="tx1"/>
+          </a:fontRef>
+        </p:style>
+      </p:cxnSp>
     </p:spTree>
   </p:cSld>
   <p:clrMapOvr>
@@ -2428,68 +2715,21 @@
       </p:pic>
       <p:sp>
         <p:nvSpPr>
-          <p:cNvPr id="10250" name="文本框 28"/>
-          <p:cNvSpPr txBox="1"/>
-          <p:nvPr/>
-        </p:nvSpPr>
-        <p:spPr>
-          <a:xfrm>
-            <a:off x="1610360" y="405765"/>
-            <a:ext cx="7923530" cy="645160"/>
-          </a:xfrm>
-          <a:prstGeom prst="rect">
-            <a:avLst/>
-          </a:prstGeom>
-          <a:noFill/>
-          <a:ln w="9525">
-            <a:noFill/>
-          </a:ln>
-        </p:spPr>
-        <p:txBody>
-          <a:bodyPr wrap="square" anchor="t">
-            <a:spAutoFit/>
-          </a:bodyPr>
-          <a:p>
-            <a:pPr>
-              <a:buFont typeface="Arial" panose="020B0604020202090204" pitchFamily="34" charset="0"/>
-            </a:pPr>
-            <a:r>
-              <a:rPr lang="en-US" altLang="en-US" sz="3600" b="1" dirty="0">
-                <a:solidFill>
-                  <a:srgbClr val="404040"/>
-                </a:solidFill>
-                <a:ea typeface="Calibri" panose="020F0502020204030204" pitchFamily="34" charset="0"/>
-              </a:rPr>
-              <a:t>User Evaluation</a:t>
-            </a:r>
-            <a:endParaRPr lang="en-US" altLang="en-US" sz="3600" b="1" dirty="0">
-              <a:solidFill>
-                <a:srgbClr val="404040"/>
-              </a:solidFill>
-              <a:ea typeface="Calibri" panose="020F0502020204030204" pitchFamily="34" charset="0"/>
-            </a:endParaRPr>
-          </a:p>
-        </p:txBody>
-      </p:sp>
-      <p:sp>
-        <p:nvSpPr>
           <p:cNvPr id="12" name="矩形 11"/>
           <p:cNvSpPr/>
           <p:nvPr/>
         </p:nvSpPr>
         <p:spPr>
           <a:xfrm>
-            <a:off x="828675" y="1729105"/>
-            <a:ext cx="10515600" cy="4653280"/>
+            <a:off x="0" y="0"/>
+            <a:ext cx="5006975" cy="1216025"/>
           </a:xfrm>
           <a:prstGeom prst="rect">
             <a:avLst/>
           </a:prstGeom>
           <a:noFill/>
           <a:ln>
-            <a:solidFill>
-              <a:schemeClr val="tx1"/>
-            </a:solidFill>
+            <a:noFill/>
           </a:ln>
         </p:spPr>
         <p:style>
@@ -2512,7 +2752,7 @@
           <a:bodyPr anchor="ctr"/>
           <a:lstStyle/>
           <a:p>
-            <a:pPr marL="0" marR="0" lvl="0" indent="0" algn="ctr" defTabSz="914400" rtl="0" eaLnBrk="1" fontAlgn="auto" latinLnBrk="0" hangingPunct="1">
+            <a:pPr marL="0" marR="0" lvl="0" indent="0" algn="l" defTabSz="914400" rtl="0" eaLnBrk="1" fontAlgn="auto" latinLnBrk="0" hangingPunct="1">
               <a:lnSpc>
                 <a:spcPct val="100000"/>
               </a:lnSpc>
@@ -2528,12 +2768,29 @@
               <a:buNone/>
               <a:defRPr/>
             </a:pPr>
-            <a:endParaRPr kumimoji="0" lang="zh-CN" altLang="en-US" sz="1800" b="0" i="0" u="none" strike="noStrike" kern="1200" cap="none" spc="0" normalizeH="0" baseline="0" noProof="0">
+            <a:r>
+              <a:rPr kumimoji="0" lang="en-US" altLang="zh-CN" sz="3200" b="1" i="0" u="none" strike="noStrike" kern="1200" cap="none" spc="0" normalizeH="0" baseline="0" noProof="0">
+                <a:ln>
+                  <a:noFill/>
+                </a:ln>
+                <a:solidFill>
+                  <a:schemeClr val="tx1"/>
+                </a:solidFill>
+                <a:effectLst/>
+                <a:uLnTx/>
+                <a:uFillTx/>
+                <a:latin typeface="+mn-lt"/>
+                <a:ea typeface="+mn-ea"/>
+                <a:cs typeface="+mn-cs"/>
+              </a:rPr>
+              <a:t>CODE: INPUT</a:t>
+            </a:r>
+            <a:endParaRPr kumimoji="0" lang="en-US" altLang="zh-CN" sz="3200" b="1" i="0" u="none" strike="noStrike" kern="1200" cap="none" spc="0" normalizeH="0" baseline="0" noProof="0">
               <a:ln>
                 <a:noFill/>
               </a:ln>
               <a:solidFill>
-                <a:schemeClr val="lt1"/>
+                <a:schemeClr val="tx1"/>
               </a:solidFill>
               <a:effectLst/>
               <a:uLnTx/>
@@ -2547,57 +2804,107 @@
       </p:sp>
       <p:sp>
         <p:nvSpPr>
-          <p:cNvPr id="10255" name="矩形 8"/>
+          <p:cNvPr id="7" name="Rectangles 6"/>
           <p:cNvSpPr/>
           <p:nvPr/>
         </p:nvSpPr>
         <p:spPr>
           <a:xfrm>
-            <a:off x="1012190" y="2572385"/>
-            <a:ext cx="9545955" cy="1992630"/>
-          </a:xfrm>
-          <a:prstGeom prst="rect">
-            <a:avLst/>
-          </a:prstGeom>
-          <a:noFill/>
-          <a:ln w="9525">
-            <a:noFill/>
-          </a:ln>
-        </p:spPr>
+            <a:off x="10191750" y="2637155"/>
+            <a:ext cx="1557020" cy="1584325"/>
+          </a:xfrm>
+          <a:prstGeom prst="rect">
+            <a:avLst/>
+          </a:prstGeom>
+        </p:spPr>
+        <p:style>
+          <a:lnRef idx="2">
+            <a:schemeClr val="accent1">
+              <a:lumMod val="75000"/>
+            </a:schemeClr>
+          </a:lnRef>
+          <a:fillRef idx="1">
+            <a:schemeClr val="accent1"/>
+          </a:fillRef>
+          <a:effectRef idx="0">
+            <a:srgbClr val="FFFFFF"/>
+          </a:effectRef>
+          <a:fontRef idx="minor">
+            <a:schemeClr val="lt1"/>
+          </a:fontRef>
+        </p:style>
         <p:txBody>
-          <a:bodyPr wrap="square" lIns="0" tIns="0" rIns="0" bIns="0" anchor="t">
-            <a:spAutoFit/>
-          </a:bodyPr>
-          <a:p>
-            <a:pPr marL="457200" lvl="1" indent="457200" algn="l" defTabSz="1216025">
-              <a:lnSpc>
-                <a:spcPct val="90000"/>
-              </a:lnSpc>
-              <a:spcBef>
-                <a:spcPct val="20000"/>
-              </a:spcBef>
-              <a:buFont typeface="Arial" panose="020B0604020202090204" pitchFamily="34" charset="0"/>
-            </a:pPr>
+          <a:bodyPr rtlCol="0" anchor="ctr"/>
+          <a:p>
+            <a:pPr algn="ctr"/>
             <a:r>
-              <a:rPr lang="en-US" altLang="en-US" sz="2400" dirty="0">
-                <a:solidFill>
-                  <a:srgbClr val="404040"/>
-                </a:solidFill>
-                <a:ea typeface="Calibri" panose="020F0502020204030204" pitchFamily="34" charset="0"/>
-                <a:sym typeface="Arial" panose="020B0604020202090204" pitchFamily="34" charset="0"/>
-              </a:rPr>
-              <a:t>The prototype is demonstrated to the real users — doctors, nurses, and administrative personnel — for practical testing. They work with the system, test its features, and offer insightful feedback based on their everyday workflow and real-world requirements. This feedback is essential because it identifies what is good and what should be changed.</a:t>
+              <a:rPr lang="en-US"/>
+              <a:t>Billing confirmation</a:t>
             </a:r>
-            <a:endParaRPr lang="en-US" altLang="en-US" sz="2400" dirty="0">
-              <a:solidFill>
-                <a:srgbClr val="404040"/>
-              </a:solidFill>
-              <a:ea typeface="Calibri" panose="020F0502020204030204" pitchFamily="34" charset="0"/>
-              <a:sym typeface="Arial" panose="020B0604020202090204" pitchFamily="34" charset="0"/>
-            </a:endParaRPr>
+            <a:endParaRPr lang="en-US"/>
           </a:p>
         </p:txBody>
       </p:sp>
+      <p:cxnSp>
+        <p:nvCxnSpPr>
+          <p:cNvPr id="8" name="Straight Arrow Connector 7"/>
+          <p:cNvCxnSpPr>
+            <a:stCxn id="7" idx="1"/>
+            <a:endCxn id="2" idx="3"/>
+          </p:cNvCxnSpPr>
+          <p:nvPr/>
+        </p:nvCxnSpPr>
+        <p:spPr>
+          <a:xfrm flipH="1">
+            <a:off x="8388350" y="3429635"/>
+            <a:ext cx="1803400" cy="430530"/>
+          </a:xfrm>
+          <a:prstGeom prst="straightConnector1">
+            <a:avLst/>
+          </a:prstGeom>
+          <a:ln>
+            <a:tailEnd type="arrow"/>
+          </a:ln>
+        </p:spPr>
+        <p:style>
+          <a:lnRef idx="2">
+            <a:schemeClr val="accent1"/>
+          </a:lnRef>
+          <a:fillRef idx="0">
+            <a:srgbClr val="FFFFFF"/>
+          </a:fillRef>
+          <a:effectRef idx="0">
+            <a:srgbClr val="FFFFFF"/>
+          </a:effectRef>
+          <a:fontRef idx="minor">
+            <a:schemeClr val="tx1"/>
+          </a:fontRef>
+        </p:style>
+      </p:cxnSp>
+      <p:pic>
+        <p:nvPicPr>
+          <p:cNvPr id="2" name="Picture 1" descr="IMAGE 2025-04-29 13:35:46"/>
+          <p:cNvPicPr>
+            <a:picLocks noChangeAspect="1"/>
+          </p:cNvPicPr>
+          <p:nvPr/>
+        </p:nvPicPr>
+        <p:blipFill>
+          <a:blip r:embed="rId2"/>
+          <a:stretch>
+            <a:fillRect/>
+          </a:stretch>
+        </p:blipFill>
+        <p:spPr>
+          <a:xfrm>
+            <a:off x="2312035" y="1106805"/>
+            <a:ext cx="6076315" cy="5506720"/>
+          </a:xfrm>
+          <a:prstGeom prst="rect">
+            <a:avLst/>
+          </a:prstGeom>
+        </p:spPr>
+      </p:pic>
     </p:spTree>
   </p:cSld>
   <p:clrMapOvr>
@@ -2650,68 +2957,21 @@
       </p:pic>
       <p:sp>
         <p:nvSpPr>
-          <p:cNvPr id="10250" name="文本框 28"/>
-          <p:cNvSpPr txBox="1"/>
-          <p:nvPr/>
-        </p:nvSpPr>
-        <p:spPr>
-          <a:xfrm>
-            <a:off x="1610360" y="405765"/>
-            <a:ext cx="7923530" cy="645160"/>
-          </a:xfrm>
-          <a:prstGeom prst="rect">
-            <a:avLst/>
-          </a:prstGeom>
-          <a:noFill/>
-          <a:ln w="9525">
-            <a:noFill/>
-          </a:ln>
-        </p:spPr>
-        <p:txBody>
-          <a:bodyPr wrap="square" anchor="t">
-            <a:spAutoFit/>
-          </a:bodyPr>
-          <a:p>
-            <a:pPr>
-              <a:buFont typeface="Arial" panose="020B0604020202090204" pitchFamily="34" charset="0"/>
-            </a:pPr>
-            <a:r>
-              <a:rPr lang="en-US" altLang="en-US" sz="3600" b="1" dirty="0">
-                <a:solidFill>
-                  <a:srgbClr val="404040"/>
-                </a:solidFill>
-                <a:ea typeface="Calibri" panose="020F0502020204030204" pitchFamily="34" charset="0"/>
-              </a:rPr>
-              <a:t>Refinement</a:t>
-            </a:r>
-            <a:endParaRPr lang="en-US" altLang="en-US" sz="3600" b="1" dirty="0">
-              <a:solidFill>
-                <a:srgbClr val="404040"/>
-              </a:solidFill>
-              <a:ea typeface="Calibri" panose="020F0502020204030204" pitchFamily="34" charset="0"/>
-            </a:endParaRPr>
-          </a:p>
-        </p:txBody>
-      </p:sp>
-      <p:sp>
-        <p:nvSpPr>
           <p:cNvPr id="12" name="矩形 11"/>
           <p:cNvSpPr/>
           <p:nvPr/>
         </p:nvSpPr>
         <p:spPr>
           <a:xfrm>
-            <a:off x="828675" y="1729105"/>
-            <a:ext cx="10515600" cy="4653280"/>
+            <a:off x="0" y="0"/>
+            <a:ext cx="4946015" cy="1216025"/>
           </a:xfrm>
           <a:prstGeom prst="rect">
             <a:avLst/>
           </a:prstGeom>
           <a:noFill/>
           <a:ln>
-            <a:solidFill>
-              <a:schemeClr val="tx1"/>
-            </a:solidFill>
+            <a:noFill/>
           </a:ln>
         </p:spPr>
         <p:style>
@@ -2734,7 +2994,7 @@
           <a:bodyPr anchor="ctr"/>
           <a:lstStyle/>
           <a:p>
-            <a:pPr marL="0" marR="0" lvl="0" indent="0" algn="ctr" defTabSz="914400" rtl="0" eaLnBrk="1" fontAlgn="auto" latinLnBrk="0" hangingPunct="1">
+            <a:pPr marL="0" marR="0" lvl="0" indent="0" algn="l" defTabSz="914400" rtl="0" eaLnBrk="1" fontAlgn="auto" latinLnBrk="0" hangingPunct="1">
               <a:lnSpc>
                 <a:spcPct val="100000"/>
               </a:lnSpc>
@@ -2750,12 +3010,29 @@
               <a:buNone/>
               <a:defRPr/>
             </a:pPr>
-            <a:endParaRPr kumimoji="0" lang="zh-CN" altLang="en-US" sz="1800" b="0" i="0" u="none" strike="noStrike" kern="1200" cap="none" spc="0" normalizeH="0" baseline="0" noProof="0">
+            <a:r>
+              <a:rPr kumimoji="0" lang="en-US" altLang="zh-CN" sz="3200" b="1" i="0" u="none" strike="noStrike" kern="1200" cap="none" spc="0" normalizeH="0" baseline="0" noProof="0">
+                <a:ln>
+                  <a:noFill/>
+                </a:ln>
+                <a:solidFill>
+                  <a:schemeClr val="tx1"/>
+                </a:solidFill>
+                <a:effectLst/>
+                <a:uLnTx/>
+                <a:uFillTx/>
+                <a:latin typeface="+mn-lt"/>
+                <a:ea typeface="+mn-ea"/>
+                <a:cs typeface="+mn-cs"/>
+              </a:rPr>
+              <a:t>CODE: OUTPUT</a:t>
+            </a:r>
+            <a:endParaRPr kumimoji="0" lang="en-US" altLang="zh-CN" sz="3200" b="1" i="0" u="none" strike="noStrike" kern="1200" cap="none" spc="0" normalizeH="0" baseline="0" noProof="0">
               <a:ln>
                 <a:noFill/>
               </a:ln>
               <a:solidFill>
-                <a:schemeClr val="lt1"/>
+                <a:schemeClr val="tx1"/>
               </a:solidFill>
               <a:effectLst/>
               <a:uLnTx/>
@@ -2767,95 +3044,30 @@
           </a:p>
         </p:txBody>
       </p:sp>
-      <p:sp>
-        <p:nvSpPr>
-          <p:cNvPr id="10253" name="文本框 6"/>
-          <p:cNvSpPr txBox="1"/>
-          <p:nvPr/>
-        </p:nvSpPr>
-        <p:spPr>
-          <a:xfrm>
-            <a:off x="956945" y="1729105"/>
-            <a:ext cx="9671685" cy="929640"/>
-          </a:xfrm>
-          <a:prstGeom prst="rect">
-            <a:avLst/>
-          </a:prstGeom>
-          <a:noFill/>
-          <a:ln w="9525">
-            <a:noFill/>
-          </a:ln>
-        </p:spPr>
-        <p:txBody>
-          <a:bodyPr wrap="square" anchor="t">
-            <a:noAutofit/>
-          </a:bodyPr>
-          <a:p>
-            <a:pPr>
-              <a:buFont typeface="Arial" panose="020B0604020202090204" pitchFamily="34" charset="0"/>
-            </a:pPr>
-            <a:endParaRPr lang="en-US" altLang="en-US" sz="3200" b="1" dirty="0">
-              <a:solidFill>
-                <a:srgbClr val="404040"/>
-              </a:solidFill>
-              <a:ea typeface="Calibri" panose="020F0502020204030204" pitchFamily="34" charset="0"/>
-            </a:endParaRPr>
-          </a:p>
-        </p:txBody>
-      </p:sp>
-      <p:sp>
-        <p:nvSpPr>
-          <p:cNvPr id="10255" name="矩形 8"/>
-          <p:cNvSpPr/>
-          <p:nvPr/>
-        </p:nvSpPr>
-        <p:spPr>
-          <a:xfrm>
-            <a:off x="1082675" y="2924175"/>
-            <a:ext cx="9545955" cy="1992630"/>
-          </a:xfrm>
-          <a:prstGeom prst="rect">
-            <a:avLst/>
-          </a:prstGeom>
-          <a:noFill/>
-          <a:ln w="9525">
-            <a:noFill/>
-          </a:ln>
-        </p:spPr>
-        <p:txBody>
-          <a:bodyPr wrap="square" lIns="0" tIns="0" rIns="0" bIns="0" anchor="t">
-            <a:spAutoFit/>
-          </a:bodyPr>
-          <a:p>
-            <a:pPr marL="457200" lvl="1" indent="457200" algn="l" defTabSz="1216025">
-              <a:lnSpc>
-                <a:spcPct val="90000"/>
-              </a:lnSpc>
-              <a:spcBef>
-                <a:spcPct val="20000"/>
-              </a:spcBef>
-              <a:buFont typeface="Arial" panose="020B0604020202090204" pitchFamily="34" charset="0"/>
-            </a:pPr>
-            <a:r>
-              <a:rPr lang="en-US" altLang="en-US" sz="2400" dirty="0">
-                <a:solidFill>
-                  <a:srgbClr val="404040"/>
-                </a:solidFill>
-                <a:ea typeface="Calibri" panose="020F0502020204030204" pitchFamily="34" charset="0"/>
-                <a:sym typeface="Arial" panose="020B0604020202090204" pitchFamily="34" charset="0"/>
-              </a:rPr>
-              <a:t>Developers come back with the feedback and make changes to the prototype. This could include fixing usability issues, adding new features, or removing unnecessary ones. This can happen several times within a cycle until users are satisfied with the functionality and design. Every iteration brings the final system nearer.</a:t>
-            </a:r>
-            <a:endParaRPr lang="en-US" altLang="en-US" sz="2400" dirty="0">
-              <a:solidFill>
-                <a:srgbClr val="404040"/>
-              </a:solidFill>
-              <a:ea typeface="Calibri" panose="020F0502020204030204" pitchFamily="34" charset="0"/>
-              <a:sym typeface="Arial" panose="020B0604020202090204" pitchFamily="34" charset="0"/>
-            </a:endParaRPr>
-          </a:p>
-        </p:txBody>
-      </p:sp>
+      <p:pic>
+        <p:nvPicPr>
+          <p:cNvPr id="3" name="Picture 2" descr="IMAGE 2025-04-29 13:30:51"/>
+          <p:cNvPicPr>
+            <a:picLocks noChangeAspect="1"/>
+          </p:cNvPicPr>
+          <p:nvPr/>
+        </p:nvPicPr>
+        <p:blipFill>
+          <a:blip r:embed="rId2"/>
+          <a:stretch>
+            <a:fillRect/>
+          </a:stretch>
+        </p:blipFill>
+        <p:spPr>
+          <a:xfrm>
+            <a:off x="1593215" y="1300480"/>
+            <a:ext cx="8562975" cy="4823460"/>
+          </a:xfrm>
+          <a:prstGeom prst="rect">
+            <a:avLst/>
+          </a:prstGeom>
+        </p:spPr>
+      </p:pic>
     </p:spTree>
   </p:cSld>
   <p:clrMapOvr>
@@ -2940,7 +3152,7 @@
                 </a:solidFill>
                 <a:ea typeface="Calibri" panose="020F0502020204030204" pitchFamily="34" charset="0"/>
               </a:rPr>
-              <a:t>Final Product</a:t>
+              <a:t>User Evaluation</a:t>
             </a:r>
             <a:endParaRPr lang="en-US" altLang="en-US" sz="3600" b="1" dirty="0">
               <a:solidFill>
@@ -3027,50 +3239,14 @@
       </p:sp>
       <p:sp>
         <p:nvSpPr>
-          <p:cNvPr id="10253" name="文本框 6"/>
-          <p:cNvSpPr txBox="1"/>
-          <p:nvPr/>
-        </p:nvSpPr>
-        <p:spPr>
-          <a:xfrm>
-            <a:off x="956945" y="1729105"/>
-            <a:ext cx="9671685" cy="929640"/>
-          </a:xfrm>
-          <a:prstGeom prst="rect">
-            <a:avLst/>
-          </a:prstGeom>
-          <a:noFill/>
-          <a:ln w="9525">
-            <a:noFill/>
-          </a:ln>
-        </p:spPr>
-        <p:txBody>
-          <a:bodyPr wrap="square" anchor="t">
-            <a:noAutofit/>
-          </a:bodyPr>
-          <a:p>
-            <a:pPr>
-              <a:buFont typeface="Arial" panose="020B0604020202090204" pitchFamily="34" charset="0"/>
-            </a:pPr>
-            <a:endParaRPr lang="en-US" altLang="en-US" sz="3200" b="1" dirty="0">
-              <a:solidFill>
-                <a:srgbClr val="404040"/>
-              </a:solidFill>
-              <a:ea typeface="Calibri" panose="020F0502020204030204" pitchFamily="34" charset="0"/>
-            </a:endParaRPr>
-          </a:p>
-        </p:txBody>
-      </p:sp>
-      <p:sp>
-        <p:nvSpPr>
           <p:cNvPr id="10255" name="矩形 8"/>
           <p:cNvSpPr/>
           <p:nvPr/>
         </p:nvSpPr>
         <p:spPr>
           <a:xfrm>
-            <a:off x="1082675" y="2760980"/>
-            <a:ext cx="9545955" cy="2324735"/>
+            <a:off x="1012190" y="2572385"/>
+            <a:ext cx="9545955" cy="1992630"/>
           </a:xfrm>
           <a:prstGeom prst="rect">
             <a:avLst/>
@@ -3102,7 +3278,7 @@
                 <a:ea typeface="Calibri" panose="020F0502020204030204" pitchFamily="34" charset="0"/>
                 <a:sym typeface="Arial" panose="020B0604020202090204" pitchFamily="34" charset="0"/>
               </a:rPr>
-              <a:t>Once all the issues in the feedback are addressed and the prototype has lived up to expectations, the team proceeds with creating the final system. The final system includes all the technical requirements like a secure database, interface-friendly interface, and full functionality. The final product is now ready to be fully deployed in the hospital environment to enhance patient care and administrative effectiveness.</a:t>
+              <a:t>The prototype is demonstrated to the real users — doctors, nurses, and administrative personnel — for practical testing. They work with the system, test its features, and offer insightful feedback based on their everyday workflow and real-world requirements. This feedback is essential because it identifies what is good and what should be changed.</a:t>
             </a:r>
             <a:endParaRPr lang="en-US" altLang="en-US" sz="2400" dirty="0">
               <a:solidFill>
@@ -3198,7 +3374,7 @@
                 </a:solidFill>
                 <a:ea typeface="Calibri" panose="020F0502020204030204" pitchFamily="34" charset="0"/>
               </a:rPr>
-              <a:t>Conclusion</a:t>
+              <a:t>Refinement</a:t>
             </a:r>
             <a:endParaRPr lang="en-US" altLang="en-US" sz="3600" b="1" dirty="0">
               <a:solidFill>
@@ -3217,8 +3393,8 @@
         </p:nvSpPr>
         <p:spPr>
           <a:xfrm>
-            <a:off x="828675" y="247650"/>
-            <a:ext cx="10515600" cy="6134735"/>
+            <a:off x="828675" y="1729105"/>
+            <a:ext cx="10515600" cy="4653280"/>
           </a:xfrm>
           <a:prstGeom prst="rect">
             <a:avLst/>
@@ -3291,8 +3467,8 @@
         </p:nvSpPr>
         <p:spPr>
           <a:xfrm>
-            <a:off x="956945" y="1356995"/>
-            <a:ext cx="10119360" cy="4553585"/>
+            <a:off x="956945" y="1729105"/>
+            <a:ext cx="9671685" cy="929640"/>
           </a:xfrm>
           <a:prstGeom prst="rect">
             <a:avLst/>
@@ -3307,81 +3483,67 @@
             <a:noAutofit/>
           </a:bodyPr>
           <a:p>
-            <a:pPr indent="457200">
+            <a:pPr>
               <a:buFont typeface="Arial" panose="020B0604020202090204" pitchFamily="34" charset="0"/>
             </a:pPr>
+            <a:endParaRPr lang="en-US" altLang="en-US" sz="3200" b="1" dirty="0">
+              <a:solidFill>
+                <a:srgbClr val="404040"/>
+              </a:solidFill>
+              <a:ea typeface="Calibri" panose="020F0502020204030204" pitchFamily="34" charset="0"/>
+            </a:endParaRPr>
+          </a:p>
+        </p:txBody>
+      </p:sp>
+      <p:sp>
+        <p:nvSpPr>
+          <p:cNvPr id="10255" name="矩形 8"/>
+          <p:cNvSpPr/>
+          <p:nvPr/>
+        </p:nvSpPr>
+        <p:spPr>
+          <a:xfrm>
+            <a:off x="1082675" y="2924175"/>
+            <a:ext cx="9545955" cy="1992630"/>
+          </a:xfrm>
+          <a:prstGeom prst="rect">
+            <a:avLst/>
+          </a:prstGeom>
+          <a:noFill/>
+          <a:ln w="9525">
+            <a:noFill/>
+          </a:ln>
+        </p:spPr>
+        <p:txBody>
+          <a:bodyPr wrap="square" lIns="0" tIns="0" rIns="0" bIns="0" anchor="t">
+            <a:spAutoFit/>
+          </a:bodyPr>
+          <a:p>
+            <a:pPr marL="457200" lvl="1" indent="457200" algn="l" defTabSz="1216025">
+              <a:lnSpc>
+                <a:spcPct val="90000"/>
+              </a:lnSpc>
+              <a:spcBef>
+                <a:spcPct val="20000"/>
+              </a:spcBef>
+              <a:buFont typeface="Arial" panose="020B0604020202090204" pitchFamily="34" charset="0"/>
+            </a:pPr>
             <a:r>
-              <a:rPr lang="en-US" altLang="en-US" sz="2800" dirty="0">
+              <a:rPr lang="en-US" altLang="en-US" sz="2400" dirty="0">
                 <a:solidFill>
                   <a:srgbClr val="404040"/>
                 </a:solidFill>
                 <a:ea typeface="Calibri" panose="020F0502020204030204" pitchFamily="34" charset="0"/>
+                <a:sym typeface="Arial" panose="020B0604020202090204" pitchFamily="34" charset="0"/>
               </a:rPr>
-              <a:t>Using the </a:t>
+              <a:t>Developers come back with the feedback and make changes to the prototype. This could include fixing usability issues, adding new features, or removing unnecessary ones. This can happen several times within a cycle until users are satisfied with the functionality and design. Every iteration brings the final system nearer.</a:t>
             </a:r>
-            <a:r>
-              <a:rPr lang="en-US" altLang="en-US" sz="2800" b="1" dirty="0">
-                <a:solidFill>
-                  <a:srgbClr val="404040"/>
-                </a:solidFill>
-                <a:ea typeface="Calibri" panose="020F0502020204030204" pitchFamily="34" charset="0"/>
-              </a:rPr>
-              <a:t>Prototype Model</a:t>
-            </a:r>
-            <a:r>
-              <a:rPr lang="en-US" altLang="en-US" sz="2800" dirty="0">
-                <a:solidFill>
-                  <a:srgbClr val="404040"/>
-                </a:solidFill>
-                <a:ea typeface="Calibri" panose="020F0502020204030204" pitchFamily="34" charset="0"/>
-              </a:rPr>
-              <a:t> helped the team quickly build a basic hospital system with patient registration, appointment scheduling, and billing features. Doctors, nurses, and admin staff tested it and gave feedback early on. Thanks to their suggestions, the system could be improved before making the final version. This way, the developers made sure the system fits real hospital needs and avoided bigger problems later.</a:t>
-            </a:r>
-            <a:endParaRPr lang="en-US" altLang="en-US" sz="2800" dirty="0">
+            <a:endParaRPr lang="en-US" altLang="en-US" sz="2400" dirty="0">
               <a:solidFill>
                 <a:srgbClr val="404040"/>
               </a:solidFill>
               <a:ea typeface="Calibri" panose="020F0502020204030204" pitchFamily="34" charset="0"/>
-            </a:endParaRPr>
-          </a:p>
-          <a:p>
-            <a:pPr indent="457200">
-              <a:buFont typeface="Arial" panose="020B0604020202090204" pitchFamily="34" charset="0"/>
-            </a:pPr>
-            <a:endParaRPr lang="en-US" altLang="en-US" sz="2800" dirty="0">
-              <a:solidFill>
-                <a:srgbClr val="404040"/>
-              </a:solidFill>
-              <a:ea typeface="Calibri" panose="020F0502020204030204" pitchFamily="34" charset="0"/>
-            </a:endParaRPr>
-          </a:p>
-          <a:p>
-            <a:pPr indent="457200">
-              <a:buFont typeface="Arial" panose="020B0604020202090204" pitchFamily="34" charset="0"/>
-            </a:pPr>
-            <a:r>
-              <a:rPr lang="en-US" altLang="en-US" sz="2800" b="1" dirty="0">
-                <a:solidFill>
-                  <a:srgbClr val="404040"/>
-                </a:solidFill>
-                <a:ea typeface="Calibri" panose="020F0502020204030204" pitchFamily="34" charset="0"/>
-              </a:rPr>
-              <a:t>The Prototype Model</a:t>
-            </a:r>
-            <a:r>
-              <a:rPr lang="en-US" altLang="en-US" sz="2800" dirty="0">
-                <a:solidFill>
-                  <a:srgbClr val="404040"/>
-                </a:solidFill>
-                <a:ea typeface="Calibri" panose="020F0502020204030204" pitchFamily="34" charset="0"/>
-              </a:rPr>
-              <a:t> made the whole process smoother and helped create a system that’s more useful and ready for real use.</a:t>
-            </a:r>
-            <a:endParaRPr lang="en-US" altLang="en-US" sz="2800" dirty="0">
-              <a:solidFill>
-                <a:srgbClr val="404040"/>
-              </a:solidFill>
-              <a:ea typeface="Calibri" panose="020F0502020204030204" pitchFamily="34" charset="0"/>
+              <a:sym typeface="Arial" panose="020B0604020202090204" pitchFamily="34" charset="0"/>
             </a:endParaRPr>
           </a:p>
         </p:txBody>
@@ -3398,6 +3560,536 @@
 </file>
 
 <file path=ppt/slides/slide15.xml><?xml version="1.0" encoding="utf-8"?>
+<p:sld xmlns:a="http://schemas.openxmlformats.org/drawingml/2006/main" xmlns:r="http://schemas.openxmlformats.org/officeDocument/2006/relationships" xmlns:p="http://schemas.openxmlformats.org/presentationml/2006/main">
+  <p:cSld>
+    <p:spTree>
+      <p:nvGrpSpPr>
+        <p:cNvPr id="1" name=""/>
+        <p:cNvGrpSpPr/>
+        <p:nvPr/>
+      </p:nvGrpSpPr>
+      <p:grpSpPr/>
+      <p:pic>
+        <p:nvPicPr>
+          <p:cNvPr id="10241" name="图片 3"/>
+          <p:cNvPicPr>
+            <a:picLocks noChangeAspect="1"/>
+          </p:cNvPicPr>
+          <p:nvPr/>
+        </p:nvPicPr>
+        <p:blipFill>
+          <a:blip r:embed="rId1"/>
+          <a:srcRect l="5727" r="16841" b="26530"/>
+          <a:stretch>
+            <a:fillRect/>
+          </a:stretch>
+        </p:blipFill>
+        <p:spPr>
+          <a:xfrm>
+            <a:off x="0" y="0"/>
+            <a:ext cx="12192000" cy="6858000"/>
+          </a:xfrm>
+          <a:prstGeom prst="rect">
+            <a:avLst/>
+          </a:prstGeom>
+          <a:noFill/>
+          <a:ln w="9525">
+            <a:noFill/>
+          </a:ln>
+        </p:spPr>
+      </p:pic>
+      <p:sp>
+        <p:nvSpPr>
+          <p:cNvPr id="10250" name="文本框 28"/>
+          <p:cNvSpPr txBox="1"/>
+          <p:nvPr/>
+        </p:nvSpPr>
+        <p:spPr>
+          <a:xfrm>
+            <a:off x="1610360" y="405765"/>
+            <a:ext cx="7923530" cy="645160"/>
+          </a:xfrm>
+          <a:prstGeom prst="rect">
+            <a:avLst/>
+          </a:prstGeom>
+          <a:noFill/>
+          <a:ln w="9525">
+            <a:noFill/>
+          </a:ln>
+        </p:spPr>
+        <p:txBody>
+          <a:bodyPr wrap="square" anchor="t">
+            <a:spAutoFit/>
+          </a:bodyPr>
+          <a:p>
+            <a:pPr>
+              <a:buFont typeface="Arial" panose="020B0604020202090204" pitchFamily="34" charset="0"/>
+            </a:pPr>
+            <a:r>
+              <a:rPr lang="en-US" altLang="en-US" sz="3600" b="1" dirty="0">
+                <a:solidFill>
+                  <a:srgbClr val="404040"/>
+                </a:solidFill>
+                <a:ea typeface="Calibri" panose="020F0502020204030204" pitchFamily="34" charset="0"/>
+              </a:rPr>
+              <a:t>Final Product</a:t>
+            </a:r>
+            <a:endParaRPr lang="en-US" altLang="en-US" sz="3600" b="1" dirty="0">
+              <a:solidFill>
+                <a:srgbClr val="404040"/>
+              </a:solidFill>
+              <a:ea typeface="Calibri" panose="020F0502020204030204" pitchFamily="34" charset="0"/>
+            </a:endParaRPr>
+          </a:p>
+        </p:txBody>
+      </p:sp>
+      <p:sp>
+        <p:nvSpPr>
+          <p:cNvPr id="12" name="矩形 11"/>
+          <p:cNvSpPr/>
+          <p:nvPr/>
+        </p:nvSpPr>
+        <p:spPr>
+          <a:xfrm>
+            <a:off x="828675" y="1729105"/>
+            <a:ext cx="10515600" cy="4653280"/>
+          </a:xfrm>
+          <a:prstGeom prst="rect">
+            <a:avLst/>
+          </a:prstGeom>
+          <a:noFill/>
+          <a:ln>
+            <a:solidFill>
+              <a:schemeClr val="tx1"/>
+            </a:solidFill>
+          </a:ln>
+        </p:spPr>
+        <p:style>
+          <a:lnRef idx="2">
+            <a:schemeClr val="accent1">
+              <a:shade val="50000"/>
+            </a:schemeClr>
+          </a:lnRef>
+          <a:fillRef idx="1">
+            <a:schemeClr val="accent1"/>
+          </a:fillRef>
+          <a:effectRef idx="0">
+            <a:schemeClr val="accent1"/>
+          </a:effectRef>
+          <a:fontRef idx="minor">
+            <a:schemeClr val="lt1"/>
+          </a:fontRef>
+        </p:style>
+        <p:txBody>
+          <a:bodyPr anchor="ctr"/>
+          <a:lstStyle/>
+          <a:p>
+            <a:pPr marL="0" marR="0" lvl="0" indent="0" algn="ctr" defTabSz="914400" rtl="0" eaLnBrk="1" fontAlgn="auto" latinLnBrk="0" hangingPunct="1">
+              <a:lnSpc>
+                <a:spcPct val="100000"/>
+              </a:lnSpc>
+              <a:spcBef>
+                <a:spcPts val="0"/>
+              </a:spcBef>
+              <a:spcAft>
+                <a:spcPts val="0"/>
+              </a:spcAft>
+              <a:buClrTx/>
+              <a:buSzTx/>
+              <a:buFontTx/>
+              <a:buNone/>
+              <a:defRPr/>
+            </a:pPr>
+            <a:endParaRPr kumimoji="0" lang="zh-CN" altLang="en-US" sz="1800" b="0" i="0" u="none" strike="noStrike" kern="1200" cap="none" spc="0" normalizeH="0" baseline="0" noProof="0">
+              <a:ln>
+                <a:noFill/>
+              </a:ln>
+              <a:solidFill>
+                <a:schemeClr val="lt1"/>
+              </a:solidFill>
+              <a:effectLst/>
+              <a:uLnTx/>
+              <a:uFillTx/>
+              <a:latin typeface="+mn-lt"/>
+              <a:ea typeface="+mn-ea"/>
+              <a:cs typeface="+mn-cs"/>
+            </a:endParaRPr>
+          </a:p>
+        </p:txBody>
+      </p:sp>
+      <p:sp>
+        <p:nvSpPr>
+          <p:cNvPr id="10253" name="文本框 6"/>
+          <p:cNvSpPr txBox="1"/>
+          <p:nvPr/>
+        </p:nvSpPr>
+        <p:spPr>
+          <a:xfrm>
+            <a:off x="956945" y="1729105"/>
+            <a:ext cx="9671685" cy="929640"/>
+          </a:xfrm>
+          <a:prstGeom prst="rect">
+            <a:avLst/>
+          </a:prstGeom>
+          <a:noFill/>
+          <a:ln w="9525">
+            <a:noFill/>
+          </a:ln>
+        </p:spPr>
+        <p:txBody>
+          <a:bodyPr wrap="square" anchor="t">
+            <a:noAutofit/>
+          </a:bodyPr>
+          <a:p>
+            <a:pPr>
+              <a:buFont typeface="Arial" panose="020B0604020202090204" pitchFamily="34" charset="0"/>
+            </a:pPr>
+            <a:endParaRPr lang="en-US" altLang="en-US" sz="3200" b="1" dirty="0">
+              <a:solidFill>
+                <a:srgbClr val="404040"/>
+              </a:solidFill>
+              <a:ea typeface="Calibri" panose="020F0502020204030204" pitchFamily="34" charset="0"/>
+            </a:endParaRPr>
+          </a:p>
+        </p:txBody>
+      </p:sp>
+      <p:sp>
+        <p:nvSpPr>
+          <p:cNvPr id="10255" name="矩形 8"/>
+          <p:cNvSpPr/>
+          <p:nvPr/>
+        </p:nvSpPr>
+        <p:spPr>
+          <a:xfrm>
+            <a:off x="1082675" y="2760980"/>
+            <a:ext cx="9545955" cy="2324735"/>
+          </a:xfrm>
+          <a:prstGeom prst="rect">
+            <a:avLst/>
+          </a:prstGeom>
+          <a:noFill/>
+          <a:ln w="9525">
+            <a:noFill/>
+          </a:ln>
+        </p:spPr>
+        <p:txBody>
+          <a:bodyPr wrap="square" lIns="0" tIns="0" rIns="0" bIns="0" anchor="t">
+            <a:spAutoFit/>
+          </a:bodyPr>
+          <a:p>
+            <a:pPr marL="457200" lvl="1" indent="457200" algn="l" defTabSz="1216025">
+              <a:lnSpc>
+                <a:spcPct val="90000"/>
+              </a:lnSpc>
+              <a:spcBef>
+                <a:spcPct val="20000"/>
+              </a:spcBef>
+              <a:buFont typeface="Arial" panose="020B0604020202090204" pitchFamily="34" charset="0"/>
+            </a:pPr>
+            <a:r>
+              <a:rPr lang="en-US" altLang="en-US" sz="2400" dirty="0">
+                <a:solidFill>
+                  <a:srgbClr val="404040"/>
+                </a:solidFill>
+                <a:ea typeface="Calibri" panose="020F0502020204030204" pitchFamily="34" charset="0"/>
+                <a:sym typeface="Arial" panose="020B0604020202090204" pitchFamily="34" charset="0"/>
+              </a:rPr>
+              <a:t>Once all the issues in the feedback are addressed and the prototype has lived up to expectations, the team proceeds with creating the final system. The final system includes all the technical requirements like a secure database, interface-friendly interface, and full functionality. The final product is now ready to be fully deployed in the hospital environment to enhance patient care and administrative effectiveness.</a:t>
+            </a:r>
+            <a:endParaRPr lang="en-US" altLang="en-US" sz="2400" dirty="0">
+              <a:solidFill>
+                <a:srgbClr val="404040"/>
+              </a:solidFill>
+              <a:ea typeface="Calibri" panose="020F0502020204030204" pitchFamily="34" charset="0"/>
+              <a:sym typeface="Arial" panose="020B0604020202090204" pitchFamily="34" charset="0"/>
+            </a:endParaRPr>
+          </a:p>
+        </p:txBody>
+      </p:sp>
+    </p:spTree>
+  </p:cSld>
+  <p:clrMapOvr>
+    <a:masterClrMapping/>
+  </p:clrMapOvr>
+  <p:transition spd="slow">
+    <p:wipe/>
+  </p:transition>
+</p:sld>
+</file>
+
+<file path=ppt/slides/slide16.xml><?xml version="1.0" encoding="utf-8"?>
+<p:sld xmlns:a="http://schemas.openxmlformats.org/drawingml/2006/main" xmlns:r="http://schemas.openxmlformats.org/officeDocument/2006/relationships" xmlns:p="http://schemas.openxmlformats.org/presentationml/2006/main">
+  <p:cSld>
+    <p:spTree>
+      <p:nvGrpSpPr>
+        <p:cNvPr id="1" name=""/>
+        <p:cNvGrpSpPr/>
+        <p:nvPr/>
+      </p:nvGrpSpPr>
+      <p:grpSpPr/>
+      <p:pic>
+        <p:nvPicPr>
+          <p:cNvPr id="10241" name="图片 3"/>
+          <p:cNvPicPr>
+            <a:picLocks noChangeAspect="1"/>
+          </p:cNvPicPr>
+          <p:nvPr/>
+        </p:nvPicPr>
+        <p:blipFill>
+          <a:blip r:embed="rId1"/>
+          <a:srcRect l="5727" r="16841" b="26530"/>
+          <a:stretch>
+            <a:fillRect/>
+          </a:stretch>
+        </p:blipFill>
+        <p:spPr>
+          <a:xfrm>
+            <a:off x="0" y="0"/>
+            <a:ext cx="12192000" cy="6858000"/>
+          </a:xfrm>
+          <a:prstGeom prst="rect">
+            <a:avLst/>
+          </a:prstGeom>
+          <a:noFill/>
+          <a:ln w="9525">
+            <a:noFill/>
+          </a:ln>
+        </p:spPr>
+      </p:pic>
+      <p:sp>
+        <p:nvSpPr>
+          <p:cNvPr id="10250" name="文本框 28"/>
+          <p:cNvSpPr txBox="1"/>
+          <p:nvPr/>
+        </p:nvSpPr>
+        <p:spPr>
+          <a:xfrm>
+            <a:off x="1610360" y="405765"/>
+            <a:ext cx="7923530" cy="645160"/>
+          </a:xfrm>
+          <a:prstGeom prst="rect">
+            <a:avLst/>
+          </a:prstGeom>
+          <a:noFill/>
+          <a:ln w="9525">
+            <a:noFill/>
+          </a:ln>
+        </p:spPr>
+        <p:txBody>
+          <a:bodyPr wrap="square" anchor="t">
+            <a:spAutoFit/>
+          </a:bodyPr>
+          <a:p>
+            <a:pPr>
+              <a:buFont typeface="Arial" panose="020B0604020202090204" pitchFamily="34" charset="0"/>
+            </a:pPr>
+            <a:r>
+              <a:rPr lang="en-US" altLang="en-US" sz="3600" b="1" dirty="0">
+                <a:solidFill>
+                  <a:srgbClr val="404040"/>
+                </a:solidFill>
+                <a:ea typeface="Calibri" panose="020F0502020204030204" pitchFamily="34" charset="0"/>
+              </a:rPr>
+              <a:t>Conclusion</a:t>
+            </a:r>
+            <a:endParaRPr lang="en-US" altLang="en-US" sz="3600" b="1" dirty="0">
+              <a:solidFill>
+                <a:srgbClr val="404040"/>
+              </a:solidFill>
+              <a:ea typeface="Calibri" panose="020F0502020204030204" pitchFamily="34" charset="0"/>
+            </a:endParaRPr>
+          </a:p>
+        </p:txBody>
+      </p:sp>
+      <p:sp>
+        <p:nvSpPr>
+          <p:cNvPr id="12" name="矩形 11"/>
+          <p:cNvSpPr/>
+          <p:nvPr/>
+        </p:nvSpPr>
+        <p:spPr>
+          <a:xfrm>
+            <a:off x="828675" y="247650"/>
+            <a:ext cx="10515600" cy="6134735"/>
+          </a:xfrm>
+          <a:prstGeom prst="rect">
+            <a:avLst/>
+          </a:prstGeom>
+          <a:noFill/>
+          <a:ln>
+            <a:solidFill>
+              <a:schemeClr val="tx1"/>
+            </a:solidFill>
+          </a:ln>
+        </p:spPr>
+        <p:style>
+          <a:lnRef idx="2">
+            <a:schemeClr val="accent1">
+              <a:shade val="50000"/>
+            </a:schemeClr>
+          </a:lnRef>
+          <a:fillRef idx="1">
+            <a:schemeClr val="accent1"/>
+          </a:fillRef>
+          <a:effectRef idx="0">
+            <a:schemeClr val="accent1"/>
+          </a:effectRef>
+          <a:fontRef idx="minor">
+            <a:schemeClr val="lt1"/>
+          </a:fontRef>
+        </p:style>
+        <p:txBody>
+          <a:bodyPr anchor="ctr"/>
+          <a:lstStyle/>
+          <a:p>
+            <a:pPr marL="0" marR="0" lvl="0" indent="0" algn="ctr" defTabSz="914400" rtl="0" eaLnBrk="1" fontAlgn="auto" latinLnBrk="0" hangingPunct="1">
+              <a:lnSpc>
+                <a:spcPct val="100000"/>
+              </a:lnSpc>
+              <a:spcBef>
+                <a:spcPts val="0"/>
+              </a:spcBef>
+              <a:spcAft>
+                <a:spcPts val="0"/>
+              </a:spcAft>
+              <a:buClrTx/>
+              <a:buSzTx/>
+              <a:buFontTx/>
+              <a:buNone/>
+              <a:defRPr/>
+            </a:pPr>
+            <a:endParaRPr kumimoji="0" lang="zh-CN" altLang="en-US" sz="1800" b="0" i="0" u="none" strike="noStrike" kern="1200" cap="none" spc="0" normalizeH="0" baseline="0" noProof="0">
+              <a:ln>
+                <a:noFill/>
+              </a:ln>
+              <a:solidFill>
+                <a:schemeClr val="lt1"/>
+              </a:solidFill>
+              <a:effectLst/>
+              <a:uLnTx/>
+              <a:uFillTx/>
+              <a:latin typeface="+mn-lt"/>
+              <a:ea typeface="+mn-ea"/>
+              <a:cs typeface="+mn-cs"/>
+            </a:endParaRPr>
+          </a:p>
+        </p:txBody>
+      </p:sp>
+      <p:sp>
+        <p:nvSpPr>
+          <p:cNvPr id="10253" name="文本框 6"/>
+          <p:cNvSpPr txBox="1"/>
+          <p:nvPr/>
+        </p:nvSpPr>
+        <p:spPr>
+          <a:xfrm>
+            <a:off x="956945" y="1356995"/>
+            <a:ext cx="10119360" cy="4553585"/>
+          </a:xfrm>
+          <a:prstGeom prst="rect">
+            <a:avLst/>
+          </a:prstGeom>
+          <a:noFill/>
+          <a:ln w="9525">
+            <a:noFill/>
+          </a:ln>
+        </p:spPr>
+        <p:txBody>
+          <a:bodyPr wrap="square" anchor="t">
+            <a:noAutofit/>
+          </a:bodyPr>
+          <a:p>
+            <a:pPr indent="457200">
+              <a:buFont typeface="Arial" panose="020B0604020202090204" pitchFamily="34" charset="0"/>
+            </a:pPr>
+            <a:r>
+              <a:rPr lang="en-US" altLang="en-US" sz="2800" dirty="0">
+                <a:solidFill>
+                  <a:srgbClr val="404040"/>
+                </a:solidFill>
+                <a:ea typeface="Calibri" panose="020F0502020204030204" pitchFamily="34" charset="0"/>
+              </a:rPr>
+              <a:t>Using the </a:t>
+            </a:r>
+            <a:r>
+              <a:rPr lang="en-US" altLang="en-US" sz="2800" b="1" dirty="0">
+                <a:solidFill>
+                  <a:srgbClr val="404040"/>
+                </a:solidFill>
+                <a:ea typeface="Calibri" panose="020F0502020204030204" pitchFamily="34" charset="0"/>
+              </a:rPr>
+              <a:t>Prototype Model</a:t>
+            </a:r>
+            <a:r>
+              <a:rPr lang="en-US" altLang="en-US" sz="2800" dirty="0">
+                <a:solidFill>
+                  <a:srgbClr val="404040"/>
+                </a:solidFill>
+                <a:ea typeface="Calibri" panose="020F0502020204030204" pitchFamily="34" charset="0"/>
+              </a:rPr>
+              <a:t> helped the team quickly build a basic hospital system with patient registration, appointment scheduling, and billing features. Doctors, nurses, and admin staff tested it and gave feedback early on. Thanks to their suggestions, the system could be improved before making the final version. This way, the developers made sure the system fits real hospital needs and avoided bigger problems later.</a:t>
+            </a:r>
+            <a:endParaRPr lang="en-US" altLang="en-US" sz="2800" dirty="0">
+              <a:solidFill>
+                <a:srgbClr val="404040"/>
+              </a:solidFill>
+              <a:ea typeface="Calibri" panose="020F0502020204030204" pitchFamily="34" charset="0"/>
+            </a:endParaRPr>
+          </a:p>
+          <a:p>
+            <a:pPr indent="457200">
+              <a:buFont typeface="Arial" panose="020B0604020202090204" pitchFamily="34" charset="0"/>
+            </a:pPr>
+            <a:endParaRPr lang="en-US" altLang="en-US" sz="2800" dirty="0">
+              <a:solidFill>
+                <a:srgbClr val="404040"/>
+              </a:solidFill>
+              <a:ea typeface="Calibri" panose="020F0502020204030204" pitchFamily="34" charset="0"/>
+            </a:endParaRPr>
+          </a:p>
+          <a:p>
+            <a:pPr indent="457200">
+              <a:buFont typeface="Arial" panose="020B0604020202090204" pitchFamily="34" charset="0"/>
+            </a:pPr>
+            <a:r>
+              <a:rPr lang="en-US" altLang="en-US" sz="2800" b="1" dirty="0">
+                <a:solidFill>
+                  <a:srgbClr val="404040"/>
+                </a:solidFill>
+                <a:ea typeface="Calibri" panose="020F0502020204030204" pitchFamily="34" charset="0"/>
+              </a:rPr>
+              <a:t>The Prototype Model</a:t>
+            </a:r>
+            <a:r>
+              <a:rPr lang="en-US" altLang="en-US" sz="2800" dirty="0">
+                <a:solidFill>
+                  <a:srgbClr val="404040"/>
+                </a:solidFill>
+                <a:ea typeface="Calibri" panose="020F0502020204030204" pitchFamily="34" charset="0"/>
+              </a:rPr>
+              <a:t> made the whole process smoother and helped create a system that’s more useful and ready for real use.</a:t>
+            </a:r>
+            <a:endParaRPr lang="en-US" altLang="en-US" sz="2800" dirty="0">
+              <a:solidFill>
+                <a:srgbClr val="404040"/>
+              </a:solidFill>
+              <a:ea typeface="Calibri" panose="020F0502020204030204" pitchFamily="34" charset="0"/>
+            </a:endParaRPr>
+          </a:p>
+        </p:txBody>
+      </p:sp>
+    </p:spTree>
+  </p:cSld>
+  <p:clrMapOvr>
+    <a:masterClrMapping/>
+  </p:clrMapOvr>
+  <p:transition spd="slow">
+    <p:wipe/>
+  </p:transition>
+</p:sld>
+</file>
+
+<file path=ppt/slides/slide17.xml><?xml version="1.0" encoding="utf-8"?>
 <p:sld xmlns:a="http://schemas.openxmlformats.org/drawingml/2006/main" xmlns:r="http://schemas.openxmlformats.org/officeDocument/2006/relationships" xmlns:p="http://schemas.openxmlformats.org/presentationml/2006/main">
   <p:cSld>
     <p:spTree>
@@ -5520,8 +6212,8 @@
         </p:nvSpPr>
         <p:spPr>
           <a:xfrm>
-            <a:off x="1610360" y="405765"/>
-            <a:ext cx="7923530" cy="645160"/>
+            <a:off x="3450590" y="329565"/>
+            <a:ext cx="4799330" cy="946785"/>
           </a:xfrm>
           <a:prstGeom prst="rect">
             <a:avLst/>
@@ -5533,22 +6225,13 @@
         </p:spPr>
         <p:txBody>
           <a:bodyPr wrap="square" anchor="t">
-            <a:spAutoFit/>
+            <a:noAutofit/>
           </a:bodyPr>
           <a:p>
             <a:pPr>
               <a:buFont typeface="Arial" panose="020B0604020202090204" pitchFamily="34" charset="0"/>
             </a:pPr>
-            <a:r>
-              <a:rPr lang="en-US" altLang="en-US" sz="3600" b="1" dirty="0">
-                <a:solidFill>
-                  <a:srgbClr val="404040"/>
-                </a:solidFill>
-                <a:ea typeface="Calibri" panose="020F0502020204030204" pitchFamily="34" charset="0"/>
-              </a:rPr>
-              <a:t>Design</a:t>
-            </a:r>
-            <a:endParaRPr lang="en-US" altLang="en-US" sz="3600" b="1" dirty="0">
+            <a:endParaRPr lang="en-US" altLang="en-US" sz="3200" b="1" dirty="0">
               <a:solidFill>
                 <a:srgbClr val="404040"/>
               </a:solidFill>
@@ -5565,8 +6248,8 @@
         </p:nvSpPr>
         <p:spPr>
           <a:xfrm>
-            <a:off x="828675" y="1729105"/>
-            <a:ext cx="10515600" cy="4653280"/>
+            <a:off x="255905" y="329565"/>
+            <a:ext cx="11500485" cy="6132195"/>
           </a:xfrm>
           <a:prstGeom prst="rect">
             <a:avLst/>
@@ -5633,14 +6316,14 @@
       </p:sp>
       <p:sp>
         <p:nvSpPr>
-          <p:cNvPr id="10253" name="文本框 6"/>
+          <p:cNvPr id="2" name="文本框 28"/>
           <p:cNvSpPr txBox="1"/>
           <p:nvPr/>
         </p:nvSpPr>
         <p:spPr>
           <a:xfrm>
-            <a:off x="956945" y="1729105"/>
-            <a:ext cx="9671685" cy="929640"/>
+            <a:off x="956310" y="1156335"/>
+            <a:ext cx="3625850" cy="645160"/>
           </a:xfrm>
           <a:prstGeom prst="rect">
             <a:avLst/>
@@ -5652,22 +6335,22 @@
         </p:spPr>
         <p:txBody>
           <a:bodyPr wrap="square" anchor="t">
-            <a:noAutofit/>
+            <a:spAutoFit/>
           </a:bodyPr>
           <a:p>
             <a:pPr>
               <a:buFont typeface="Arial" panose="020B0604020202090204" pitchFamily="34" charset="0"/>
             </a:pPr>
             <a:r>
-              <a:rPr lang="en-US" altLang="en-US" sz="3200" b="1" dirty="0">
+              <a:rPr lang="en-US" altLang="en-US" sz="3600" b="1" dirty="0">
                 <a:solidFill>
                   <a:srgbClr val="404040"/>
                 </a:solidFill>
                 <a:ea typeface="Calibri" panose="020F0502020204030204" pitchFamily="34" charset="0"/>
               </a:rPr>
-              <a:t>The program follows 4 main functions:</a:t>
+              <a:t>Question 3:</a:t>
             </a:r>
-            <a:endParaRPr lang="en-US" altLang="en-US" sz="3200" b="1" dirty="0">
+            <a:endParaRPr lang="en-US" altLang="en-US" sz="3600" b="1" dirty="0">
               <a:solidFill>
                 <a:srgbClr val="404040"/>
               </a:solidFill>
@@ -5678,14 +6361,14 @@
       </p:sp>
       <p:sp>
         <p:nvSpPr>
-          <p:cNvPr id="10255" name="矩形 8"/>
-          <p:cNvSpPr/>
+          <p:cNvPr id="3" name="文本框 28"/>
+          <p:cNvSpPr txBox="1"/>
           <p:nvPr/>
         </p:nvSpPr>
         <p:spPr>
           <a:xfrm>
-            <a:off x="1082675" y="3111500"/>
-            <a:ext cx="9545955" cy="2361565"/>
+            <a:off x="1489075" y="2251710"/>
+            <a:ext cx="8722360" cy="2823845"/>
           </a:xfrm>
           <a:prstGeom prst="rect">
             <a:avLst/>
@@ -5696,175 +6379,27 @@
           </a:ln>
         </p:spPr>
         <p:txBody>
-          <a:bodyPr wrap="square" lIns="0" tIns="0" rIns="0" bIns="0" anchor="t">
-            <a:spAutoFit/>
+          <a:bodyPr wrap="square" anchor="t">
+            <a:noAutofit/>
           </a:bodyPr>
           <a:p>
-            <a:pPr marL="457200" lvl="1" indent="457200" algn="l" defTabSz="1216025">
-              <a:lnSpc>
-                <a:spcPct val="90000"/>
-              </a:lnSpc>
-              <a:spcBef>
-                <a:spcPct val="20000"/>
-              </a:spcBef>
+            <a:pPr indent="457200">
               <a:buFont typeface="Arial" panose="020B0604020202090204" pitchFamily="34" charset="0"/>
             </a:pPr>
             <a:r>
-              <a:rPr lang="en-US" altLang="en-US" sz="2400" dirty="0">
+              <a:rPr lang="en-US" altLang="en-US" sz="3600" b="1" dirty="0">
                 <a:solidFill>
                   <a:srgbClr val="404040"/>
                 </a:solidFill>
                 <a:ea typeface="Calibri" panose="020F0502020204030204" pitchFamily="34" charset="0"/>
-                <a:sym typeface="Arial" panose="020B0604020202090204" pitchFamily="34" charset="0"/>
               </a:rPr>
-              <a:t>A simple layout/mockup is created.</a:t>
+              <a:t>Write a Spring Boot controller that accepts a POST request at /register with a JSON body containing name and email, and returns a confirmation message.</a:t>
             </a:r>
-            <a:endParaRPr lang="en-US" altLang="en-US" sz="2400" dirty="0">
+            <a:endParaRPr lang="en-US" altLang="en-US" sz="3600" b="1" dirty="0">
               <a:solidFill>
                 <a:srgbClr val="404040"/>
               </a:solidFill>
               <a:ea typeface="Calibri" panose="020F0502020204030204" pitchFamily="34" charset="0"/>
-              <a:sym typeface="Arial" panose="020B0604020202090204" pitchFamily="34" charset="0"/>
-            </a:endParaRPr>
-          </a:p>
-          <a:p>
-            <a:pPr marL="457200" lvl="1" indent="457200" algn="l" defTabSz="1216025">
-              <a:lnSpc>
-                <a:spcPct val="90000"/>
-              </a:lnSpc>
-              <a:spcBef>
-                <a:spcPct val="20000"/>
-              </a:spcBef>
-              <a:buFont typeface="Arial" panose="020B0604020202090204" pitchFamily="34" charset="0"/>
-            </a:pPr>
-            <a:endParaRPr lang="en-US" altLang="en-US" sz="2400" b="1" dirty="0">
-              <a:solidFill>
-                <a:srgbClr val="404040"/>
-              </a:solidFill>
-              <a:ea typeface="Calibri" panose="020F0502020204030204" pitchFamily="34" charset="0"/>
-              <a:sym typeface="Arial" panose="020B0604020202090204" pitchFamily="34" charset="0"/>
-            </a:endParaRPr>
-          </a:p>
-          <a:p>
-            <a:pPr marL="457200" lvl="1" indent="457200" algn="l" defTabSz="1216025">
-              <a:lnSpc>
-                <a:spcPct val="90000"/>
-              </a:lnSpc>
-              <a:spcBef>
-                <a:spcPct val="20000"/>
-              </a:spcBef>
-              <a:buFont typeface="Arial" panose="020B0604020202090204" pitchFamily="34" charset="0"/>
-            </a:pPr>
-            <a:r>
-              <a:rPr lang="en-US" altLang="en-US" sz="2400" b="1" dirty="0">
-                <a:solidFill>
-                  <a:srgbClr val="404040"/>
-                </a:solidFill>
-                <a:ea typeface="Calibri" panose="020F0502020204030204" pitchFamily="34" charset="0"/>
-                <a:sym typeface="Arial" panose="020B0604020202090204" pitchFamily="34" charset="0"/>
-              </a:rPr>
-              <a:t>Components:</a:t>
-            </a:r>
-            <a:endParaRPr lang="en-US" altLang="en-US" sz="2400" b="1" dirty="0">
-              <a:solidFill>
-                <a:srgbClr val="404040"/>
-              </a:solidFill>
-              <a:ea typeface="Calibri" panose="020F0502020204030204" pitchFamily="34" charset="0"/>
-              <a:sym typeface="Arial" panose="020B0604020202090204" pitchFamily="34" charset="0"/>
-            </a:endParaRPr>
-          </a:p>
-          <a:p>
-            <a:pPr marL="1371600" lvl="3" indent="457200" algn="l" defTabSz="1216025">
-              <a:lnSpc>
-                <a:spcPct val="90000"/>
-              </a:lnSpc>
-              <a:spcBef>
-                <a:spcPct val="20000"/>
-              </a:spcBef>
-              <a:buFont typeface="Arial" panose="020B0604020202090204" pitchFamily="34" charset="0"/>
-            </a:pPr>
-            <a:r>
-              <a:rPr lang="en-US" altLang="en-US" sz="2400" b="1" dirty="0">
-                <a:solidFill>
-                  <a:srgbClr val="404040"/>
-                </a:solidFill>
-                <a:ea typeface="Calibri" panose="020F0502020204030204" pitchFamily="34" charset="0"/>
-                <a:sym typeface="Arial" panose="020B0604020202090204" pitchFamily="34" charset="0"/>
-              </a:rPr>
-              <a:t>- </a:t>
-            </a:r>
-            <a:r>
-              <a:rPr lang="en-US" altLang="en-US" sz="2400" dirty="0">
-                <a:solidFill>
-                  <a:srgbClr val="404040"/>
-                </a:solidFill>
-                <a:ea typeface="Calibri" panose="020F0502020204030204" pitchFamily="34" charset="0"/>
-                <a:sym typeface="Arial" panose="020B0604020202090204" pitchFamily="34" charset="0"/>
-              </a:rPr>
-              <a:t>Patient Registration Form;</a:t>
-            </a:r>
-            <a:endParaRPr lang="en-US" altLang="en-US" sz="2400" dirty="0">
-              <a:solidFill>
-                <a:srgbClr val="404040"/>
-              </a:solidFill>
-              <a:ea typeface="Calibri" panose="020F0502020204030204" pitchFamily="34" charset="0"/>
-              <a:sym typeface="Arial" panose="020B0604020202090204" pitchFamily="34" charset="0"/>
-            </a:endParaRPr>
-          </a:p>
-          <a:p>
-            <a:pPr marL="1371600" lvl="3" indent="457200" algn="l" defTabSz="1216025">
-              <a:lnSpc>
-                <a:spcPct val="90000"/>
-              </a:lnSpc>
-              <a:spcBef>
-                <a:spcPct val="20000"/>
-              </a:spcBef>
-              <a:buFont typeface="Arial" panose="020B0604020202090204" pitchFamily="34" charset="0"/>
-            </a:pPr>
-            <a:r>
-              <a:rPr lang="en-US" altLang="en-US" sz="2400" dirty="0">
-                <a:solidFill>
-                  <a:srgbClr val="404040"/>
-                </a:solidFill>
-                <a:ea typeface="Calibri" panose="020F0502020204030204" pitchFamily="34" charset="0"/>
-                <a:sym typeface="Arial" panose="020B0604020202090204" pitchFamily="34" charset="0"/>
-              </a:rPr>
-              <a:t>- Appointment Calendar;</a:t>
-            </a:r>
-            <a:endParaRPr lang="en-US" altLang="en-US" sz="2400" dirty="0">
-              <a:solidFill>
-                <a:srgbClr val="404040"/>
-              </a:solidFill>
-              <a:ea typeface="Calibri" panose="020F0502020204030204" pitchFamily="34" charset="0"/>
-              <a:sym typeface="Arial" panose="020B0604020202090204" pitchFamily="34" charset="0"/>
-            </a:endParaRPr>
-          </a:p>
-          <a:p>
-            <a:pPr marL="1371600" lvl="3" indent="457200" algn="l" defTabSz="1216025">
-              <a:lnSpc>
-                <a:spcPct val="90000"/>
-              </a:lnSpc>
-              <a:spcBef>
-                <a:spcPct val="20000"/>
-              </a:spcBef>
-              <a:buFont typeface="Arial" panose="020B0604020202090204" pitchFamily="34" charset="0"/>
-            </a:pPr>
-            <a:r>
-              <a:rPr lang="en-US" altLang="en-US" sz="2400" dirty="0">
-                <a:solidFill>
-                  <a:srgbClr val="404040"/>
-                </a:solidFill>
-                <a:ea typeface="Calibri" panose="020F0502020204030204" pitchFamily="34" charset="0"/>
-                <a:sym typeface="Arial" panose="020B0604020202090204" pitchFamily="34" charset="0"/>
-              </a:rPr>
-              <a:t>- Dummy Billing Interface</a:t>
-            </a:r>
-            <a:endParaRPr lang="en-US" altLang="en-US" sz="2400" dirty="0">
-              <a:solidFill>
-                <a:srgbClr val="404040"/>
-              </a:solidFill>
-              <a:ea typeface="Calibri" panose="020F0502020204030204" pitchFamily="34" charset="0"/>
-              <a:sym typeface="Arial" panose="020B0604020202090204" pitchFamily="34" charset="0"/>
             </a:endParaRPr>
           </a:p>
         </p:txBody>
@@ -5927,8 +6462,8 @@
         </p:nvSpPr>
         <p:spPr>
           <a:xfrm>
-            <a:off x="1610360" y="405765"/>
-            <a:ext cx="7923530" cy="645160"/>
+            <a:off x="0" y="0"/>
+            <a:ext cx="1701800" cy="645160"/>
           </a:xfrm>
           <a:prstGeom prst="rect">
             <a:avLst/>
@@ -5953,7 +6488,7 @@
                 </a:solidFill>
                 <a:ea typeface="Calibri" panose="020F0502020204030204" pitchFamily="34" charset="0"/>
               </a:rPr>
-              <a:t>Build Prototype</a:t>
+              <a:t>Code</a:t>
             </a:r>
             <a:endParaRPr lang="en-US" altLang="en-US" sz="3600" b="1" dirty="0">
               <a:solidFill>
@@ -5964,90 +6499,88 @@
           </a:p>
         </p:txBody>
       </p:sp>
+      <p:pic>
+        <p:nvPicPr>
+          <p:cNvPr id="2" name="Picture 1" descr="Screenshot 2025-10-24 at 1.40.42 PM"/>
+          <p:cNvPicPr>
+            <a:picLocks noChangeAspect="1"/>
+          </p:cNvPicPr>
+          <p:nvPr/>
+        </p:nvPicPr>
+        <p:blipFill>
+          <a:blip r:embed="rId2"/>
+          <a:stretch>
+            <a:fillRect/>
+          </a:stretch>
+        </p:blipFill>
+        <p:spPr>
+          <a:xfrm>
+            <a:off x="193675" y="5276215"/>
+            <a:ext cx="9055735" cy="1294765"/>
+          </a:xfrm>
+          <a:prstGeom prst="rect">
+            <a:avLst/>
+          </a:prstGeom>
+        </p:spPr>
+      </p:pic>
+      <p:pic>
+        <p:nvPicPr>
+          <p:cNvPr id="3" name="Picture 2" descr="Screenshot 2025-10-24 at 1.42.15 PM"/>
+          <p:cNvPicPr>
+            <a:picLocks noChangeAspect="1"/>
+          </p:cNvPicPr>
+          <p:nvPr/>
+        </p:nvPicPr>
+        <p:blipFill>
+          <a:blip r:embed="rId3"/>
+          <a:stretch>
+            <a:fillRect/>
+          </a:stretch>
+        </p:blipFill>
+        <p:spPr>
+          <a:xfrm>
+            <a:off x="109220" y="645160"/>
+            <a:ext cx="5257800" cy="2957195"/>
+          </a:xfrm>
+          <a:prstGeom prst="rect">
+            <a:avLst/>
+          </a:prstGeom>
+        </p:spPr>
+      </p:pic>
+      <p:pic>
+        <p:nvPicPr>
+          <p:cNvPr id="4" name="Picture 3" descr="Screenshot 2025-10-24 at 1.42.52 PM"/>
+          <p:cNvPicPr>
+            <a:picLocks noChangeAspect="1"/>
+          </p:cNvPicPr>
+          <p:nvPr/>
+        </p:nvPicPr>
+        <p:blipFill>
+          <a:blip r:embed="rId4"/>
+          <a:stretch>
+            <a:fillRect/>
+          </a:stretch>
+        </p:blipFill>
+        <p:spPr>
+          <a:xfrm>
+            <a:off x="5629275" y="645160"/>
+            <a:ext cx="4203700" cy="2159000"/>
+          </a:xfrm>
+          <a:prstGeom prst="rect">
+            <a:avLst/>
+          </a:prstGeom>
+        </p:spPr>
+      </p:pic>
       <p:sp>
         <p:nvSpPr>
-          <p:cNvPr id="12" name="矩形 11"/>
+          <p:cNvPr id="5" name="矩形 8"/>
           <p:cNvSpPr/>
           <p:nvPr/>
         </p:nvSpPr>
         <p:spPr>
           <a:xfrm>
-            <a:off x="828675" y="1729105"/>
-            <a:ext cx="10515600" cy="4653280"/>
-          </a:xfrm>
-          <a:prstGeom prst="rect">
-            <a:avLst/>
-          </a:prstGeom>
-          <a:noFill/>
-          <a:ln>
-            <a:solidFill>
-              <a:schemeClr val="tx1"/>
-            </a:solidFill>
-          </a:ln>
-        </p:spPr>
-        <p:style>
-          <a:lnRef idx="2">
-            <a:schemeClr val="accent1">
-              <a:shade val="50000"/>
-            </a:schemeClr>
-          </a:lnRef>
-          <a:fillRef idx="1">
-            <a:schemeClr val="accent1"/>
-          </a:fillRef>
-          <a:effectRef idx="0">
-            <a:schemeClr val="accent1"/>
-          </a:effectRef>
-          <a:fontRef idx="minor">
-            <a:schemeClr val="lt1"/>
-          </a:fontRef>
-        </p:style>
-        <p:txBody>
-          <a:bodyPr anchor="ctr"/>
-          <a:lstStyle/>
-          <a:p>
-            <a:pPr marL="0" marR="0" lvl="0" indent="0" algn="ctr" defTabSz="914400" rtl="0" eaLnBrk="1" fontAlgn="auto" latinLnBrk="0" hangingPunct="1">
-              <a:lnSpc>
-                <a:spcPct val="100000"/>
-              </a:lnSpc>
-              <a:spcBef>
-                <a:spcPts val="0"/>
-              </a:spcBef>
-              <a:spcAft>
-                <a:spcPts val="0"/>
-              </a:spcAft>
-              <a:buClrTx/>
-              <a:buSzTx/>
-              <a:buFontTx/>
-              <a:buNone/>
-              <a:defRPr/>
-            </a:pPr>
-            <a:endParaRPr kumimoji="0" lang="zh-CN" altLang="en-US" sz="1800" b="0" i="0" u="none" strike="noStrike" kern="1200" cap="none" spc="0" normalizeH="0" baseline="0" noProof="0">
-              <a:ln>
-                <a:noFill/>
-              </a:ln>
-              <a:solidFill>
-                <a:schemeClr val="lt1"/>
-              </a:solidFill>
-              <a:effectLst/>
-              <a:uLnTx/>
-              <a:uFillTx/>
-              <a:latin typeface="+mn-lt"/>
-              <a:ea typeface="+mn-ea"/>
-              <a:cs typeface="+mn-cs"/>
-            </a:endParaRPr>
-          </a:p>
-        </p:txBody>
-      </p:sp>
-      <p:sp>
-        <p:nvSpPr>
-          <p:cNvPr id="10253" name="文本框 6"/>
-          <p:cNvSpPr txBox="1"/>
-          <p:nvPr/>
-        </p:nvSpPr>
-        <p:spPr>
-          <a:xfrm>
-            <a:off x="956945" y="1729105"/>
-            <a:ext cx="9671685" cy="929640"/>
+            <a:off x="1543050" y="290830"/>
+            <a:ext cx="2912110" cy="354330"/>
           </a:xfrm>
           <a:prstGeom prst="rect">
             <a:avLst/>
@@ -6058,56 +6591,11 @@
           </a:ln>
         </p:spPr>
         <p:txBody>
-          <a:bodyPr wrap="square" anchor="t">
-            <a:noAutofit/>
-          </a:bodyPr>
-          <a:p>
-            <a:pPr>
-              <a:buFont typeface="Arial" panose="020B0604020202090204" pitchFamily="34" charset="0"/>
-            </a:pPr>
-            <a:r>
-              <a:rPr lang="en-US" altLang="en-US" sz="3200" b="1" dirty="0">
-                <a:solidFill>
-                  <a:srgbClr val="404040"/>
-                </a:solidFill>
-                <a:ea typeface="Calibri" panose="020F0502020204030204" pitchFamily="34" charset="0"/>
-              </a:rPr>
-              <a:t>The program is written in Python and follows these steps:</a:t>
-            </a:r>
-            <a:endParaRPr lang="en-US" altLang="en-US" sz="3200" b="1" dirty="0">
-              <a:solidFill>
-                <a:srgbClr val="404040"/>
-              </a:solidFill>
-              <a:ea typeface="Calibri" panose="020F0502020204030204" pitchFamily="34" charset="0"/>
-            </a:endParaRPr>
-          </a:p>
-        </p:txBody>
-      </p:sp>
-      <p:sp>
-        <p:nvSpPr>
-          <p:cNvPr id="10255" name="矩形 8"/>
-          <p:cNvSpPr/>
-          <p:nvPr/>
-        </p:nvSpPr>
-        <p:spPr>
-          <a:xfrm>
-            <a:off x="1082675" y="3087370"/>
-            <a:ext cx="9545955" cy="1605280"/>
-          </a:xfrm>
-          <a:prstGeom prst="rect">
-            <a:avLst/>
-          </a:prstGeom>
-          <a:noFill/>
-          <a:ln w="9525">
-            <a:noFill/>
-          </a:ln>
-        </p:spPr>
-        <p:txBody>
           <a:bodyPr wrap="square" lIns="0" tIns="0" rIns="0" bIns="0" anchor="t">
             <a:noAutofit/>
           </a:bodyPr>
           <a:p>
-            <a:pPr marL="457200" lvl="1" indent="457200" algn="l" defTabSz="1216025">
+            <a:pPr indent="457200" algn="l" defTabSz="1216025">
               <a:lnSpc>
                 <a:spcPct val="90000"/>
               </a:lnSpc>
@@ -6117,16 +6605,16 @@
               <a:buFont typeface="Arial" panose="020B0604020202090204" pitchFamily="34" charset="0"/>
             </a:pPr>
             <a:r>
-              <a:rPr lang="en-US" altLang="en-US" sz="2400" dirty="0">
+              <a:rPr lang="en-US" altLang="en-US" sz="1800" dirty="0">
                 <a:solidFill>
                   <a:srgbClr val="404040"/>
                 </a:solidFill>
                 <a:ea typeface="Calibri" panose="020F0502020204030204" pitchFamily="34" charset="0"/>
                 <a:sym typeface="Arial" panose="020B0604020202090204" pitchFamily="34" charset="0"/>
               </a:rPr>
-              <a:t>- A working demo is coded (in Python).</a:t>
+              <a:t>Main controller code:</a:t>
             </a:r>
-            <a:endParaRPr lang="en-US" altLang="en-US" sz="2400" dirty="0">
+            <a:endParaRPr lang="en-US" altLang="en-US" sz="1800" dirty="0">
               <a:solidFill>
                 <a:srgbClr val="404040"/>
               </a:solidFill>
@@ -6134,8 +6622,33 @@
               <a:sym typeface="Arial" panose="020B0604020202090204" pitchFamily="34" charset="0"/>
             </a:endParaRPr>
           </a:p>
-          <a:p>
-            <a:pPr marL="457200" lvl="1" indent="457200" algn="l" defTabSz="1216025">
+        </p:txBody>
+      </p:sp>
+      <p:sp>
+        <p:nvSpPr>
+          <p:cNvPr id="6" name="矩形 8"/>
+          <p:cNvSpPr/>
+          <p:nvPr/>
+        </p:nvSpPr>
+        <p:spPr>
+          <a:xfrm>
+            <a:off x="5979795" y="290830"/>
+            <a:ext cx="3686175" cy="354330"/>
+          </a:xfrm>
+          <a:prstGeom prst="rect">
+            <a:avLst/>
+          </a:prstGeom>
+          <a:noFill/>
+          <a:ln w="9525">
+            <a:noFill/>
+          </a:ln>
+        </p:spPr>
+        <p:txBody>
+          <a:bodyPr wrap="square" lIns="0" tIns="0" rIns="0" bIns="0" anchor="t">
+            <a:noAutofit/>
+          </a:bodyPr>
+          <a:p>
+            <a:pPr indent="457200" algn="l" defTabSz="1216025">
               <a:lnSpc>
                 <a:spcPct val="90000"/>
               </a:lnSpc>
@@ -6145,16 +6658,16 @@
               <a:buFont typeface="Arial" panose="020B0604020202090204" pitchFamily="34" charset="0"/>
             </a:pPr>
             <a:r>
-              <a:rPr lang="en-US" altLang="en-US" sz="2400" dirty="0">
+              <a:rPr lang="en-US" altLang="en-US" sz="1800" dirty="0">
                 <a:solidFill>
                   <a:srgbClr val="404040"/>
                 </a:solidFill>
                 <a:ea typeface="Calibri" panose="020F0502020204030204" pitchFamily="34" charset="0"/>
                 <a:sym typeface="Arial" panose="020B0604020202090204" pitchFamily="34" charset="0"/>
               </a:rPr>
-              <a:t>(Used Libraries: FastAPI, PyDantic, SQLAlchemy)</a:t>
+              <a:t>Request DTO (Input validation)</a:t>
             </a:r>
-            <a:endParaRPr lang="en-US" altLang="en-US" sz="2400" dirty="0">
+            <a:endParaRPr lang="en-US" altLang="en-US" sz="1800" dirty="0">
               <a:solidFill>
                 <a:srgbClr val="404040"/>
               </a:solidFill>
@@ -6162,8 +6675,81 @@
               <a:sym typeface="Arial" panose="020B0604020202090204" pitchFamily="34" charset="0"/>
             </a:endParaRPr>
           </a:p>
-          <a:p>
-            <a:pPr marL="457200" lvl="1" indent="457200" algn="l" defTabSz="1216025">
+        </p:txBody>
+      </p:sp>
+      <p:pic>
+        <p:nvPicPr>
+          <p:cNvPr id="7" name="Picture 6" descr="Screenshot 2025-10-24 at 1.44.39 PM"/>
+          <p:cNvPicPr>
+            <a:picLocks noChangeAspect="1"/>
+          </p:cNvPicPr>
+          <p:nvPr/>
+        </p:nvPicPr>
+        <p:blipFill>
+          <a:blip r:embed="rId5"/>
+          <a:stretch>
+            <a:fillRect/>
+          </a:stretch>
+        </p:blipFill>
+        <p:spPr>
+          <a:xfrm>
+            <a:off x="844550" y="3429000"/>
+            <a:ext cx="4203065" cy="1741170"/>
+          </a:xfrm>
+          <a:prstGeom prst="rect">
+            <a:avLst/>
+          </a:prstGeom>
+        </p:spPr>
+      </p:pic>
+      <p:pic>
+        <p:nvPicPr>
+          <p:cNvPr id="10" name="Picture 9" descr="Screenshot 2025-10-24 at 1.45.32 PM"/>
+          <p:cNvPicPr>
+            <a:picLocks noChangeAspect="1"/>
+          </p:cNvPicPr>
+          <p:nvPr/>
+        </p:nvPicPr>
+        <p:blipFill>
+          <a:blip r:embed="rId6"/>
+          <a:stretch>
+            <a:fillRect/>
+          </a:stretch>
+        </p:blipFill>
+        <p:spPr>
+          <a:xfrm>
+            <a:off x="6094730" y="2633980"/>
+            <a:ext cx="4053205" cy="2642235"/>
+          </a:xfrm>
+          <a:prstGeom prst="rect">
+            <a:avLst/>
+          </a:prstGeom>
+        </p:spPr>
+      </p:pic>
+      <p:sp>
+        <p:nvSpPr>
+          <p:cNvPr id="11" name="矩形 8"/>
+          <p:cNvSpPr/>
+          <p:nvPr/>
+        </p:nvSpPr>
+        <p:spPr>
+          <a:xfrm>
+            <a:off x="109220" y="6600190"/>
+            <a:ext cx="11511280" cy="354330"/>
+          </a:xfrm>
+          <a:prstGeom prst="rect">
+            <a:avLst/>
+          </a:prstGeom>
+          <a:noFill/>
+          <a:ln w="9525">
+            <a:noFill/>
+          </a:ln>
+        </p:spPr>
+        <p:txBody>
+          <a:bodyPr wrap="square" lIns="0" tIns="0" rIns="0" bIns="0" anchor="t">
+            <a:noAutofit/>
+          </a:bodyPr>
+          <a:p>
+            <a:pPr indent="457200" algn="l" defTabSz="1216025">
               <a:lnSpc>
                 <a:spcPct val="90000"/>
               </a:lnSpc>
@@ -6173,16 +6759,16 @@
               <a:buFont typeface="Arial" panose="020B0604020202090204" pitchFamily="34" charset="0"/>
             </a:pPr>
             <a:r>
-              <a:rPr lang="en-US" altLang="en-US" sz="2400" dirty="0">
+              <a:rPr lang="en-US" altLang="en-US" sz="1400" dirty="0">
                 <a:solidFill>
                   <a:srgbClr val="404040"/>
                 </a:solidFill>
                 <a:ea typeface="Calibri" panose="020F0502020204030204" pitchFamily="34" charset="0"/>
                 <a:sym typeface="Arial" panose="020B0604020202090204" pitchFamily="34" charset="0"/>
               </a:rPr>
-              <a:t>-	No real database or final design — just enough to test key functionality.</a:t>
+              <a:t>Here are all the codes for this application: https://github.com/McLight-Note/Web-Server-Programming/tree/main/Mid-term</a:t>
             </a:r>
-            <a:endParaRPr lang="en-US" altLang="en-US" sz="2400" dirty="0">
+            <a:endParaRPr lang="en-US" altLang="en-US" sz="1400" dirty="0">
               <a:solidFill>
                 <a:srgbClr val="404040"/>
               </a:solidFill>
@@ -6244,21 +6830,68 @@
       </p:pic>
       <p:sp>
         <p:nvSpPr>
+          <p:cNvPr id="10250" name="文本框 28"/>
+          <p:cNvSpPr txBox="1"/>
+          <p:nvPr/>
+        </p:nvSpPr>
+        <p:spPr>
+          <a:xfrm>
+            <a:off x="1610360" y="405765"/>
+            <a:ext cx="7923530" cy="645160"/>
+          </a:xfrm>
+          <a:prstGeom prst="rect">
+            <a:avLst/>
+          </a:prstGeom>
+          <a:noFill/>
+          <a:ln w="9525">
+            <a:noFill/>
+          </a:ln>
+        </p:spPr>
+        <p:txBody>
+          <a:bodyPr wrap="square" anchor="t">
+            <a:spAutoFit/>
+          </a:bodyPr>
+          <a:p>
+            <a:pPr>
+              <a:buFont typeface="Arial" panose="020B0604020202090204" pitchFamily="34" charset="0"/>
+            </a:pPr>
+            <a:r>
+              <a:rPr lang="en-US" altLang="en-US" sz="3600" b="1" dirty="0">
+                <a:solidFill>
+                  <a:srgbClr val="404040"/>
+                </a:solidFill>
+                <a:ea typeface="Calibri" panose="020F0502020204030204" pitchFamily="34" charset="0"/>
+              </a:rPr>
+              <a:t>Design</a:t>
+            </a:r>
+            <a:endParaRPr lang="en-US" altLang="en-US" sz="3600" b="1" dirty="0">
+              <a:solidFill>
+                <a:srgbClr val="404040"/>
+              </a:solidFill>
+              <a:ea typeface="Calibri" panose="020F0502020204030204" pitchFamily="34" charset="0"/>
+            </a:endParaRPr>
+          </a:p>
+        </p:txBody>
+      </p:sp>
+      <p:sp>
+        <p:nvSpPr>
           <p:cNvPr id="12" name="矩形 11"/>
           <p:cNvSpPr/>
           <p:nvPr/>
         </p:nvSpPr>
         <p:spPr>
           <a:xfrm>
-            <a:off x="0" y="0"/>
-            <a:ext cx="5006975" cy="1216025"/>
+            <a:off x="828675" y="1729105"/>
+            <a:ext cx="10515600" cy="4653280"/>
           </a:xfrm>
           <a:prstGeom prst="rect">
             <a:avLst/>
           </a:prstGeom>
           <a:noFill/>
           <a:ln>
-            <a:noFill/>
+            <a:solidFill>
+              <a:schemeClr val="tx1"/>
+            </a:solidFill>
           </a:ln>
         </p:spPr>
         <p:style>
@@ -6281,7 +6914,7 @@
           <a:bodyPr anchor="ctr"/>
           <a:lstStyle/>
           <a:p>
-            <a:pPr marL="0" marR="0" lvl="0" indent="0" algn="l" defTabSz="914400" rtl="0" eaLnBrk="1" fontAlgn="auto" latinLnBrk="0" hangingPunct="1">
+            <a:pPr marL="0" marR="0" lvl="0" indent="0" algn="ctr" defTabSz="914400" rtl="0" eaLnBrk="1" fontAlgn="auto" latinLnBrk="0" hangingPunct="1">
               <a:lnSpc>
                 <a:spcPct val="100000"/>
               </a:lnSpc>
@@ -6297,29 +6930,12 @@
               <a:buNone/>
               <a:defRPr/>
             </a:pPr>
-            <a:r>
-              <a:rPr kumimoji="0" lang="en-US" altLang="zh-CN" sz="3200" b="1" i="0" u="none" strike="noStrike" kern="1200" cap="none" spc="0" normalizeH="0" baseline="0" noProof="0">
-                <a:ln>
-                  <a:noFill/>
-                </a:ln>
-                <a:solidFill>
-                  <a:schemeClr val="tx1"/>
-                </a:solidFill>
-                <a:effectLst/>
-                <a:uLnTx/>
-                <a:uFillTx/>
-                <a:latin typeface="+mn-lt"/>
-                <a:ea typeface="+mn-ea"/>
-                <a:cs typeface="+mn-cs"/>
-              </a:rPr>
-              <a:t>CODE: INPUT</a:t>
-            </a:r>
-            <a:endParaRPr kumimoji="0" lang="en-US" altLang="zh-CN" sz="3200" b="1" i="0" u="none" strike="noStrike" kern="1200" cap="none" spc="0" normalizeH="0" baseline="0" noProof="0">
+            <a:endParaRPr kumimoji="0" lang="zh-CN" altLang="en-US" sz="1800" b="0" i="0" u="none" strike="noStrike" kern="1200" cap="none" spc="0" normalizeH="0" baseline="0" noProof="0">
               <a:ln>
                 <a:noFill/>
               </a:ln>
               <a:solidFill>
-                <a:schemeClr val="tx1"/>
+                <a:schemeClr val="lt1"/>
               </a:solidFill>
               <a:effectLst/>
               <a:uLnTx/>
@@ -6331,315 +6947,244 @@
           </a:p>
         </p:txBody>
       </p:sp>
-      <p:pic>
-        <p:nvPicPr>
-          <p:cNvPr id="4" name="Picture 3" descr="IMAGE 2025-04-29 13:30:34"/>
-          <p:cNvPicPr>
-            <a:picLocks noChangeAspect="1"/>
-          </p:cNvPicPr>
-          <p:nvPr/>
-        </p:nvPicPr>
-        <p:blipFill>
-          <a:blip r:embed="rId2"/>
-          <a:stretch>
-            <a:fillRect/>
-          </a:stretch>
-        </p:blipFill>
-        <p:spPr>
-          <a:xfrm>
-            <a:off x="156210" y="2794635"/>
-            <a:ext cx="5638800" cy="2824480"/>
-          </a:xfrm>
-          <a:prstGeom prst="rect">
-            <a:avLst/>
-          </a:prstGeom>
-        </p:spPr>
-      </p:pic>
-      <p:pic>
-        <p:nvPicPr>
-          <p:cNvPr id="5" name="Picture 4" descr="IMAGE 2025-04-29 13:32:44"/>
-          <p:cNvPicPr>
-            <a:picLocks noChangeAspect="1"/>
-          </p:cNvPicPr>
-          <p:nvPr/>
-        </p:nvPicPr>
-        <p:blipFill>
-          <a:blip r:embed="rId3"/>
-          <a:stretch>
-            <a:fillRect/>
-          </a:stretch>
-        </p:blipFill>
-        <p:spPr>
-          <a:xfrm>
-            <a:off x="2863215" y="156845"/>
-            <a:ext cx="6878955" cy="2235835"/>
-          </a:xfrm>
-          <a:prstGeom prst="rect">
-            <a:avLst/>
-          </a:prstGeom>
-        </p:spPr>
-      </p:pic>
-      <p:pic>
-        <p:nvPicPr>
-          <p:cNvPr id="6" name="Picture 5" descr="IMAGE 2025-04-29 13:33:19"/>
-          <p:cNvPicPr>
-            <a:picLocks noChangeAspect="1"/>
-          </p:cNvPicPr>
-          <p:nvPr/>
-        </p:nvPicPr>
-        <p:blipFill>
-          <a:blip r:embed="rId4"/>
-          <a:stretch>
-            <a:fillRect/>
-          </a:stretch>
-        </p:blipFill>
-        <p:spPr>
-          <a:xfrm>
-            <a:off x="5956300" y="2794635"/>
-            <a:ext cx="6058535" cy="2589530"/>
-          </a:xfrm>
-          <a:prstGeom prst="rect">
-            <a:avLst/>
-          </a:prstGeom>
-        </p:spPr>
-      </p:pic>
       <p:sp>
         <p:nvSpPr>
-          <p:cNvPr id="7" name="Rectangles 6"/>
-          <p:cNvSpPr/>
+          <p:cNvPr id="10253" name="文本框 6"/>
+          <p:cNvSpPr txBox="1"/>
           <p:nvPr/>
         </p:nvSpPr>
         <p:spPr>
           <a:xfrm>
-            <a:off x="10191750" y="387350"/>
-            <a:ext cx="1557020" cy="1584325"/>
-          </a:xfrm>
-          <a:prstGeom prst="rect">
-            <a:avLst/>
-          </a:prstGeom>
-        </p:spPr>
-        <p:style>
-          <a:lnRef idx="2">
-            <a:schemeClr val="accent1">
-              <a:lumMod val="75000"/>
-            </a:schemeClr>
-          </a:lnRef>
-          <a:fillRef idx="1">
-            <a:schemeClr val="accent1"/>
-          </a:fillRef>
-          <a:effectRef idx="0">
-            <a:srgbClr val="FFFFFF"/>
-          </a:effectRef>
-          <a:fontRef idx="minor">
-            <a:schemeClr val="lt1"/>
-          </a:fontRef>
-        </p:style>
+            <a:off x="956945" y="1729105"/>
+            <a:ext cx="9671685" cy="929640"/>
+          </a:xfrm>
+          <a:prstGeom prst="rect">
+            <a:avLst/>
+          </a:prstGeom>
+          <a:noFill/>
+          <a:ln w="9525">
+            <a:noFill/>
+          </a:ln>
+        </p:spPr>
         <p:txBody>
-          <a:bodyPr rtlCol="0" anchor="ctr"/>
-          <a:p>
-            <a:pPr algn="ctr"/>
+          <a:bodyPr wrap="square" anchor="t">
+            <a:noAutofit/>
+          </a:bodyPr>
+          <a:p>
+            <a:pPr>
+              <a:buFont typeface="Arial" panose="020B0604020202090204" pitchFamily="34" charset="0"/>
+            </a:pPr>
             <a:r>
-              <a:rPr lang="en-US"/>
-              <a:t>Adding Patients</a:t>
+              <a:rPr lang="en-US" altLang="en-US" sz="3200" b="1" dirty="0">
+                <a:solidFill>
+                  <a:srgbClr val="404040"/>
+                </a:solidFill>
+                <a:ea typeface="Calibri" panose="020F0502020204030204" pitchFamily="34" charset="0"/>
+              </a:rPr>
+              <a:t>The program follows 4 main functions:</a:t>
             </a:r>
-            <a:endParaRPr lang="en-US"/>
+            <a:endParaRPr lang="en-US" altLang="en-US" sz="3200" b="1" dirty="0">
+              <a:solidFill>
+                <a:srgbClr val="404040"/>
+              </a:solidFill>
+              <a:ea typeface="Calibri" panose="020F0502020204030204" pitchFamily="34" charset="0"/>
+            </a:endParaRPr>
           </a:p>
         </p:txBody>
       </p:sp>
-      <p:cxnSp>
-        <p:nvCxnSpPr>
-          <p:cNvPr id="8" name="Straight Arrow Connector 7"/>
-          <p:cNvCxnSpPr>
-            <a:stCxn id="7" idx="1"/>
-            <a:endCxn id="5" idx="3"/>
-          </p:cNvCxnSpPr>
-          <p:nvPr/>
-        </p:nvCxnSpPr>
-        <p:spPr>
-          <a:xfrm flipH="1">
-            <a:off x="9742170" y="1179830"/>
-            <a:ext cx="449580" cy="95250"/>
-          </a:xfrm>
-          <a:prstGeom prst="straightConnector1">
-            <a:avLst/>
-          </a:prstGeom>
-          <a:ln>
-            <a:tailEnd type="arrow"/>
-          </a:ln>
-        </p:spPr>
-        <p:style>
-          <a:lnRef idx="2">
-            <a:schemeClr val="accent1"/>
-          </a:lnRef>
-          <a:fillRef idx="0">
-            <a:srgbClr val="FFFFFF"/>
-          </a:fillRef>
-          <a:effectRef idx="0">
-            <a:srgbClr val="FFFFFF"/>
-          </a:effectRef>
-          <a:fontRef idx="minor">
-            <a:schemeClr val="tx1"/>
-          </a:fontRef>
-        </p:style>
-      </p:cxnSp>
       <p:sp>
         <p:nvSpPr>
-          <p:cNvPr id="9" name="Rectangles 8"/>
+          <p:cNvPr id="10255" name="矩形 8"/>
           <p:cNvSpPr/>
           <p:nvPr/>
         </p:nvSpPr>
         <p:spPr>
           <a:xfrm>
-            <a:off x="1781175" y="6021070"/>
-            <a:ext cx="2388870" cy="710565"/>
-          </a:xfrm>
-          <a:prstGeom prst="rect">
-            <a:avLst/>
-          </a:prstGeom>
-        </p:spPr>
-        <p:style>
-          <a:lnRef idx="2">
-            <a:schemeClr val="accent1">
-              <a:lumMod val="75000"/>
-            </a:schemeClr>
-          </a:lnRef>
-          <a:fillRef idx="1">
-            <a:schemeClr val="accent1"/>
-          </a:fillRef>
-          <a:effectRef idx="0">
-            <a:srgbClr val="FFFFFF"/>
-          </a:effectRef>
-          <a:fontRef idx="minor">
-            <a:schemeClr val="lt1"/>
-          </a:fontRef>
-        </p:style>
+            <a:off x="1082675" y="3111500"/>
+            <a:ext cx="9545955" cy="2361565"/>
+          </a:xfrm>
+          <a:prstGeom prst="rect">
+            <a:avLst/>
+          </a:prstGeom>
+          <a:noFill/>
+          <a:ln w="9525">
+            <a:noFill/>
+          </a:ln>
+        </p:spPr>
         <p:txBody>
-          <a:bodyPr rtlCol="0" anchor="ctr"/>
-          <a:p>
-            <a:pPr algn="ctr"/>
+          <a:bodyPr wrap="square" lIns="0" tIns="0" rIns="0" bIns="0" anchor="t">
+            <a:spAutoFit/>
+          </a:bodyPr>
+          <a:p>
+            <a:pPr marL="457200" lvl="1" indent="457200" algn="l" defTabSz="1216025">
+              <a:lnSpc>
+                <a:spcPct val="90000"/>
+              </a:lnSpc>
+              <a:spcBef>
+                <a:spcPct val="20000"/>
+              </a:spcBef>
+              <a:buFont typeface="Arial" panose="020B0604020202090204" pitchFamily="34" charset="0"/>
+            </a:pPr>
             <a:r>
-              <a:rPr lang="en-US"/>
-              <a:t>Patient Registration</a:t>
+              <a:rPr lang="en-US" altLang="en-US" sz="2400" dirty="0">
+                <a:solidFill>
+                  <a:srgbClr val="404040"/>
+                </a:solidFill>
+                <a:ea typeface="Calibri" panose="020F0502020204030204" pitchFamily="34" charset="0"/>
+                <a:sym typeface="Arial" panose="020B0604020202090204" pitchFamily="34" charset="0"/>
+              </a:rPr>
+              <a:t>A simple layout/mockup is created.</a:t>
             </a:r>
-            <a:endParaRPr lang="en-US"/>
+            <a:endParaRPr lang="en-US" altLang="en-US" sz="2400" dirty="0">
+              <a:solidFill>
+                <a:srgbClr val="404040"/>
+              </a:solidFill>
+              <a:ea typeface="Calibri" panose="020F0502020204030204" pitchFamily="34" charset="0"/>
+              <a:sym typeface="Arial" panose="020B0604020202090204" pitchFamily="34" charset="0"/>
+            </a:endParaRPr>
+          </a:p>
+          <a:p>
+            <a:pPr marL="457200" lvl="1" indent="457200" algn="l" defTabSz="1216025">
+              <a:lnSpc>
+                <a:spcPct val="90000"/>
+              </a:lnSpc>
+              <a:spcBef>
+                <a:spcPct val="20000"/>
+              </a:spcBef>
+              <a:buFont typeface="Arial" panose="020B0604020202090204" pitchFamily="34" charset="0"/>
+            </a:pPr>
+            <a:endParaRPr lang="en-US" altLang="en-US" sz="2400" b="1" dirty="0">
+              <a:solidFill>
+                <a:srgbClr val="404040"/>
+              </a:solidFill>
+              <a:ea typeface="Calibri" panose="020F0502020204030204" pitchFamily="34" charset="0"/>
+              <a:sym typeface="Arial" panose="020B0604020202090204" pitchFamily="34" charset="0"/>
+            </a:endParaRPr>
+          </a:p>
+          <a:p>
+            <a:pPr marL="457200" lvl="1" indent="457200" algn="l" defTabSz="1216025">
+              <a:lnSpc>
+                <a:spcPct val="90000"/>
+              </a:lnSpc>
+              <a:spcBef>
+                <a:spcPct val="20000"/>
+              </a:spcBef>
+              <a:buFont typeface="Arial" panose="020B0604020202090204" pitchFamily="34" charset="0"/>
+            </a:pPr>
+            <a:r>
+              <a:rPr lang="en-US" altLang="en-US" sz="2400" b="1" dirty="0">
+                <a:solidFill>
+                  <a:srgbClr val="404040"/>
+                </a:solidFill>
+                <a:ea typeface="Calibri" panose="020F0502020204030204" pitchFamily="34" charset="0"/>
+                <a:sym typeface="Arial" panose="020B0604020202090204" pitchFamily="34" charset="0"/>
+              </a:rPr>
+              <a:t>Components:</a:t>
+            </a:r>
+            <a:endParaRPr lang="en-US" altLang="en-US" sz="2400" b="1" dirty="0">
+              <a:solidFill>
+                <a:srgbClr val="404040"/>
+              </a:solidFill>
+              <a:ea typeface="Calibri" panose="020F0502020204030204" pitchFamily="34" charset="0"/>
+              <a:sym typeface="Arial" panose="020B0604020202090204" pitchFamily="34" charset="0"/>
+            </a:endParaRPr>
+          </a:p>
+          <a:p>
+            <a:pPr marL="1371600" lvl="3" indent="457200" algn="l" defTabSz="1216025">
+              <a:lnSpc>
+                <a:spcPct val="90000"/>
+              </a:lnSpc>
+              <a:spcBef>
+                <a:spcPct val="20000"/>
+              </a:spcBef>
+              <a:buFont typeface="Arial" panose="020B0604020202090204" pitchFamily="34" charset="0"/>
+            </a:pPr>
+            <a:r>
+              <a:rPr lang="en-US" altLang="en-US" sz="2400" b="1" dirty="0">
+                <a:solidFill>
+                  <a:srgbClr val="404040"/>
+                </a:solidFill>
+                <a:ea typeface="Calibri" panose="020F0502020204030204" pitchFamily="34" charset="0"/>
+                <a:sym typeface="Arial" panose="020B0604020202090204" pitchFamily="34" charset="0"/>
+              </a:rPr>
+              <a:t>- </a:t>
+            </a:r>
+            <a:r>
+              <a:rPr lang="en-US" altLang="en-US" sz="2400" dirty="0">
+                <a:solidFill>
+                  <a:srgbClr val="404040"/>
+                </a:solidFill>
+                <a:ea typeface="Calibri" panose="020F0502020204030204" pitchFamily="34" charset="0"/>
+                <a:sym typeface="Arial" panose="020B0604020202090204" pitchFamily="34" charset="0"/>
+              </a:rPr>
+              <a:t>Patient Registration Form;</a:t>
+            </a:r>
+            <a:endParaRPr lang="en-US" altLang="en-US" sz="2400" dirty="0">
+              <a:solidFill>
+                <a:srgbClr val="404040"/>
+              </a:solidFill>
+              <a:ea typeface="Calibri" panose="020F0502020204030204" pitchFamily="34" charset="0"/>
+              <a:sym typeface="Arial" panose="020B0604020202090204" pitchFamily="34" charset="0"/>
+            </a:endParaRPr>
+          </a:p>
+          <a:p>
+            <a:pPr marL="1371600" lvl="3" indent="457200" algn="l" defTabSz="1216025">
+              <a:lnSpc>
+                <a:spcPct val="90000"/>
+              </a:lnSpc>
+              <a:spcBef>
+                <a:spcPct val="20000"/>
+              </a:spcBef>
+              <a:buFont typeface="Arial" panose="020B0604020202090204" pitchFamily="34" charset="0"/>
+            </a:pPr>
+            <a:r>
+              <a:rPr lang="en-US" altLang="en-US" sz="2400" dirty="0">
+                <a:solidFill>
+                  <a:srgbClr val="404040"/>
+                </a:solidFill>
+                <a:ea typeface="Calibri" panose="020F0502020204030204" pitchFamily="34" charset="0"/>
+                <a:sym typeface="Arial" panose="020B0604020202090204" pitchFamily="34" charset="0"/>
+              </a:rPr>
+              <a:t>- Appointment Calendar;</a:t>
+            </a:r>
+            <a:endParaRPr lang="en-US" altLang="en-US" sz="2400" dirty="0">
+              <a:solidFill>
+                <a:srgbClr val="404040"/>
+              </a:solidFill>
+              <a:ea typeface="Calibri" panose="020F0502020204030204" pitchFamily="34" charset="0"/>
+              <a:sym typeface="Arial" panose="020B0604020202090204" pitchFamily="34" charset="0"/>
+            </a:endParaRPr>
+          </a:p>
+          <a:p>
+            <a:pPr marL="1371600" lvl="3" indent="457200" algn="l" defTabSz="1216025">
+              <a:lnSpc>
+                <a:spcPct val="90000"/>
+              </a:lnSpc>
+              <a:spcBef>
+                <a:spcPct val="20000"/>
+              </a:spcBef>
+              <a:buFont typeface="Arial" panose="020B0604020202090204" pitchFamily="34" charset="0"/>
+            </a:pPr>
+            <a:r>
+              <a:rPr lang="en-US" altLang="en-US" sz="2400" dirty="0">
+                <a:solidFill>
+                  <a:srgbClr val="404040"/>
+                </a:solidFill>
+                <a:ea typeface="Calibri" panose="020F0502020204030204" pitchFamily="34" charset="0"/>
+                <a:sym typeface="Arial" panose="020B0604020202090204" pitchFamily="34" charset="0"/>
+              </a:rPr>
+              <a:t>- Dummy Billing Interface</a:t>
+            </a:r>
+            <a:endParaRPr lang="en-US" altLang="en-US" sz="2400" dirty="0">
+              <a:solidFill>
+                <a:srgbClr val="404040"/>
+              </a:solidFill>
+              <a:ea typeface="Calibri" panose="020F0502020204030204" pitchFamily="34" charset="0"/>
+              <a:sym typeface="Arial" panose="020B0604020202090204" pitchFamily="34" charset="0"/>
+            </a:endParaRPr>
           </a:p>
         </p:txBody>
       </p:sp>
-      <p:cxnSp>
-        <p:nvCxnSpPr>
-          <p:cNvPr id="10" name="Straight Arrow Connector 9"/>
-          <p:cNvCxnSpPr>
-            <a:stCxn id="9" idx="0"/>
-            <a:endCxn id="4" idx="2"/>
-          </p:cNvCxnSpPr>
-          <p:nvPr/>
-        </p:nvCxnSpPr>
-        <p:spPr>
-          <a:xfrm flipV="1">
-            <a:off x="2975610" y="5619115"/>
-            <a:ext cx="0" cy="401955"/>
-          </a:xfrm>
-          <a:prstGeom prst="straightConnector1">
-            <a:avLst/>
-          </a:prstGeom>
-          <a:ln>
-            <a:tailEnd type="arrow"/>
-          </a:ln>
-        </p:spPr>
-        <p:style>
-          <a:lnRef idx="2">
-            <a:schemeClr val="accent1"/>
-          </a:lnRef>
-          <a:fillRef idx="0">
-            <a:srgbClr val="FFFFFF"/>
-          </a:fillRef>
-          <a:effectRef idx="0">
-            <a:srgbClr val="FFFFFF"/>
-          </a:effectRef>
-          <a:fontRef idx="minor">
-            <a:schemeClr val="tx1"/>
-          </a:fontRef>
-        </p:style>
-      </p:cxnSp>
-      <p:sp>
-        <p:nvSpPr>
-          <p:cNvPr id="11" name="Rectangles 10"/>
-          <p:cNvSpPr/>
-          <p:nvPr/>
-        </p:nvSpPr>
-        <p:spPr>
-          <a:xfrm>
-            <a:off x="7512050" y="5904865"/>
-            <a:ext cx="2947670" cy="710565"/>
-          </a:xfrm>
-          <a:prstGeom prst="rect">
-            <a:avLst/>
-          </a:prstGeom>
-        </p:spPr>
-        <p:style>
-          <a:lnRef idx="2">
-            <a:schemeClr val="accent1">
-              <a:lumMod val="75000"/>
-            </a:schemeClr>
-          </a:lnRef>
-          <a:fillRef idx="1">
-            <a:schemeClr val="accent1"/>
-          </a:fillRef>
-          <a:effectRef idx="0">
-            <a:srgbClr val="FFFFFF"/>
-          </a:effectRef>
-          <a:fontRef idx="minor">
-            <a:schemeClr val="lt1"/>
-          </a:fontRef>
-        </p:style>
-        <p:txBody>
-          <a:bodyPr rtlCol="0" anchor="ctr"/>
-          <a:p>
-            <a:pPr algn="ctr"/>
-            <a:r>
-              <a:rPr lang="en-US"/>
-              <a:t>Confirmation of appointment</a:t>
-            </a:r>
-            <a:endParaRPr lang="en-US"/>
-          </a:p>
-        </p:txBody>
-      </p:sp>
-      <p:cxnSp>
-        <p:nvCxnSpPr>
-          <p:cNvPr id="13" name="Straight Arrow Connector 12"/>
-          <p:cNvCxnSpPr>
-            <a:stCxn id="11" idx="0"/>
-            <a:endCxn id="6" idx="2"/>
-          </p:cNvCxnSpPr>
-          <p:nvPr/>
-        </p:nvCxnSpPr>
-        <p:spPr>
-          <a:xfrm flipV="1">
-            <a:off x="8985885" y="5384165"/>
-            <a:ext cx="0" cy="520700"/>
-          </a:xfrm>
-          <a:prstGeom prst="straightConnector1">
-            <a:avLst/>
-          </a:prstGeom>
-          <a:ln>
-            <a:tailEnd type="arrow"/>
-          </a:ln>
-        </p:spPr>
-        <p:style>
-          <a:lnRef idx="2">
-            <a:schemeClr val="accent1"/>
-          </a:lnRef>
-          <a:fillRef idx="0">
-            <a:srgbClr val="FFFFFF"/>
-          </a:fillRef>
-          <a:effectRef idx="0">
-            <a:srgbClr val="FFFFFF"/>
-          </a:effectRef>
-          <a:fontRef idx="minor">
-            <a:schemeClr val="tx1"/>
-          </a:fontRef>
-        </p:style>
-      </p:cxnSp>
     </p:spTree>
   </p:cSld>
   <p:clrMapOvr>
@@ -6692,21 +7237,68 @@
       </p:pic>
       <p:sp>
         <p:nvSpPr>
+          <p:cNvPr id="10250" name="文本框 28"/>
+          <p:cNvSpPr txBox="1"/>
+          <p:nvPr/>
+        </p:nvSpPr>
+        <p:spPr>
+          <a:xfrm>
+            <a:off x="1610360" y="405765"/>
+            <a:ext cx="7923530" cy="645160"/>
+          </a:xfrm>
+          <a:prstGeom prst="rect">
+            <a:avLst/>
+          </a:prstGeom>
+          <a:noFill/>
+          <a:ln w="9525">
+            <a:noFill/>
+          </a:ln>
+        </p:spPr>
+        <p:txBody>
+          <a:bodyPr wrap="square" anchor="t">
+            <a:spAutoFit/>
+          </a:bodyPr>
+          <a:p>
+            <a:pPr>
+              <a:buFont typeface="Arial" panose="020B0604020202090204" pitchFamily="34" charset="0"/>
+            </a:pPr>
+            <a:r>
+              <a:rPr lang="en-US" altLang="en-US" sz="3600" b="1" dirty="0">
+                <a:solidFill>
+                  <a:srgbClr val="404040"/>
+                </a:solidFill>
+                <a:ea typeface="Calibri" panose="020F0502020204030204" pitchFamily="34" charset="0"/>
+              </a:rPr>
+              <a:t>Build Prototype</a:t>
+            </a:r>
+            <a:endParaRPr lang="en-US" altLang="en-US" sz="3600" b="1" dirty="0">
+              <a:solidFill>
+                <a:srgbClr val="404040"/>
+              </a:solidFill>
+              <a:ea typeface="Calibri" panose="020F0502020204030204" pitchFamily="34" charset="0"/>
+            </a:endParaRPr>
+          </a:p>
+        </p:txBody>
+      </p:sp>
+      <p:sp>
+        <p:nvSpPr>
           <p:cNvPr id="12" name="矩形 11"/>
           <p:cNvSpPr/>
           <p:nvPr/>
         </p:nvSpPr>
         <p:spPr>
           <a:xfrm>
-            <a:off x="0" y="0"/>
-            <a:ext cx="5006975" cy="1216025"/>
+            <a:off x="828675" y="1729105"/>
+            <a:ext cx="10515600" cy="4653280"/>
           </a:xfrm>
           <a:prstGeom prst="rect">
             <a:avLst/>
           </a:prstGeom>
           <a:noFill/>
           <a:ln>
-            <a:noFill/>
+            <a:solidFill>
+              <a:schemeClr val="tx1"/>
+            </a:solidFill>
           </a:ln>
         </p:spPr>
         <p:style>
@@ -6729,7 +7321,7 @@
           <a:bodyPr anchor="ctr"/>
           <a:lstStyle/>
           <a:p>
-            <a:pPr marL="0" marR="0" lvl="0" indent="0" algn="l" defTabSz="914400" rtl="0" eaLnBrk="1" fontAlgn="auto" latinLnBrk="0" hangingPunct="1">
+            <a:pPr marL="0" marR="0" lvl="0" indent="0" algn="ctr" defTabSz="914400" rtl="0" eaLnBrk="1" fontAlgn="auto" latinLnBrk="0" hangingPunct="1">
               <a:lnSpc>
                 <a:spcPct val="100000"/>
               </a:lnSpc>
@@ -6745,29 +7337,12 @@
               <a:buNone/>
               <a:defRPr/>
             </a:pPr>
-            <a:r>
-              <a:rPr kumimoji="0" lang="en-US" altLang="zh-CN" sz="3200" b="1" i="0" u="none" strike="noStrike" kern="1200" cap="none" spc="0" normalizeH="0" baseline="0" noProof="0">
-                <a:ln>
-                  <a:noFill/>
-                </a:ln>
-                <a:solidFill>
-                  <a:schemeClr val="tx1"/>
-                </a:solidFill>
-                <a:effectLst/>
-                <a:uLnTx/>
-                <a:uFillTx/>
-                <a:latin typeface="+mn-lt"/>
-                <a:ea typeface="+mn-ea"/>
-                <a:cs typeface="+mn-cs"/>
-              </a:rPr>
-              <a:t>CODE: INPUT</a:t>
-            </a:r>
-            <a:endParaRPr kumimoji="0" lang="en-US" altLang="zh-CN" sz="3200" b="1" i="0" u="none" strike="noStrike" kern="1200" cap="none" spc="0" normalizeH="0" baseline="0" noProof="0">
+            <a:endParaRPr kumimoji="0" lang="zh-CN" altLang="en-US" sz="1800" b="0" i="0" u="none" strike="noStrike" kern="1200" cap="none" spc="0" normalizeH="0" baseline="0" noProof="0">
               <a:ln>
                 <a:noFill/>
               </a:ln>
               <a:solidFill>
-                <a:schemeClr val="tx1"/>
+                <a:schemeClr val="lt1"/>
               </a:solidFill>
               <a:effectLst/>
               <a:uLnTx/>
@@ -6781,107 +7356,158 @@
       </p:sp>
       <p:sp>
         <p:nvSpPr>
-          <p:cNvPr id="7" name="Rectangles 6"/>
-          <p:cNvSpPr/>
+          <p:cNvPr id="10253" name="文本框 6"/>
+          <p:cNvSpPr txBox="1"/>
           <p:nvPr/>
         </p:nvSpPr>
         <p:spPr>
           <a:xfrm>
-            <a:off x="10191750" y="2637155"/>
-            <a:ext cx="1557020" cy="1584325"/>
-          </a:xfrm>
-          <a:prstGeom prst="rect">
-            <a:avLst/>
-          </a:prstGeom>
-        </p:spPr>
-        <p:style>
-          <a:lnRef idx="2">
-            <a:schemeClr val="accent1">
-              <a:lumMod val="75000"/>
-            </a:schemeClr>
-          </a:lnRef>
-          <a:fillRef idx="1">
-            <a:schemeClr val="accent1"/>
-          </a:fillRef>
-          <a:effectRef idx="0">
-            <a:srgbClr val="FFFFFF"/>
-          </a:effectRef>
-          <a:fontRef idx="minor">
-            <a:schemeClr val="lt1"/>
-          </a:fontRef>
-        </p:style>
+            <a:off x="956945" y="1729105"/>
+            <a:ext cx="9671685" cy="929640"/>
+          </a:xfrm>
+          <a:prstGeom prst="rect">
+            <a:avLst/>
+          </a:prstGeom>
+          <a:noFill/>
+          <a:ln w="9525">
+            <a:noFill/>
+          </a:ln>
+        </p:spPr>
         <p:txBody>
-          <a:bodyPr rtlCol="0" anchor="ctr"/>
-          <a:p>
-            <a:pPr algn="ctr"/>
+          <a:bodyPr wrap="square" anchor="t">
+            <a:noAutofit/>
+          </a:bodyPr>
+          <a:p>
+            <a:pPr>
+              <a:buFont typeface="Arial" panose="020B0604020202090204" pitchFamily="34" charset="0"/>
+            </a:pPr>
             <a:r>
-              <a:rPr lang="en-US"/>
-              <a:t>Billing confirmation</a:t>
+              <a:rPr lang="en-US" altLang="en-US" sz="3200" b="1" dirty="0">
+                <a:solidFill>
+                  <a:srgbClr val="404040"/>
+                </a:solidFill>
+                <a:ea typeface="Calibri" panose="020F0502020204030204" pitchFamily="34" charset="0"/>
+              </a:rPr>
+              <a:t>The program is written in Python and follows these steps:</a:t>
             </a:r>
-            <a:endParaRPr lang="en-US"/>
+            <a:endParaRPr lang="en-US" altLang="en-US" sz="3200" b="1" dirty="0">
+              <a:solidFill>
+                <a:srgbClr val="404040"/>
+              </a:solidFill>
+              <a:ea typeface="Calibri" panose="020F0502020204030204" pitchFamily="34" charset="0"/>
+            </a:endParaRPr>
           </a:p>
         </p:txBody>
       </p:sp>
-      <p:cxnSp>
-        <p:nvCxnSpPr>
-          <p:cNvPr id="8" name="Straight Arrow Connector 7"/>
-          <p:cNvCxnSpPr>
-            <a:stCxn id="7" idx="1"/>
-            <a:endCxn id="2" idx="3"/>
-          </p:cNvCxnSpPr>
-          <p:nvPr/>
-        </p:nvCxnSpPr>
-        <p:spPr>
-          <a:xfrm flipH="1">
-            <a:off x="8388350" y="3429635"/>
-            <a:ext cx="1803400" cy="430530"/>
-          </a:xfrm>
-          <a:prstGeom prst="straightConnector1">
-            <a:avLst/>
-          </a:prstGeom>
-          <a:ln>
-            <a:tailEnd type="arrow"/>
+      <p:sp>
+        <p:nvSpPr>
+          <p:cNvPr id="10255" name="矩形 8"/>
+          <p:cNvSpPr/>
+          <p:nvPr/>
+        </p:nvSpPr>
+        <p:spPr>
+          <a:xfrm>
+            <a:off x="1082675" y="3087370"/>
+            <a:ext cx="9545955" cy="1605280"/>
+          </a:xfrm>
+          <a:prstGeom prst="rect">
+            <a:avLst/>
+          </a:prstGeom>
+          <a:noFill/>
+          <a:ln w="9525">
+            <a:noFill/>
           </a:ln>
         </p:spPr>
-        <p:style>
-          <a:lnRef idx="2">
-            <a:schemeClr val="accent1"/>
-          </a:lnRef>
-          <a:fillRef idx="0">
-            <a:srgbClr val="FFFFFF"/>
-          </a:fillRef>
-          <a:effectRef idx="0">
-            <a:srgbClr val="FFFFFF"/>
-          </a:effectRef>
-          <a:fontRef idx="minor">
-            <a:schemeClr val="tx1"/>
-          </a:fontRef>
-        </p:style>
-      </p:cxnSp>
-      <p:pic>
-        <p:nvPicPr>
-          <p:cNvPr id="2" name="Picture 1" descr="IMAGE 2025-04-29 13:35:46"/>
-          <p:cNvPicPr>
-            <a:picLocks noChangeAspect="1"/>
-          </p:cNvPicPr>
-          <p:nvPr/>
-        </p:nvPicPr>
-        <p:blipFill>
-          <a:blip r:embed="rId2"/>
-          <a:stretch>
-            <a:fillRect/>
-          </a:stretch>
-        </p:blipFill>
-        <p:spPr>
-          <a:xfrm>
-            <a:off x="2312035" y="1106805"/>
-            <a:ext cx="6076315" cy="5506720"/>
-          </a:xfrm>
-          <a:prstGeom prst="rect">
-            <a:avLst/>
-          </a:prstGeom>
-        </p:spPr>
-      </p:pic>
+        <p:txBody>
+          <a:bodyPr wrap="square" lIns="0" tIns="0" rIns="0" bIns="0" anchor="t">
+            <a:noAutofit/>
+          </a:bodyPr>
+          <a:p>
+            <a:pPr marL="457200" lvl="1" indent="457200" algn="l" defTabSz="1216025">
+              <a:lnSpc>
+                <a:spcPct val="90000"/>
+              </a:lnSpc>
+              <a:spcBef>
+                <a:spcPct val="20000"/>
+              </a:spcBef>
+              <a:buFont typeface="Arial" panose="020B0604020202090204" pitchFamily="34" charset="0"/>
+            </a:pPr>
+            <a:r>
+              <a:rPr lang="en-US" altLang="en-US" sz="2400" dirty="0">
+                <a:solidFill>
+                  <a:srgbClr val="404040"/>
+                </a:solidFill>
+                <a:ea typeface="Calibri" panose="020F0502020204030204" pitchFamily="34" charset="0"/>
+                <a:sym typeface="Arial" panose="020B0604020202090204" pitchFamily="34" charset="0"/>
+              </a:rPr>
+              <a:t>- A working demo is coded (in Python).</a:t>
+            </a:r>
+            <a:endParaRPr lang="en-US" altLang="en-US" sz="2400" dirty="0">
+              <a:solidFill>
+                <a:srgbClr val="404040"/>
+              </a:solidFill>
+              <a:ea typeface="Calibri" panose="020F0502020204030204" pitchFamily="34" charset="0"/>
+              <a:sym typeface="Arial" panose="020B0604020202090204" pitchFamily="34" charset="0"/>
+            </a:endParaRPr>
+          </a:p>
+          <a:p>
+            <a:pPr marL="457200" lvl="1" indent="457200" algn="l" defTabSz="1216025">
+              <a:lnSpc>
+                <a:spcPct val="90000"/>
+              </a:lnSpc>
+              <a:spcBef>
+                <a:spcPct val="20000"/>
+              </a:spcBef>
+              <a:buFont typeface="Arial" panose="020B0604020202090204" pitchFamily="34" charset="0"/>
+            </a:pPr>
+            <a:r>
+              <a:rPr lang="en-US" altLang="en-US" sz="2400" dirty="0">
+                <a:solidFill>
+                  <a:srgbClr val="404040"/>
+                </a:solidFill>
+                <a:ea typeface="Calibri" panose="020F0502020204030204" pitchFamily="34" charset="0"/>
+                <a:sym typeface="Arial" panose="020B0604020202090204" pitchFamily="34" charset="0"/>
+              </a:rPr>
+              <a:t>(Used Libraries: FastAPI, PyDantic, SQLAlchemy)</a:t>
+            </a:r>
+            <a:endParaRPr lang="en-US" altLang="en-US" sz="2400" dirty="0">
+              <a:solidFill>
+                <a:srgbClr val="404040"/>
+              </a:solidFill>
+              <a:ea typeface="Calibri" panose="020F0502020204030204" pitchFamily="34" charset="0"/>
+              <a:sym typeface="Arial" panose="020B0604020202090204" pitchFamily="34" charset="0"/>
+            </a:endParaRPr>
+          </a:p>
+          <a:p>
+            <a:pPr marL="457200" lvl="1" indent="457200" algn="l" defTabSz="1216025">
+              <a:lnSpc>
+                <a:spcPct val="90000"/>
+              </a:lnSpc>
+              <a:spcBef>
+                <a:spcPct val="20000"/>
+              </a:spcBef>
+              <a:buFont typeface="Arial" panose="020B0604020202090204" pitchFamily="34" charset="0"/>
+            </a:pPr>
+            <a:r>
+              <a:rPr lang="en-US" altLang="en-US" sz="2400" dirty="0">
+                <a:solidFill>
+                  <a:srgbClr val="404040"/>
+                </a:solidFill>
+                <a:ea typeface="Calibri" panose="020F0502020204030204" pitchFamily="34" charset="0"/>
+                <a:sym typeface="Arial" panose="020B0604020202090204" pitchFamily="34" charset="0"/>
+              </a:rPr>
+              <a:t>-	No real database or final design — just enough to test key functionality.</a:t>
+            </a:r>
+            <a:endParaRPr lang="en-US" altLang="en-US" sz="2400" dirty="0">
+              <a:solidFill>
+                <a:srgbClr val="404040"/>
+              </a:solidFill>
+              <a:ea typeface="Calibri" panose="020F0502020204030204" pitchFamily="34" charset="0"/>
+              <a:sym typeface="Arial" panose="020B0604020202090204" pitchFamily="34" charset="0"/>
+            </a:endParaRPr>
+          </a:p>
+        </p:txBody>
+      </p:sp>
     </p:spTree>
   </p:cSld>
   <p:clrMapOvr>

--- a/Mid-term.pptx
+++ b/Mid-term.pptx
@@ -5,10 +5,10 @@
     <p:sldMasterId id="2147483648" r:id="rId1"/>
   </p:sldMasterIdLst>
   <p:notesMasterIdLst>
-    <p:notesMasterId r:id="rId20"/>
+    <p:notesMasterId r:id="rId18"/>
   </p:notesMasterIdLst>
   <p:handoutMasterIdLst>
-    <p:handoutMasterId r:id="rId21"/>
+    <p:handoutMasterId r:id="rId19"/>
   </p:handoutMasterIdLst>
   <p:sldIdLst>
     <p:sldId id="256" r:id="rId3"/>
@@ -18,16 +18,14 @@
     <p:sldId id="302" r:id="rId7"/>
     <p:sldId id="303" r:id="rId8"/>
     <p:sldId id="304" r:id="rId9"/>
-    <p:sldId id="292" r:id="rId10"/>
-    <p:sldId id="293" r:id="rId11"/>
-    <p:sldId id="294" r:id="rId12"/>
-    <p:sldId id="300" r:id="rId13"/>
-    <p:sldId id="296" r:id="rId14"/>
-    <p:sldId id="295" r:id="rId15"/>
-    <p:sldId id="297" r:id="rId16"/>
-    <p:sldId id="299" r:id="rId17"/>
-    <p:sldId id="298" r:id="rId18"/>
-    <p:sldId id="285" r:id="rId19"/>
+    <p:sldId id="305" r:id="rId10"/>
+    <p:sldId id="306" r:id="rId11"/>
+    <p:sldId id="307" r:id="rId12"/>
+    <p:sldId id="308" r:id="rId13"/>
+    <p:sldId id="309" r:id="rId14"/>
+    <p:sldId id="311" r:id="rId15"/>
+    <p:sldId id="310" r:id="rId16"/>
+    <p:sldId id="285" r:id="rId17"/>
   </p:sldIdLst>
   <p:sldSz cx="12192000" cy="6858000"/>
   <p:notesSz cx="9144000" cy="6858000"/>
@@ -2267,96 +2265,111 @@
       </p:pic>
       <p:sp>
         <p:nvSpPr>
-          <p:cNvPr id="12" name="矩形 11"/>
+          <p:cNvPr id="10250" name="文本框 28"/>
+          <p:cNvSpPr txBox="1"/>
+          <p:nvPr/>
+        </p:nvSpPr>
+        <p:spPr>
+          <a:xfrm>
+            <a:off x="0" y="0"/>
+            <a:ext cx="1701800" cy="645160"/>
+          </a:xfrm>
+          <a:prstGeom prst="rect">
+            <a:avLst/>
+          </a:prstGeom>
+          <a:noFill/>
+          <a:ln w="9525">
+            <a:noFill/>
+          </a:ln>
+        </p:spPr>
+        <p:txBody>
+          <a:bodyPr wrap="square" anchor="t">
+            <a:spAutoFit/>
+          </a:bodyPr>
+          <a:p>
+            <a:pPr>
+              <a:buFont typeface="Arial" panose="020B0604020202090204" pitchFamily="34" charset="0"/>
+            </a:pPr>
+            <a:r>
+              <a:rPr lang="en-US" altLang="en-US" sz="3600" b="1" dirty="0">
+                <a:solidFill>
+                  <a:srgbClr val="404040"/>
+                </a:solidFill>
+                <a:ea typeface="Calibri" panose="020F0502020204030204" pitchFamily="34" charset="0"/>
+              </a:rPr>
+              <a:t>Result:</a:t>
+            </a:r>
+            <a:endParaRPr lang="en-US" altLang="en-US" sz="3600" b="1" dirty="0">
+              <a:solidFill>
+                <a:srgbClr val="404040"/>
+              </a:solidFill>
+              <a:ea typeface="Calibri" panose="020F0502020204030204" pitchFamily="34" charset="0"/>
+            </a:endParaRPr>
+          </a:p>
+        </p:txBody>
+      </p:sp>
+      <p:sp>
+        <p:nvSpPr>
+          <p:cNvPr id="11" name="矩形 8"/>
           <p:cNvSpPr/>
           <p:nvPr/>
         </p:nvSpPr>
         <p:spPr>
           <a:xfrm>
-            <a:off x="0" y="0"/>
-            <a:ext cx="5006975" cy="1216025"/>
+            <a:off x="109220" y="6600190"/>
+            <a:ext cx="11511280" cy="354330"/>
           </a:xfrm>
           <a:prstGeom prst="rect">
             <a:avLst/>
           </a:prstGeom>
           <a:noFill/>
-          <a:ln>
+          <a:ln w="9525">
             <a:noFill/>
           </a:ln>
         </p:spPr>
-        <p:style>
-          <a:lnRef idx="2">
-            <a:schemeClr val="accent1">
-              <a:shade val="50000"/>
-            </a:schemeClr>
-          </a:lnRef>
-          <a:fillRef idx="1">
-            <a:schemeClr val="accent1"/>
-          </a:fillRef>
-          <a:effectRef idx="0">
-            <a:schemeClr val="accent1"/>
-          </a:effectRef>
-          <a:fontRef idx="minor">
-            <a:schemeClr val="lt1"/>
-          </a:fontRef>
-        </p:style>
         <p:txBody>
-          <a:bodyPr anchor="ctr"/>
-          <a:lstStyle/>
-          <a:p>
-            <a:pPr marL="0" marR="0" lvl="0" indent="0" algn="l" defTabSz="914400" rtl="0" eaLnBrk="1" fontAlgn="auto" latinLnBrk="0" hangingPunct="1">
+          <a:bodyPr wrap="square" lIns="0" tIns="0" rIns="0" bIns="0" anchor="t">
+            <a:noAutofit/>
+          </a:bodyPr>
+          <a:p>
+            <a:pPr indent="457200" algn="l" defTabSz="1216025">
               <a:lnSpc>
-                <a:spcPct val="100000"/>
+                <a:spcPct val="90000"/>
               </a:lnSpc>
               <a:spcBef>
-                <a:spcPts val="0"/>
+                <a:spcPct val="20000"/>
               </a:spcBef>
-              <a:spcAft>
-                <a:spcPts val="0"/>
-              </a:spcAft>
-              <a:buClrTx/>
-              <a:buSzTx/>
-              <a:buFontTx/>
-              <a:buNone/>
-              <a:defRPr/>
+              <a:buFont typeface="Arial" panose="020B0604020202090204" pitchFamily="34" charset="0"/>
             </a:pPr>
             <a:r>
-              <a:rPr kumimoji="0" lang="en-US" altLang="zh-CN" sz="3200" b="1" i="0" u="none" strike="noStrike" kern="1200" cap="none" spc="0" normalizeH="0" baseline="0" noProof="0">
-                <a:ln>
-                  <a:noFill/>
-                </a:ln>
-                <a:solidFill>
-                  <a:schemeClr val="tx1"/>
-                </a:solidFill>
-                <a:effectLst/>
-                <a:uLnTx/>
-                <a:uFillTx/>
-                <a:latin typeface="+mn-lt"/>
-                <a:ea typeface="+mn-ea"/>
-                <a:cs typeface="+mn-cs"/>
+              <a:rPr lang="en-US" altLang="en-US" sz="1400" dirty="0">
+                <a:solidFill>
+                  <a:srgbClr val="404040"/>
+                </a:solidFill>
+                <a:ea typeface="Calibri" panose="020F0502020204030204" pitchFamily="34" charset="0"/>
+                <a:sym typeface="Arial" panose="020B0604020202090204" pitchFamily="34" charset="0"/>
               </a:rPr>
-              <a:t>CODE: INPUT</a:t>
+              <a:t>Here are all the codes for this application: </a:t>
             </a:r>
-            <a:endParaRPr kumimoji="0" lang="en-US" altLang="zh-CN" sz="3200" b="1" i="0" u="none" strike="noStrike" kern="1200" cap="none" spc="0" normalizeH="0" baseline="0" noProof="0">
-              <a:ln>
-                <a:noFill/>
-              </a:ln>
+            <a:r>
+              <a:rPr lang="en-US" altLang="en-US" sz="1400">
+                <a:sym typeface="+mn-ea"/>
+              </a:rPr>
+              <a:t>https://github.com/McLight-Note/Web-Server-Programming/blob/main/Mid-term/Task-2.html</a:t>
+            </a:r>
+            <a:endParaRPr lang="en-US" altLang="en-US" sz="1400" dirty="0">
               <a:solidFill>
-                <a:schemeClr val="tx1"/>
+                <a:srgbClr val="404040"/>
               </a:solidFill>
-              <a:effectLst/>
-              <a:uLnTx/>
-              <a:uFillTx/>
-              <a:latin typeface="+mn-lt"/>
-              <a:ea typeface="+mn-ea"/>
-              <a:cs typeface="+mn-cs"/>
+              <a:ea typeface="Calibri" panose="020F0502020204030204" pitchFamily="34" charset="0"/>
+              <a:sym typeface="Arial" panose="020B0604020202090204" pitchFamily="34" charset="0"/>
             </a:endParaRPr>
           </a:p>
         </p:txBody>
       </p:sp>
       <p:pic>
         <p:nvPicPr>
-          <p:cNvPr id="4" name="Picture 3" descr="IMAGE 2025-04-29 13:30:34"/>
+          <p:cNvPr id="2" name="Picture 1" descr="Screenshot 2025-10-24 at 1.54.43 PM"/>
           <p:cNvPicPr>
             <a:picLocks noChangeAspect="1"/>
           </p:cNvPicPr>
@@ -2370,8 +2383,8 @@
         </p:blipFill>
         <p:spPr>
           <a:xfrm>
-            <a:off x="156210" y="2794635"/>
-            <a:ext cx="5638800" cy="2824480"/>
+            <a:off x="360680" y="645160"/>
+            <a:ext cx="7163435" cy="3691890"/>
           </a:xfrm>
           <a:prstGeom prst="rect">
             <a:avLst/>
@@ -2380,7 +2393,7 @@
       </p:pic>
       <p:pic>
         <p:nvPicPr>
-          <p:cNvPr id="5" name="Picture 4" descr="IMAGE 2025-04-29 13:32:44"/>
+          <p:cNvPr id="3" name="Picture 2" descr="Screenshot 2025-10-24 at 1.54.57 PM"/>
           <p:cNvPicPr>
             <a:picLocks noChangeAspect="1"/>
           </p:cNvPicPr>
@@ -2394,275 +2407,14 @@
         </p:blipFill>
         <p:spPr>
           <a:xfrm>
-            <a:off x="2863215" y="156845"/>
-            <a:ext cx="6878955" cy="2235835"/>
+            <a:off x="6838950" y="2936240"/>
+            <a:ext cx="4518025" cy="2774950"/>
           </a:xfrm>
           <a:prstGeom prst="rect">
             <a:avLst/>
           </a:prstGeom>
         </p:spPr>
       </p:pic>
-      <p:pic>
-        <p:nvPicPr>
-          <p:cNvPr id="6" name="Picture 5" descr="IMAGE 2025-04-29 13:33:19"/>
-          <p:cNvPicPr>
-            <a:picLocks noChangeAspect="1"/>
-          </p:cNvPicPr>
-          <p:nvPr/>
-        </p:nvPicPr>
-        <p:blipFill>
-          <a:blip r:embed="rId4"/>
-          <a:stretch>
-            <a:fillRect/>
-          </a:stretch>
-        </p:blipFill>
-        <p:spPr>
-          <a:xfrm>
-            <a:off x="5956300" y="2794635"/>
-            <a:ext cx="6058535" cy="2589530"/>
-          </a:xfrm>
-          <a:prstGeom prst="rect">
-            <a:avLst/>
-          </a:prstGeom>
-        </p:spPr>
-      </p:pic>
-      <p:sp>
-        <p:nvSpPr>
-          <p:cNvPr id="7" name="Rectangles 6"/>
-          <p:cNvSpPr/>
-          <p:nvPr/>
-        </p:nvSpPr>
-        <p:spPr>
-          <a:xfrm>
-            <a:off x="10191750" y="387350"/>
-            <a:ext cx="1557020" cy="1584325"/>
-          </a:xfrm>
-          <a:prstGeom prst="rect">
-            <a:avLst/>
-          </a:prstGeom>
-        </p:spPr>
-        <p:style>
-          <a:lnRef idx="2">
-            <a:schemeClr val="accent1">
-              <a:lumMod val="75000"/>
-            </a:schemeClr>
-          </a:lnRef>
-          <a:fillRef idx="1">
-            <a:schemeClr val="accent1"/>
-          </a:fillRef>
-          <a:effectRef idx="0">
-            <a:srgbClr val="FFFFFF"/>
-          </a:effectRef>
-          <a:fontRef idx="minor">
-            <a:schemeClr val="lt1"/>
-          </a:fontRef>
-        </p:style>
-        <p:txBody>
-          <a:bodyPr rtlCol="0" anchor="ctr"/>
-          <a:p>
-            <a:pPr algn="ctr"/>
-            <a:r>
-              <a:rPr lang="en-US"/>
-              <a:t>Adding Patients</a:t>
-            </a:r>
-            <a:endParaRPr lang="en-US"/>
-          </a:p>
-        </p:txBody>
-      </p:sp>
-      <p:cxnSp>
-        <p:nvCxnSpPr>
-          <p:cNvPr id="8" name="Straight Arrow Connector 7"/>
-          <p:cNvCxnSpPr>
-            <a:stCxn id="7" idx="1"/>
-            <a:endCxn id="5" idx="3"/>
-          </p:cNvCxnSpPr>
-          <p:nvPr/>
-        </p:nvCxnSpPr>
-        <p:spPr>
-          <a:xfrm flipH="1">
-            <a:off x="9742170" y="1179830"/>
-            <a:ext cx="449580" cy="95250"/>
-          </a:xfrm>
-          <a:prstGeom prst="straightConnector1">
-            <a:avLst/>
-          </a:prstGeom>
-          <a:ln>
-            <a:tailEnd type="arrow"/>
-          </a:ln>
-        </p:spPr>
-        <p:style>
-          <a:lnRef idx="2">
-            <a:schemeClr val="accent1"/>
-          </a:lnRef>
-          <a:fillRef idx="0">
-            <a:srgbClr val="FFFFFF"/>
-          </a:fillRef>
-          <a:effectRef idx="0">
-            <a:srgbClr val="FFFFFF"/>
-          </a:effectRef>
-          <a:fontRef idx="minor">
-            <a:schemeClr val="tx1"/>
-          </a:fontRef>
-        </p:style>
-      </p:cxnSp>
-      <p:sp>
-        <p:nvSpPr>
-          <p:cNvPr id="9" name="Rectangles 8"/>
-          <p:cNvSpPr/>
-          <p:nvPr/>
-        </p:nvSpPr>
-        <p:spPr>
-          <a:xfrm>
-            <a:off x="1781175" y="6021070"/>
-            <a:ext cx="2388870" cy="710565"/>
-          </a:xfrm>
-          <a:prstGeom prst="rect">
-            <a:avLst/>
-          </a:prstGeom>
-        </p:spPr>
-        <p:style>
-          <a:lnRef idx="2">
-            <a:schemeClr val="accent1">
-              <a:lumMod val="75000"/>
-            </a:schemeClr>
-          </a:lnRef>
-          <a:fillRef idx="1">
-            <a:schemeClr val="accent1"/>
-          </a:fillRef>
-          <a:effectRef idx="0">
-            <a:srgbClr val="FFFFFF"/>
-          </a:effectRef>
-          <a:fontRef idx="minor">
-            <a:schemeClr val="lt1"/>
-          </a:fontRef>
-        </p:style>
-        <p:txBody>
-          <a:bodyPr rtlCol="0" anchor="ctr"/>
-          <a:p>
-            <a:pPr algn="ctr"/>
-            <a:r>
-              <a:rPr lang="en-US"/>
-              <a:t>Patient Registration</a:t>
-            </a:r>
-            <a:endParaRPr lang="en-US"/>
-          </a:p>
-        </p:txBody>
-      </p:sp>
-      <p:cxnSp>
-        <p:nvCxnSpPr>
-          <p:cNvPr id="10" name="Straight Arrow Connector 9"/>
-          <p:cNvCxnSpPr>
-            <a:stCxn id="9" idx="0"/>
-            <a:endCxn id="4" idx="2"/>
-          </p:cNvCxnSpPr>
-          <p:nvPr/>
-        </p:nvCxnSpPr>
-        <p:spPr>
-          <a:xfrm flipV="1">
-            <a:off x="2975610" y="5619115"/>
-            <a:ext cx="0" cy="401955"/>
-          </a:xfrm>
-          <a:prstGeom prst="straightConnector1">
-            <a:avLst/>
-          </a:prstGeom>
-          <a:ln>
-            <a:tailEnd type="arrow"/>
-          </a:ln>
-        </p:spPr>
-        <p:style>
-          <a:lnRef idx="2">
-            <a:schemeClr val="accent1"/>
-          </a:lnRef>
-          <a:fillRef idx="0">
-            <a:srgbClr val="FFFFFF"/>
-          </a:fillRef>
-          <a:effectRef idx="0">
-            <a:srgbClr val="FFFFFF"/>
-          </a:effectRef>
-          <a:fontRef idx="minor">
-            <a:schemeClr val="tx1"/>
-          </a:fontRef>
-        </p:style>
-      </p:cxnSp>
-      <p:sp>
-        <p:nvSpPr>
-          <p:cNvPr id="11" name="Rectangles 10"/>
-          <p:cNvSpPr/>
-          <p:nvPr/>
-        </p:nvSpPr>
-        <p:spPr>
-          <a:xfrm>
-            <a:off x="7512050" y="5904865"/>
-            <a:ext cx="2947670" cy="710565"/>
-          </a:xfrm>
-          <a:prstGeom prst="rect">
-            <a:avLst/>
-          </a:prstGeom>
-        </p:spPr>
-        <p:style>
-          <a:lnRef idx="2">
-            <a:schemeClr val="accent1">
-              <a:lumMod val="75000"/>
-            </a:schemeClr>
-          </a:lnRef>
-          <a:fillRef idx="1">
-            <a:schemeClr val="accent1"/>
-          </a:fillRef>
-          <a:effectRef idx="0">
-            <a:srgbClr val="FFFFFF"/>
-          </a:effectRef>
-          <a:fontRef idx="minor">
-            <a:schemeClr val="lt1"/>
-          </a:fontRef>
-        </p:style>
-        <p:txBody>
-          <a:bodyPr rtlCol="0" anchor="ctr"/>
-          <a:p>
-            <a:pPr algn="ctr"/>
-            <a:r>
-              <a:rPr lang="en-US"/>
-              <a:t>Confirmation of appointment</a:t>
-            </a:r>
-            <a:endParaRPr lang="en-US"/>
-          </a:p>
-        </p:txBody>
-      </p:sp>
-      <p:cxnSp>
-        <p:nvCxnSpPr>
-          <p:cNvPr id="13" name="Straight Arrow Connector 12"/>
-          <p:cNvCxnSpPr>
-            <a:stCxn id="11" idx="0"/>
-            <a:endCxn id="6" idx="2"/>
-          </p:cNvCxnSpPr>
-          <p:nvPr/>
-        </p:nvCxnSpPr>
-        <p:spPr>
-          <a:xfrm flipV="1">
-            <a:off x="8985885" y="5384165"/>
-            <a:ext cx="0" cy="520700"/>
-          </a:xfrm>
-          <a:prstGeom prst="straightConnector1">
-            <a:avLst/>
-          </a:prstGeom>
-          <a:ln>
-            <a:tailEnd type="arrow"/>
-          </a:ln>
-        </p:spPr>
-        <p:style>
-          <a:lnRef idx="2">
-            <a:schemeClr val="accent1"/>
-          </a:lnRef>
-          <a:fillRef idx="0">
-            <a:srgbClr val="FFFFFF"/>
-          </a:fillRef>
-          <a:effectRef idx="0">
-            <a:srgbClr val="FFFFFF"/>
-          </a:effectRef>
-          <a:fontRef idx="minor">
-            <a:schemeClr val="tx1"/>
-          </a:fontRef>
-        </p:style>
-      </p:cxnSp>
     </p:spTree>
   </p:cSld>
   <p:clrMapOvr>
@@ -2715,21 +2467,59 @@
       </p:pic>
       <p:sp>
         <p:nvSpPr>
+          <p:cNvPr id="10250" name="文本框 28"/>
+          <p:cNvSpPr txBox="1"/>
+          <p:nvPr/>
+        </p:nvSpPr>
+        <p:spPr>
+          <a:xfrm>
+            <a:off x="3450590" y="329565"/>
+            <a:ext cx="4799330" cy="946785"/>
+          </a:xfrm>
+          <a:prstGeom prst="rect">
+            <a:avLst/>
+          </a:prstGeom>
+          <a:noFill/>
+          <a:ln w="9525">
+            <a:noFill/>
+          </a:ln>
+        </p:spPr>
+        <p:txBody>
+          <a:bodyPr wrap="square" anchor="t">
+            <a:noAutofit/>
+          </a:bodyPr>
+          <a:p>
+            <a:pPr>
+              <a:buFont typeface="Arial" panose="020B0604020202090204" pitchFamily="34" charset="0"/>
+            </a:pPr>
+            <a:endParaRPr lang="en-US" altLang="en-US" sz="3200" b="1" dirty="0">
+              <a:solidFill>
+                <a:srgbClr val="404040"/>
+              </a:solidFill>
+              <a:ea typeface="Calibri" panose="020F0502020204030204" pitchFamily="34" charset="0"/>
+            </a:endParaRPr>
+          </a:p>
+        </p:txBody>
+      </p:sp>
+      <p:sp>
+        <p:nvSpPr>
           <p:cNvPr id="12" name="矩形 11"/>
           <p:cNvSpPr/>
           <p:nvPr/>
         </p:nvSpPr>
         <p:spPr>
           <a:xfrm>
-            <a:off x="0" y="0"/>
-            <a:ext cx="5006975" cy="1216025"/>
+            <a:off x="255905" y="329565"/>
+            <a:ext cx="11500485" cy="6132195"/>
           </a:xfrm>
           <a:prstGeom prst="rect">
             <a:avLst/>
           </a:prstGeom>
           <a:noFill/>
           <a:ln>
-            <a:noFill/>
+            <a:solidFill>
+              <a:schemeClr val="tx1"/>
+            </a:solidFill>
           </a:ln>
         </p:spPr>
         <p:style>
@@ -2752,7 +2542,7 @@
           <a:bodyPr anchor="ctr"/>
           <a:lstStyle/>
           <a:p>
-            <a:pPr marL="0" marR="0" lvl="0" indent="0" algn="l" defTabSz="914400" rtl="0" eaLnBrk="1" fontAlgn="auto" latinLnBrk="0" hangingPunct="1">
+            <a:pPr marL="0" marR="0" lvl="0" indent="0" algn="ctr" defTabSz="914400" rtl="0" eaLnBrk="1" fontAlgn="auto" latinLnBrk="0" hangingPunct="1">
               <a:lnSpc>
                 <a:spcPct val="100000"/>
               </a:lnSpc>
@@ -2768,29 +2558,12 @@
               <a:buNone/>
               <a:defRPr/>
             </a:pPr>
-            <a:r>
-              <a:rPr kumimoji="0" lang="en-US" altLang="zh-CN" sz="3200" b="1" i="0" u="none" strike="noStrike" kern="1200" cap="none" spc="0" normalizeH="0" baseline="0" noProof="0">
-                <a:ln>
-                  <a:noFill/>
-                </a:ln>
-                <a:solidFill>
-                  <a:schemeClr val="tx1"/>
-                </a:solidFill>
-                <a:effectLst/>
-                <a:uLnTx/>
-                <a:uFillTx/>
-                <a:latin typeface="+mn-lt"/>
-                <a:ea typeface="+mn-ea"/>
-                <a:cs typeface="+mn-cs"/>
-              </a:rPr>
-              <a:t>CODE: INPUT</a:t>
-            </a:r>
-            <a:endParaRPr kumimoji="0" lang="en-US" altLang="zh-CN" sz="3200" b="1" i="0" u="none" strike="noStrike" kern="1200" cap="none" spc="0" normalizeH="0" baseline="0" noProof="0">
+            <a:endParaRPr kumimoji="0" lang="zh-CN" altLang="en-US" sz="1800" b="0" i="0" u="none" strike="noStrike" kern="1200" cap="none" spc="0" normalizeH="0" baseline="0" noProof="0">
               <a:ln>
                 <a:noFill/>
               </a:ln>
               <a:solidFill>
-                <a:schemeClr val="tx1"/>
+                <a:schemeClr val="lt1"/>
               </a:solidFill>
               <a:effectLst/>
               <a:uLnTx/>
@@ -2804,107 +2577,123 @@
       </p:sp>
       <p:sp>
         <p:nvSpPr>
-          <p:cNvPr id="7" name="Rectangles 6"/>
-          <p:cNvSpPr/>
+          <p:cNvPr id="2" name="文本框 28"/>
+          <p:cNvSpPr txBox="1"/>
           <p:nvPr/>
         </p:nvSpPr>
         <p:spPr>
           <a:xfrm>
-            <a:off x="10191750" y="2637155"/>
-            <a:ext cx="1557020" cy="1584325"/>
-          </a:xfrm>
-          <a:prstGeom prst="rect">
-            <a:avLst/>
-          </a:prstGeom>
-        </p:spPr>
-        <p:style>
-          <a:lnRef idx="2">
-            <a:schemeClr val="accent1">
-              <a:lumMod val="75000"/>
-            </a:schemeClr>
-          </a:lnRef>
-          <a:fillRef idx="1">
-            <a:schemeClr val="accent1"/>
-          </a:fillRef>
-          <a:effectRef idx="0">
-            <a:srgbClr val="FFFFFF"/>
-          </a:effectRef>
-          <a:fontRef idx="minor">
-            <a:schemeClr val="lt1"/>
-          </a:fontRef>
-        </p:style>
+            <a:off x="956310" y="1156335"/>
+            <a:ext cx="3625850" cy="645160"/>
+          </a:xfrm>
+          <a:prstGeom prst="rect">
+            <a:avLst/>
+          </a:prstGeom>
+          <a:noFill/>
+          <a:ln w="9525">
+            <a:noFill/>
+          </a:ln>
+        </p:spPr>
         <p:txBody>
-          <a:bodyPr rtlCol="0" anchor="ctr"/>
-          <a:p>
-            <a:pPr algn="ctr"/>
+          <a:bodyPr wrap="square" anchor="t">
+            <a:spAutoFit/>
+          </a:bodyPr>
+          <a:p>
+            <a:pPr>
+              <a:buFont typeface="Arial" panose="020B0604020202090204" pitchFamily="34" charset="0"/>
+            </a:pPr>
             <a:r>
-              <a:rPr lang="en-US"/>
-              <a:t>Billing confirmation</a:t>
+              <a:rPr lang="en-US" altLang="en-US" sz="3600" b="1" dirty="0">
+                <a:solidFill>
+                  <a:srgbClr val="404040"/>
+                </a:solidFill>
+                <a:ea typeface="Calibri" panose="020F0502020204030204" pitchFamily="34" charset="0"/>
+              </a:rPr>
+              <a:t>Question 5:</a:t>
+            </a:r>
+            <a:endParaRPr lang="en-US" altLang="en-US" sz="3600" b="1" dirty="0">
+              <a:solidFill>
+                <a:srgbClr val="404040"/>
+              </a:solidFill>
+              <a:ea typeface="Calibri" panose="020F0502020204030204" pitchFamily="34" charset="0"/>
+            </a:endParaRPr>
+          </a:p>
+        </p:txBody>
+      </p:sp>
+      <p:sp>
+        <p:nvSpPr>
+          <p:cNvPr id="3" name="文本框 28"/>
+          <p:cNvSpPr txBox="1"/>
+          <p:nvPr/>
+        </p:nvSpPr>
+        <p:spPr>
+          <a:xfrm>
+            <a:off x="1489075" y="2251710"/>
+            <a:ext cx="8722360" cy="2823845"/>
+          </a:xfrm>
+          <a:prstGeom prst="rect">
+            <a:avLst/>
+          </a:prstGeom>
+          <a:noFill/>
+          <a:ln w="9525">
+            <a:noFill/>
+          </a:ln>
+        </p:spPr>
+        <p:txBody>
+          <a:bodyPr wrap="square" anchor="t">
+            <a:noAutofit/>
+          </a:bodyPr>
+          <a:p>
+            <a:pPr indent="457200">
+              <a:buFont typeface="Arial" panose="020B0604020202090204" pitchFamily="34" charset="0"/>
+            </a:pPr>
+            <a:r>
+              <a:rPr lang="en-US" altLang="en-US" sz="3600" b="1" dirty="0">
+                <a:solidFill>
+                  <a:srgbClr val="404040"/>
+                </a:solidFill>
+                <a:ea typeface="Calibri" panose="020F0502020204030204" pitchFamily="34" charset="0"/>
+              </a:rPr>
+              <a:t>Implement server-side validation: return error message if email is missing or invalid.</a:t>
+            </a:r>
+            <a:endParaRPr lang="en-US" altLang="en-US" sz="3600" b="1" dirty="0">
+              <a:solidFill>
+                <a:srgbClr val="404040"/>
+              </a:solidFill>
+              <a:ea typeface="Calibri" panose="020F0502020204030204" pitchFamily="34" charset="0"/>
+            </a:endParaRPr>
+          </a:p>
+        </p:txBody>
+      </p:sp>
+      <p:sp>
+        <p:nvSpPr>
+          <p:cNvPr id="4" name="Text Box 3"/>
+          <p:cNvSpPr txBox="1"/>
+          <p:nvPr/>
+        </p:nvSpPr>
+        <p:spPr>
+          <a:xfrm>
+            <a:off x="3048000" y="5254625"/>
+            <a:ext cx="6096000" cy="645160"/>
+          </a:xfrm>
+          <a:prstGeom prst="rect">
+            <a:avLst/>
+          </a:prstGeom>
+          <a:noFill/>
+        </p:spPr>
+        <p:txBody>
+          <a:bodyPr wrap="square" rtlCol="0" anchor="t">
+            <a:spAutoFit/>
+          </a:bodyPr>
+          <a:p>
+            <a:r>
+              <a:rPr lang="en-US" altLang="en-US"/>
+              <a:t>https://github.com/McLight-Note/Web-Server-Programming/blob/main/Mid-term/Task-3.html</a:t>
             </a:r>
             <a:endParaRPr lang="en-US"/>
           </a:p>
         </p:txBody>
       </p:sp>
-      <p:cxnSp>
-        <p:nvCxnSpPr>
-          <p:cNvPr id="8" name="Straight Arrow Connector 7"/>
-          <p:cNvCxnSpPr>
-            <a:stCxn id="7" idx="1"/>
-            <a:endCxn id="2" idx="3"/>
-          </p:cNvCxnSpPr>
-          <p:nvPr/>
-        </p:nvCxnSpPr>
-        <p:spPr>
-          <a:xfrm flipH="1">
-            <a:off x="8388350" y="3429635"/>
-            <a:ext cx="1803400" cy="430530"/>
-          </a:xfrm>
-          <a:prstGeom prst="straightConnector1">
-            <a:avLst/>
-          </a:prstGeom>
-          <a:ln>
-            <a:tailEnd type="arrow"/>
-          </a:ln>
-        </p:spPr>
-        <p:style>
-          <a:lnRef idx="2">
-            <a:schemeClr val="accent1"/>
-          </a:lnRef>
-          <a:fillRef idx="0">
-            <a:srgbClr val="FFFFFF"/>
-          </a:fillRef>
-          <a:effectRef idx="0">
-            <a:srgbClr val="FFFFFF"/>
-          </a:effectRef>
-          <a:fontRef idx="minor">
-            <a:schemeClr val="tx1"/>
-          </a:fontRef>
-        </p:style>
-      </p:cxnSp>
-      <p:pic>
-        <p:nvPicPr>
-          <p:cNvPr id="2" name="Picture 1" descr="IMAGE 2025-04-29 13:35:46"/>
-          <p:cNvPicPr>
-            <a:picLocks noChangeAspect="1"/>
-          </p:cNvPicPr>
-          <p:nvPr/>
-        </p:nvPicPr>
-        <p:blipFill>
-          <a:blip r:embed="rId2"/>
-          <a:stretch>
-            <a:fillRect/>
-          </a:stretch>
-        </p:blipFill>
-        <p:spPr>
-          <a:xfrm>
-            <a:off x="2312035" y="1106805"/>
-            <a:ext cx="6076315" cy="5506720"/>
-          </a:xfrm>
-          <a:prstGeom prst="rect">
-            <a:avLst/>
-          </a:prstGeom>
-        </p:spPr>
-      </p:pic>
     </p:spTree>
   </p:cSld>
   <p:clrMapOvr>
@@ -2957,96 +2746,111 @@
       </p:pic>
       <p:sp>
         <p:nvSpPr>
-          <p:cNvPr id="12" name="矩形 11"/>
+          <p:cNvPr id="10250" name="文本框 28"/>
+          <p:cNvSpPr txBox="1"/>
+          <p:nvPr/>
+        </p:nvSpPr>
+        <p:spPr>
+          <a:xfrm>
+            <a:off x="0" y="0"/>
+            <a:ext cx="3966210" cy="645160"/>
+          </a:xfrm>
+          <a:prstGeom prst="rect">
+            <a:avLst/>
+          </a:prstGeom>
+          <a:noFill/>
+          <a:ln w="9525">
+            <a:noFill/>
+          </a:ln>
+        </p:spPr>
+        <p:txBody>
+          <a:bodyPr wrap="square" anchor="t">
+            <a:spAutoFit/>
+          </a:bodyPr>
+          <a:p>
+            <a:pPr>
+              <a:buFont typeface="Arial" panose="020B0604020202090204" pitchFamily="34" charset="0"/>
+            </a:pPr>
+            <a:r>
+              <a:rPr lang="en-US" altLang="en-US" sz="3600" b="1" dirty="0">
+                <a:solidFill>
+                  <a:srgbClr val="404040"/>
+                </a:solidFill>
+                <a:ea typeface="Calibri" panose="020F0502020204030204" pitchFamily="34" charset="0"/>
+              </a:rPr>
+              <a:t>Code samples:</a:t>
+            </a:r>
+            <a:endParaRPr lang="en-US" altLang="en-US" sz="3600" b="1" dirty="0">
+              <a:solidFill>
+                <a:srgbClr val="404040"/>
+              </a:solidFill>
+              <a:ea typeface="Calibri" panose="020F0502020204030204" pitchFamily="34" charset="0"/>
+            </a:endParaRPr>
+          </a:p>
+        </p:txBody>
+      </p:sp>
+      <p:sp>
+        <p:nvSpPr>
+          <p:cNvPr id="11" name="矩形 8"/>
           <p:cNvSpPr/>
           <p:nvPr/>
         </p:nvSpPr>
         <p:spPr>
           <a:xfrm>
-            <a:off x="0" y="0"/>
-            <a:ext cx="4946015" cy="1216025"/>
+            <a:off x="109220" y="6600190"/>
+            <a:ext cx="11511280" cy="354330"/>
           </a:xfrm>
           <a:prstGeom prst="rect">
             <a:avLst/>
           </a:prstGeom>
           <a:noFill/>
-          <a:ln>
+          <a:ln w="9525">
             <a:noFill/>
           </a:ln>
         </p:spPr>
-        <p:style>
-          <a:lnRef idx="2">
-            <a:schemeClr val="accent1">
-              <a:shade val="50000"/>
-            </a:schemeClr>
-          </a:lnRef>
-          <a:fillRef idx="1">
-            <a:schemeClr val="accent1"/>
-          </a:fillRef>
-          <a:effectRef idx="0">
-            <a:schemeClr val="accent1"/>
-          </a:effectRef>
-          <a:fontRef idx="minor">
-            <a:schemeClr val="lt1"/>
-          </a:fontRef>
-        </p:style>
         <p:txBody>
-          <a:bodyPr anchor="ctr"/>
-          <a:lstStyle/>
-          <a:p>
-            <a:pPr marL="0" marR="0" lvl="0" indent="0" algn="l" defTabSz="914400" rtl="0" eaLnBrk="1" fontAlgn="auto" latinLnBrk="0" hangingPunct="1">
+          <a:bodyPr wrap="square" lIns="0" tIns="0" rIns="0" bIns="0" anchor="t">
+            <a:noAutofit/>
+          </a:bodyPr>
+          <a:p>
+            <a:pPr indent="457200" algn="l" defTabSz="1216025">
               <a:lnSpc>
-                <a:spcPct val="100000"/>
+                <a:spcPct val="90000"/>
               </a:lnSpc>
               <a:spcBef>
-                <a:spcPts val="0"/>
+                <a:spcPct val="20000"/>
               </a:spcBef>
-              <a:spcAft>
-                <a:spcPts val="0"/>
-              </a:spcAft>
-              <a:buClrTx/>
-              <a:buSzTx/>
-              <a:buFontTx/>
-              <a:buNone/>
-              <a:defRPr/>
+              <a:buFont typeface="Arial" panose="020B0604020202090204" pitchFamily="34" charset="0"/>
             </a:pPr>
             <a:r>
-              <a:rPr kumimoji="0" lang="en-US" altLang="zh-CN" sz="3200" b="1" i="0" u="none" strike="noStrike" kern="1200" cap="none" spc="0" normalizeH="0" baseline="0" noProof="0">
-                <a:ln>
-                  <a:noFill/>
-                </a:ln>
-                <a:solidFill>
-                  <a:schemeClr val="tx1"/>
-                </a:solidFill>
-                <a:effectLst/>
-                <a:uLnTx/>
-                <a:uFillTx/>
-                <a:latin typeface="+mn-lt"/>
-                <a:ea typeface="+mn-ea"/>
-                <a:cs typeface="+mn-cs"/>
+              <a:rPr lang="en-US" altLang="en-US" sz="1400" dirty="0">
+                <a:solidFill>
+                  <a:srgbClr val="404040"/>
+                </a:solidFill>
+                <a:ea typeface="Calibri" panose="020F0502020204030204" pitchFamily="34" charset="0"/>
+                <a:sym typeface="Arial" panose="020B0604020202090204" pitchFamily="34" charset="0"/>
               </a:rPr>
-              <a:t>CODE: OUTPUT</a:t>
+              <a:t>Here are all the codes for this application: </a:t>
             </a:r>
-            <a:endParaRPr kumimoji="0" lang="en-US" altLang="zh-CN" sz="3200" b="1" i="0" u="none" strike="noStrike" kern="1200" cap="none" spc="0" normalizeH="0" baseline="0" noProof="0">
-              <a:ln>
-                <a:noFill/>
-              </a:ln>
+            <a:r>
+              <a:rPr lang="en-US" altLang="en-US" sz="1400">
+                <a:sym typeface="+mn-ea"/>
+              </a:rPr>
+              <a:t>https://github.com/McLight-Note/Web-Server-Programming/blob/main/Mid-term/Task-3.html</a:t>
+            </a:r>
+            <a:endParaRPr lang="en-US" altLang="en-US" sz="1400" dirty="0">
               <a:solidFill>
-                <a:schemeClr val="tx1"/>
+                <a:srgbClr val="404040"/>
               </a:solidFill>
-              <a:effectLst/>
-              <a:uLnTx/>
-              <a:uFillTx/>
-              <a:latin typeface="+mn-lt"/>
-              <a:ea typeface="+mn-ea"/>
-              <a:cs typeface="+mn-cs"/>
+              <a:ea typeface="Calibri" panose="020F0502020204030204" pitchFamily="34" charset="0"/>
+              <a:sym typeface="Arial" panose="020B0604020202090204" pitchFamily="34" charset="0"/>
             </a:endParaRPr>
           </a:p>
         </p:txBody>
       </p:sp>
       <p:pic>
         <p:nvPicPr>
-          <p:cNvPr id="3" name="Picture 2" descr="IMAGE 2025-04-29 13:30:51"/>
+          <p:cNvPr id="4" name="Picture 3" descr="Screenshot 2025-10-24 at 1.57.16 PM"/>
           <p:cNvPicPr>
             <a:picLocks noChangeAspect="1"/>
           </p:cNvPicPr>
@@ -3060,8 +2864,8 @@
         </p:blipFill>
         <p:spPr>
           <a:xfrm>
-            <a:off x="1593215" y="1300480"/>
-            <a:ext cx="8562975" cy="4823460"/>
+            <a:off x="193675" y="732790"/>
+            <a:ext cx="6530340" cy="5485130"/>
           </a:xfrm>
           <a:prstGeom prst="rect">
             <a:avLst/>
@@ -3126,8 +2930,8 @@
         </p:nvSpPr>
         <p:spPr>
           <a:xfrm>
-            <a:off x="1610360" y="405765"/>
-            <a:ext cx="7923530" cy="645160"/>
+            <a:off x="0" y="0"/>
+            <a:ext cx="3966210" cy="645160"/>
           </a:xfrm>
           <a:prstGeom prst="rect">
             <a:avLst/>
@@ -3152,7 +2956,7 @@
                 </a:solidFill>
                 <a:ea typeface="Calibri" panose="020F0502020204030204" pitchFamily="34" charset="0"/>
               </a:rPr>
-              <a:t>User Evaluation</a:t>
+              <a:t>Code samples:</a:t>
             </a:r>
             <a:endParaRPr lang="en-US" altLang="en-US" sz="3600" b="1" dirty="0">
               <a:solidFill>
@@ -3165,88 +2969,14 @@
       </p:sp>
       <p:sp>
         <p:nvSpPr>
-          <p:cNvPr id="12" name="矩形 11"/>
+          <p:cNvPr id="11" name="矩形 8"/>
           <p:cNvSpPr/>
           <p:nvPr/>
         </p:nvSpPr>
         <p:spPr>
           <a:xfrm>
-            <a:off x="828675" y="1729105"/>
-            <a:ext cx="10515600" cy="4653280"/>
-          </a:xfrm>
-          <a:prstGeom prst="rect">
-            <a:avLst/>
-          </a:prstGeom>
-          <a:noFill/>
-          <a:ln>
-            <a:solidFill>
-              <a:schemeClr val="tx1"/>
-            </a:solidFill>
-          </a:ln>
-        </p:spPr>
-        <p:style>
-          <a:lnRef idx="2">
-            <a:schemeClr val="accent1">
-              <a:shade val="50000"/>
-            </a:schemeClr>
-          </a:lnRef>
-          <a:fillRef idx="1">
-            <a:schemeClr val="accent1"/>
-          </a:fillRef>
-          <a:effectRef idx="0">
-            <a:schemeClr val="accent1"/>
-          </a:effectRef>
-          <a:fontRef idx="minor">
-            <a:schemeClr val="lt1"/>
-          </a:fontRef>
-        </p:style>
-        <p:txBody>
-          <a:bodyPr anchor="ctr"/>
-          <a:lstStyle/>
-          <a:p>
-            <a:pPr marL="0" marR="0" lvl="0" indent="0" algn="ctr" defTabSz="914400" rtl="0" eaLnBrk="1" fontAlgn="auto" latinLnBrk="0" hangingPunct="1">
-              <a:lnSpc>
-                <a:spcPct val="100000"/>
-              </a:lnSpc>
-              <a:spcBef>
-                <a:spcPts val="0"/>
-              </a:spcBef>
-              <a:spcAft>
-                <a:spcPts val="0"/>
-              </a:spcAft>
-              <a:buClrTx/>
-              <a:buSzTx/>
-              <a:buFontTx/>
-              <a:buNone/>
-              <a:defRPr/>
-            </a:pPr>
-            <a:endParaRPr kumimoji="0" lang="zh-CN" altLang="en-US" sz="1800" b="0" i="0" u="none" strike="noStrike" kern="1200" cap="none" spc="0" normalizeH="0" baseline="0" noProof="0">
-              <a:ln>
-                <a:noFill/>
-              </a:ln>
-              <a:solidFill>
-                <a:schemeClr val="lt1"/>
-              </a:solidFill>
-              <a:effectLst/>
-              <a:uLnTx/>
-              <a:uFillTx/>
-              <a:latin typeface="+mn-lt"/>
-              <a:ea typeface="+mn-ea"/>
-              <a:cs typeface="+mn-cs"/>
-            </a:endParaRPr>
-          </a:p>
-        </p:txBody>
-      </p:sp>
-      <p:sp>
-        <p:nvSpPr>
-          <p:cNvPr id="10255" name="矩形 8"/>
-          <p:cNvSpPr/>
-          <p:nvPr/>
-        </p:nvSpPr>
-        <p:spPr>
-          <a:xfrm>
-            <a:off x="1012190" y="2572385"/>
-            <a:ext cx="9545955" cy="1992630"/>
+            <a:off x="109220" y="6600190"/>
+            <a:ext cx="11511280" cy="354330"/>
           </a:xfrm>
           <a:prstGeom prst="rect">
             <a:avLst/>
@@ -3258,10 +2988,10 @@
         </p:spPr>
         <p:txBody>
           <a:bodyPr wrap="square" lIns="0" tIns="0" rIns="0" bIns="0" anchor="t">
-            <a:spAutoFit/>
+            <a:noAutofit/>
           </a:bodyPr>
           <a:p>
-            <a:pPr marL="457200" lvl="1" indent="457200" algn="l" defTabSz="1216025">
+            <a:pPr indent="457200" algn="l" defTabSz="1216025">
               <a:lnSpc>
                 <a:spcPct val="90000"/>
               </a:lnSpc>
@@ -3271,16 +3001,22 @@
               <a:buFont typeface="Arial" panose="020B0604020202090204" pitchFamily="34" charset="0"/>
             </a:pPr>
             <a:r>
-              <a:rPr lang="en-US" altLang="en-US" sz="2400" dirty="0">
+              <a:rPr lang="en-US" altLang="en-US" sz="1400" dirty="0">
                 <a:solidFill>
                   <a:srgbClr val="404040"/>
                 </a:solidFill>
                 <a:ea typeface="Calibri" panose="020F0502020204030204" pitchFamily="34" charset="0"/>
                 <a:sym typeface="Arial" panose="020B0604020202090204" pitchFamily="34" charset="0"/>
               </a:rPr>
-              <a:t>The prototype is demonstrated to the real users — doctors, nurses, and administrative personnel — for practical testing. They work with the system, test its features, and offer insightful feedback based on their everyday workflow and real-world requirements. This feedback is essential because it identifies what is good and what should be changed.</a:t>
+              <a:t>Here are all the codes for this application: </a:t>
             </a:r>
-            <a:endParaRPr lang="en-US" altLang="en-US" sz="2400" dirty="0">
+            <a:r>
+              <a:rPr lang="en-US" altLang="en-US" sz="1400">
+                <a:sym typeface="+mn-ea"/>
+              </a:rPr>
+              <a:t>https://github.com/McLight-Note/Web-Server-Programming/blob/main/Mid-term/Task-3.html</a:t>
+            </a:r>
+            <a:endParaRPr lang="en-US" altLang="en-US" sz="1400" dirty="0">
               <a:solidFill>
                 <a:srgbClr val="404040"/>
               </a:solidFill>
@@ -3290,6 +3026,30 @@
           </a:p>
         </p:txBody>
       </p:sp>
+      <p:pic>
+        <p:nvPicPr>
+          <p:cNvPr id="2" name="Picture 1" descr="Screenshot 2025-10-24 at 1.58.14 PM"/>
+          <p:cNvPicPr>
+            <a:picLocks noChangeAspect="1"/>
+          </p:cNvPicPr>
+          <p:nvPr/>
+        </p:nvPicPr>
+        <p:blipFill>
+          <a:blip r:embed="rId2"/>
+          <a:stretch>
+            <a:fillRect/>
+          </a:stretch>
+        </p:blipFill>
+        <p:spPr>
+          <a:xfrm>
+            <a:off x="1560830" y="985520"/>
+            <a:ext cx="9262110" cy="5158740"/>
+          </a:xfrm>
+          <a:prstGeom prst="rect">
+            <a:avLst/>
+          </a:prstGeom>
+        </p:spPr>
+      </p:pic>
     </p:spTree>
   </p:cSld>
   <p:clrMapOvr>
@@ -3348,8 +3108,8 @@
         </p:nvSpPr>
         <p:spPr>
           <a:xfrm>
-            <a:off x="1610360" y="405765"/>
-            <a:ext cx="7923530" cy="645160"/>
+            <a:off x="0" y="0"/>
+            <a:ext cx="1701800" cy="645160"/>
           </a:xfrm>
           <a:prstGeom prst="rect">
             <a:avLst/>
@@ -3374,7 +3134,7 @@
                 </a:solidFill>
                 <a:ea typeface="Calibri" panose="020F0502020204030204" pitchFamily="34" charset="0"/>
               </a:rPr>
-              <a:t>Refinement</a:t>
+              <a:t>Result:</a:t>
             </a:r>
             <a:endParaRPr lang="en-US" altLang="en-US" sz="3600" b="1" dirty="0">
               <a:solidFill>
@@ -3387,88 +3147,14 @@
       </p:sp>
       <p:sp>
         <p:nvSpPr>
-          <p:cNvPr id="12" name="矩形 11"/>
+          <p:cNvPr id="11" name="矩形 8"/>
           <p:cNvSpPr/>
           <p:nvPr/>
         </p:nvSpPr>
         <p:spPr>
           <a:xfrm>
-            <a:off x="828675" y="1729105"/>
-            <a:ext cx="10515600" cy="4653280"/>
-          </a:xfrm>
-          <a:prstGeom prst="rect">
-            <a:avLst/>
-          </a:prstGeom>
-          <a:noFill/>
-          <a:ln>
-            <a:solidFill>
-              <a:schemeClr val="tx1"/>
-            </a:solidFill>
-          </a:ln>
-        </p:spPr>
-        <p:style>
-          <a:lnRef idx="2">
-            <a:schemeClr val="accent1">
-              <a:shade val="50000"/>
-            </a:schemeClr>
-          </a:lnRef>
-          <a:fillRef idx="1">
-            <a:schemeClr val="accent1"/>
-          </a:fillRef>
-          <a:effectRef idx="0">
-            <a:schemeClr val="accent1"/>
-          </a:effectRef>
-          <a:fontRef idx="minor">
-            <a:schemeClr val="lt1"/>
-          </a:fontRef>
-        </p:style>
-        <p:txBody>
-          <a:bodyPr anchor="ctr"/>
-          <a:lstStyle/>
-          <a:p>
-            <a:pPr marL="0" marR="0" lvl="0" indent="0" algn="ctr" defTabSz="914400" rtl="0" eaLnBrk="1" fontAlgn="auto" latinLnBrk="0" hangingPunct="1">
-              <a:lnSpc>
-                <a:spcPct val="100000"/>
-              </a:lnSpc>
-              <a:spcBef>
-                <a:spcPts val="0"/>
-              </a:spcBef>
-              <a:spcAft>
-                <a:spcPts val="0"/>
-              </a:spcAft>
-              <a:buClrTx/>
-              <a:buSzTx/>
-              <a:buFontTx/>
-              <a:buNone/>
-              <a:defRPr/>
-            </a:pPr>
-            <a:endParaRPr kumimoji="0" lang="zh-CN" altLang="en-US" sz="1800" b="0" i="0" u="none" strike="noStrike" kern="1200" cap="none" spc="0" normalizeH="0" baseline="0" noProof="0">
-              <a:ln>
-                <a:noFill/>
-              </a:ln>
-              <a:solidFill>
-                <a:schemeClr val="lt1"/>
-              </a:solidFill>
-              <a:effectLst/>
-              <a:uLnTx/>
-              <a:uFillTx/>
-              <a:latin typeface="+mn-lt"/>
-              <a:ea typeface="+mn-ea"/>
-              <a:cs typeface="+mn-cs"/>
-            </a:endParaRPr>
-          </a:p>
-        </p:txBody>
-      </p:sp>
-      <p:sp>
-        <p:nvSpPr>
-          <p:cNvPr id="10253" name="文本框 6"/>
-          <p:cNvSpPr txBox="1"/>
-          <p:nvPr/>
-        </p:nvSpPr>
-        <p:spPr>
-          <a:xfrm>
-            <a:off x="956945" y="1729105"/>
-            <a:ext cx="9671685" cy="929640"/>
+            <a:off x="109220" y="6600190"/>
+            <a:ext cx="11511280" cy="354330"/>
           </a:xfrm>
           <a:prstGeom prst="rect">
             <a:avLst/>
@@ -3479,47 +3165,11 @@
           </a:ln>
         </p:spPr>
         <p:txBody>
-          <a:bodyPr wrap="square" anchor="t">
+          <a:bodyPr wrap="square" lIns="0" tIns="0" rIns="0" bIns="0" anchor="t">
             <a:noAutofit/>
           </a:bodyPr>
           <a:p>
-            <a:pPr>
-              <a:buFont typeface="Arial" panose="020B0604020202090204" pitchFamily="34" charset="0"/>
-            </a:pPr>
-            <a:endParaRPr lang="en-US" altLang="en-US" sz="3200" b="1" dirty="0">
-              <a:solidFill>
-                <a:srgbClr val="404040"/>
-              </a:solidFill>
-              <a:ea typeface="Calibri" panose="020F0502020204030204" pitchFamily="34" charset="0"/>
-            </a:endParaRPr>
-          </a:p>
-        </p:txBody>
-      </p:sp>
-      <p:sp>
-        <p:nvSpPr>
-          <p:cNvPr id="10255" name="矩形 8"/>
-          <p:cNvSpPr/>
-          <p:nvPr/>
-        </p:nvSpPr>
-        <p:spPr>
-          <a:xfrm>
-            <a:off x="1082675" y="2924175"/>
-            <a:ext cx="9545955" cy="1992630"/>
-          </a:xfrm>
-          <a:prstGeom prst="rect">
-            <a:avLst/>
-          </a:prstGeom>
-          <a:noFill/>
-          <a:ln w="9525">
-            <a:noFill/>
-          </a:ln>
-        </p:spPr>
-        <p:txBody>
-          <a:bodyPr wrap="square" lIns="0" tIns="0" rIns="0" bIns="0" anchor="t">
-            <a:spAutoFit/>
-          </a:bodyPr>
-          <a:p>
-            <a:pPr marL="457200" lvl="1" indent="457200" algn="l" defTabSz="1216025">
+            <a:pPr indent="457200" algn="l" defTabSz="1216025">
               <a:lnSpc>
                 <a:spcPct val="90000"/>
               </a:lnSpc>
@@ -3529,16 +3179,22 @@
               <a:buFont typeface="Arial" panose="020B0604020202090204" pitchFamily="34" charset="0"/>
             </a:pPr>
             <a:r>
-              <a:rPr lang="en-US" altLang="en-US" sz="2400" dirty="0">
+              <a:rPr lang="en-US" altLang="en-US" sz="1400" dirty="0">
                 <a:solidFill>
                   <a:srgbClr val="404040"/>
                 </a:solidFill>
                 <a:ea typeface="Calibri" panose="020F0502020204030204" pitchFamily="34" charset="0"/>
                 <a:sym typeface="Arial" panose="020B0604020202090204" pitchFamily="34" charset="0"/>
               </a:rPr>
-              <a:t>Developers come back with the feedback and make changes to the prototype. This could include fixing usability issues, adding new features, or removing unnecessary ones. This can happen several times within a cycle until users are satisfied with the functionality and design. Every iteration brings the final system nearer.</a:t>
+              <a:t>Here are all the codes for this application: </a:t>
             </a:r>
-            <a:endParaRPr lang="en-US" altLang="en-US" sz="2400" dirty="0">
+            <a:r>
+              <a:rPr lang="en-US" altLang="en-US" sz="1400">
+                <a:sym typeface="+mn-ea"/>
+              </a:rPr>
+              <a:t>https://github.com/McLight-Note/Web-Server-Programming/blob/main/Mid-term/Task-2.html</a:t>
+            </a:r>
+            <a:endParaRPr lang="en-US" altLang="en-US" sz="1400" dirty="0">
               <a:solidFill>
                 <a:srgbClr val="404040"/>
               </a:solidFill>
@@ -3560,536 +3216,6 @@
 </file>
 
 <file path=ppt/slides/slide15.xml><?xml version="1.0" encoding="utf-8"?>
-<p:sld xmlns:a="http://schemas.openxmlformats.org/drawingml/2006/main" xmlns:r="http://schemas.openxmlformats.org/officeDocument/2006/relationships" xmlns:p="http://schemas.openxmlformats.org/presentationml/2006/main">
-  <p:cSld>
-    <p:spTree>
-      <p:nvGrpSpPr>
-        <p:cNvPr id="1" name=""/>
-        <p:cNvGrpSpPr/>
-        <p:nvPr/>
-      </p:nvGrpSpPr>
-      <p:grpSpPr/>
-      <p:pic>
-        <p:nvPicPr>
-          <p:cNvPr id="10241" name="图片 3"/>
-          <p:cNvPicPr>
-            <a:picLocks noChangeAspect="1"/>
-          </p:cNvPicPr>
-          <p:nvPr/>
-        </p:nvPicPr>
-        <p:blipFill>
-          <a:blip r:embed="rId1"/>
-          <a:srcRect l="5727" r="16841" b="26530"/>
-          <a:stretch>
-            <a:fillRect/>
-          </a:stretch>
-        </p:blipFill>
-        <p:spPr>
-          <a:xfrm>
-            <a:off x="0" y="0"/>
-            <a:ext cx="12192000" cy="6858000"/>
-          </a:xfrm>
-          <a:prstGeom prst="rect">
-            <a:avLst/>
-          </a:prstGeom>
-          <a:noFill/>
-          <a:ln w="9525">
-            <a:noFill/>
-          </a:ln>
-        </p:spPr>
-      </p:pic>
-      <p:sp>
-        <p:nvSpPr>
-          <p:cNvPr id="10250" name="文本框 28"/>
-          <p:cNvSpPr txBox="1"/>
-          <p:nvPr/>
-        </p:nvSpPr>
-        <p:spPr>
-          <a:xfrm>
-            <a:off x="1610360" y="405765"/>
-            <a:ext cx="7923530" cy="645160"/>
-          </a:xfrm>
-          <a:prstGeom prst="rect">
-            <a:avLst/>
-          </a:prstGeom>
-          <a:noFill/>
-          <a:ln w="9525">
-            <a:noFill/>
-          </a:ln>
-        </p:spPr>
-        <p:txBody>
-          <a:bodyPr wrap="square" anchor="t">
-            <a:spAutoFit/>
-          </a:bodyPr>
-          <a:p>
-            <a:pPr>
-              <a:buFont typeface="Arial" panose="020B0604020202090204" pitchFamily="34" charset="0"/>
-            </a:pPr>
-            <a:r>
-              <a:rPr lang="en-US" altLang="en-US" sz="3600" b="1" dirty="0">
-                <a:solidFill>
-                  <a:srgbClr val="404040"/>
-                </a:solidFill>
-                <a:ea typeface="Calibri" panose="020F0502020204030204" pitchFamily="34" charset="0"/>
-              </a:rPr>
-              <a:t>Final Product</a:t>
-            </a:r>
-            <a:endParaRPr lang="en-US" altLang="en-US" sz="3600" b="1" dirty="0">
-              <a:solidFill>
-                <a:srgbClr val="404040"/>
-              </a:solidFill>
-              <a:ea typeface="Calibri" panose="020F0502020204030204" pitchFamily="34" charset="0"/>
-            </a:endParaRPr>
-          </a:p>
-        </p:txBody>
-      </p:sp>
-      <p:sp>
-        <p:nvSpPr>
-          <p:cNvPr id="12" name="矩形 11"/>
-          <p:cNvSpPr/>
-          <p:nvPr/>
-        </p:nvSpPr>
-        <p:spPr>
-          <a:xfrm>
-            <a:off x="828675" y="1729105"/>
-            <a:ext cx="10515600" cy="4653280"/>
-          </a:xfrm>
-          <a:prstGeom prst="rect">
-            <a:avLst/>
-          </a:prstGeom>
-          <a:noFill/>
-          <a:ln>
-            <a:solidFill>
-              <a:schemeClr val="tx1"/>
-            </a:solidFill>
-          </a:ln>
-        </p:spPr>
-        <p:style>
-          <a:lnRef idx="2">
-            <a:schemeClr val="accent1">
-              <a:shade val="50000"/>
-            </a:schemeClr>
-          </a:lnRef>
-          <a:fillRef idx="1">
-            <a:schemeClr val="accent1"/>
-          </a:fillRef>
-          <a:effectRef idx="0">
-            <a:schemeClr val="accent1"/>
-          </a:effectRef>
-          <a:fontRef idx="minor">
-            <a:schemeClr val="lt1"/>
-          </a:fontRef>
-        </p:style>
-        <p:txBody>
-          <a:bodyPr anchor="ctr"/>
-          <a:lstStyle/>
-          <a:p>
-            <a:pPr marL="0" marR="0" lvl="0" indent="0" algn="ctr" defTabSz="914400" rtl="0" eaLnBrk="1" fontAlgn="auto" latinLnBrk="0" hangingPunct="1">
-              <a:lnSpc>
-                <a:spcPct val="100000"/>
-              </a:lnSpc>
-              <a:spcBef>
-                <a:spcPts val="0"/>
-              </a:spcBef>
-              <a:spcAft>
-                <a:spcPts val="0"/>
-              </a:spcAft>
-              <a:buClrTx/>
-              <a:buSzTx/>
-              <a:buFontTx/>
-              <a:buNone/>
-              <a:defRPr/>
-            </a:pPr>
-            <a:endParaRPr kumimoji="0" lang="zh-CN" altLang="en-US" sz="1800" b="0" i="0" u="none" strike="noStrike" kern="1200" cap="none" spc="0" normalizeH="0" baseline="0" noProof="0">
-              <a:ln>
-                <a:noFill/>
-              </a:ln>
-              <a:solidFill>
-                <a:schemeClr val="lt1"/>
-              </a:solidFill>
-              <a:effectLst/>
-              <a:uLnTx/>
-              <a:uFillTx/>
-              <a:latin typeface="+mn-lt"/>
-              <a:ea typeface="+mn-ea"/>
-              <a:cs typeface="+mn-cs"/>
-            </a:endParaRPr>
-          </a:p>
-        </p:txBody>
-      </p:sp>
-      <p:sp>
-        <p:nvSpPr>
-          <p:cNvPr id="10253" name="文本框 6"/>
-          <p:cNvSpPr txBox="1"/>
-          <p:nvPr/>
-        </p:nvSpPr>
-        <p:spPr>
-          <a:xfrm>
-            <a:off x="956945" y="1729105"/>
-            <a:ext cx="9671685" cy="929640"/>
-          </a:xfrm>
-          <a:prstGeom prst="rect">
-            <a:avLst/>
-          </a:prstGeom>
-          <a:noFill/>
-          <a:ln w="9525">
-            <a:noFill/>
-          </a:ln>
-        </p:spPr>
-        <p:txBody>
-          <a:bodyPr wrap="square" anchor="t">
-            <a:noAutofit/>
-          </a:bodyPr>
-          <a:p>
-            <a:pPr>
-              <a:buFont typeface="Arial" panose="020B0604020202090204" pitchFamily="34" charset="0"/>
-            </a:pPr>
-            <a:endParaRPr lang="en-US" altLang="en-US" sz="3200" b="1" dirty="0">
-              <a:solidFill>
-                <a:srgbClr val="404040"/>
-              </a:solidFill>
-              <a:ea typeface="Calibri" panose="020F0502020204030204" pitchFamily="34" charset="0"/>
-            </a:endParaRPr>
-          </a:p>
-        </p:txBody>
-      </p:sp>
-      <p:sp>
-        <p:nvSpPr>
-          <p:cNvPr id="10255" name="矩形 8"/>
-          <p:cNvSpPr/>
-          <p:nvPr/>
-        </p:nvSpPr>
-        <p:spPr>
-          <a:xfrm>
-            <a:off x="1082675" y="2760980"/>
-            <a:ext cx="9545955" cy="2324735"/>
-          </a:xfrm>
-          <a:prstGeom prst="rect">
-            <a:avLst/>
-          </a:prstGeom>
-          <a:noFill/>
-          <a:ln w="9525">
-            <a:noFill/>
-          </a:ln>
-        </p:spPr>
-        <p:txBody>
-          <a:bodyPr wrap="square" lIns="0" tIns="0" rIns="0" bIns="0" anchor="t">
-            <a:spAutoFit/>
-          </a:bodyPr>
-          <a:p>
-            <a:pPr marL="457200" lvl="1" indent="457200" algn="l" defTabSz="1216025">
-              <a:lnSpc>
-                <a:spcPct val="90000"/>
-              </a:lnSpc>
-              <a:spcBef>
-                <a:spcPct val="20000"/>
-              </a:spcBef>
-              <a:buFont typeface="Arial" panose="020B0604020202090204" pitchFamily="34" charset="0"/>
-            </a:pPr>
-            <a:r>
-              <a:rPr lang="en-US" altLang="en-US" sz="2400" dirty="0">
-                <a:solidFill>
-                  <a:srgbClr val="404040"/>
-                </a:solidFill>
-                <a:ea typeface="Calibri" panose="020F0502020204030204" pitchFamily="34" charset="0"/>
-                <a:sym typeface="Arial" panose="020B0604020202090204" pitchFamily="34" charset="0"/>
-              </a:rPr>
-              <a:t>Once all the issues in the feedback are addressed and the prototype has lived up to expectations, the team proceeds with creating the final system. The final system includes all the technical requirements like a secure database, interface-friendly interface, and full functionality. The final product is now ready to be fully deployed in the hospital environment to enhance patient care and administrative effectiveness.</a:t>
-            </a:r>
-            <a:endParaRPr lang="en-US" altLang="en-US" sz="2400" dirty="0">
-              <a:solidFill>
-                <a:srgbClr val="404040"/>
-              </a:solidFill>
-              <a:ea typeface="Calibri" panose="020F0502020204030204" pitchFamily="34" charset="0"/>
-              <a:sym typeface="Arial" panose="020B0604020202090204" pitchFamily="34" charset="0"/>
-            </a:endParaRPr>
-          </a:p>
-        </p:txBody>
-      </p:sp>
-    </p:spTree>
-  </p:cSld>
-  <p:clrMapOvr>
-    <a:masterClrMapping/>
-  </p:clrMapOvr>
-  <p:transition spd="slow">
-    <p:wipe/>
-  </p:transition>
-</p:sld>
-</file>
-
-<file path=ppt/slides/slide16.xml><?xml version="1.0" encoding="utf-8"?>
-<p:sld xmlns:a="http://schemas.openxmlformats.org/drawingml/2006/main" xmlns:r="http://schemas.openxmlformats.org/officeDocument/2006/relationships" xmlns:p="http://schemas.openxmlformats.org/presentationml/2006/main">
-  <p:cSld>
-    <p:spTree>
-      <p:nvGrpSpPr>
-        <p:cNvPr id="1" name=""/>
-        <p:cNvGrpSpPr/>
-        <p:nvPr/>
-      </p:nvGrpSpPr>
-      <p:grpSpPr/>
-      <p:pic>
-        <p:nvPicPr>
-          <p:cNvPr id="10241" name="图片 3"/>
-          <p:cNvPicPr>
-            <a:picLocks noChangeAspect="1"/>
-          </p:cNvPicPr>
-          <p:nvPr/>
-        </p:nvPicPr>
-        <p:blipFill>
-          <a:blip r:embed="rId1"/>
-          <a:srcRect l="5727" r="16841" b="26530"/>
-          <a:stretch>
-            <a:fillRect/>
-          </a:stretch>
-        </p:blipFill>
-        <p:spPr>
-          <a:xfrm>
-            <a:off x="0" y="0"/>
-            <a:ext cx="12192000" cy="6858000"/>
-          </a:xfrm>
-          <a:prstGeom prst="rect">
-            <a:avLst/>
-          </a:prstGeom>
-          <a:noFill/>
-          <a:ln w="9525">
-            <a:noFill/>
-          </a:ln>
-        </p:spPr>
-      </p:pic>
-      <p:sp>
-        <p:nvSpPr>
-          <p:cNvPr id="10250" name="文本框 28"/>
-          <p:cNvSpPr txBox="1"/>
-          <p:nvPr/>
-        </p:nvSpPr>
-        <p:spPr>
-          <a:xfrm>
-            <a:off x="1610360" y="405765"/>
-            <a:ext cx="7923530" cy="645160"/>
-          </a:xfrm>
-          <a:prstGeom prst="rect">
-            <a:avLst/>
-          </a:prstGeom>
-          <a:noFill/>
-          <a:ln w="9525">
-            <a:noFill/>
-          </a:ln>
-        </p:spPr>
-        <p:txBody>
-          <a:bodyPr wrap="square" anchor="t">
-            <a:spAutoFit/>
-          </a:bodyPr>
-          <a:p>
-            <a:pPr>
-              <a:buFont typeface="Arial" panose="020B0604020202090204" pitchFamily="34" charset="0"/>
-            </a:pPr>
-            <a:r>
-              <a:rPr lang="en-US" altLang="en-US" sz="3600" b="1" dirty="0">
-                <a:solidFill>
-                  <a:srgbClr val="404040"/>
-                </a:solidFill>
-                <a:ea typeface="Calibri" panose="020F0502020204030204" pitchFamily="34" charset="0"/>
-              </a:rPr>
-              <a:t>Conclusion</a:t>
-            </a:r>
-            <a:endParaRPr lang="en-US" altLang="en-US" sz="3600" b="1" dirty="0">
-              <a:solidFill>
-                <a:srgbClr val="404040"/>
-              </a:solidFill>
-              <a:ea typeface="Calibri" panose="020F0502020204030204" pitchFamily="34" charset="0"/>
-            </a:endParaRPr>
-          </a:p>
-        </p:txBody>
-      </p:sp>
-      <p:sp>
-        <p:nvSpPr>
-          <p:cNvPr id="12" name="矩形 11"/>
-          <p:cNvSpPr/>
-          <p:nvPr/>
-        </p:nvSpPr>
-        <p:spPr>
-          <a:xfrm>
-            <a:off x="828675" y="247650"/>
-            <a:ext cx="10515600" cy="6134735"/>
-          </a:xfrm>
-          <a:prstGeom prst="rect">
-            <a:avLst/>
-          </a:prstGeom>
-          <a:noFill/>
-          <a:ln>
-            <a:solidFill>
-              <a:schemeClr val="tx1"/>
-            </a:solidFill>
-          </a:ln>
-        </p:spPr>
-        <p:style>
-          <a:lnRef idx="2">
-            <a:schemeClr val="accent1">
-              <a:shade val="50000"/>
-            </a:schemeClr>
-          </a:lnRef>
-          <a:fillRef idx="1">
-            <a:schemeClr val="accent1"/>
-          </a:fillRef>
-          <a:effectRef idx="0">
-            <a:schemeClr val="accent1"/>
-          </a:effectRef>
-          <a:fontRef idx="minor">
-            <a:schemeClr val="lt1"/>
-          </a:fontRef>
-        </p:style>
-        <p:txBody>
-          <a:bodyPr anchor="ctr"/>
-          <a:lstStyle/>
-          <a:p>
-            <a:pPr marL="0" marR="0" lvl="0" indent="0" algn="ctr" defTabSz="914400" rtl="0" eaLnBrk="1" fontAlgn="auto" latinLnBrk="0" hangingPunct="1">
-              <a:lnSpc>
-                <a:spcPct val="100000"/>
-              </a:lnSpc>
-              <a:spcBef>
-                <a:spcPts val="0"/>
-              </a:spcBef>
-              <a:spcAft>
-                <a:spcPts val="0"/>
-              </a:spcAft>
-              <a:buClrTx/>
-              <a:buSzTx/>
-              <a:buFontTx/>
-              <a:buNone/>
-              <a:defRPr/>
-            </a:pPr>
-            <a:endParaRPr kumimoji="0" lang="zh-CN" altLang="en-US" sz="1800" b="0" i="0" u="none" strike="noStrike" kern="1200" cap="none" spc="0" normalizeH="0" baseline="0" noProof="0">
-              <a:ln>
-                <a:noFill/>
-              </a:ln>
-              <a:solidFill>
-                <a:schemeClr val="lt1"/>
-              </a:solidFill>
-              <a:effectLst/>
-              <a:uLnTx/>
-              <a:uFillTx/>
-              <a:latin typeface="+mn-lt"/>
-              <a:ea typeface="+mn-ea"/>
-              <a:cs typeface="+mn-cs"/>
-            </a:endParaRPr>
-          </a:p>
-        </p:txBody>
-      </p:sp>
-      <p:sp>
-        <p:nvSpPr>
-          <p:cNvPr id="10253" name="文本框 6"/>
-          <p:cNvSpPr txBox="1"/>
-          <p:nvPr/>
-        </p:nvSpPr>
-        <p:spPr>
-          <a:xfrm>
-            <a:off x="956945" y="1356995"/>
-            <a:ext cx="10119360" cy="4553585"/>
-          </a:xfrm>
-          <a:prstGeom prst="rect">
-            <a:avLst/>
-          </a:prstGeom>
-          <a:noFill/>
-          <a:ln w="9525">
-            <a:noFill/>
-          </a:ln>
-        </p:spPr>
-        <p:txBody>
-          <a:bodyPr wrap="square" anchor="t">
-            <a:noAutofit/>
-          </a:bodyPr>
-          <a:p>
-            <a:pPr indent="457200">
-              <a:buFont typeface="Arial" panose="020B0604020202090204" pitchFamily="34" charset="0"/>
-            </a:pPr>
-            <a:r>
-              <a:rPr lang="en-US" altLang="en-US" sz="2800" dirty="0">
-                <a:solidFill>
-                  <a:srgbClr val="404040"/>
-                </a:solidFill>
-                <a:ea typeface="Calibri" panose="020F0502020204030204" pitchFamily="34" charset="0"/>
-              </a:rPr>
-              <a:t>Using the </a:t>
-            </a:r>
-            <a:r>
-              <a:rPr lang="en-US" altLang="en-US" sz="2800" b="1" dirty="0">
-                <a:solidFill>
-                  <a:srgbClr val="404040"/>
-                </a:solidFill>
-                <a:ea typeface="Calibri" panose="020F0502020204030204" pitchFamily="34" charset="0"/>
-              </a:rPr>
-              <a:t>Prototype Model</a:t>
-            </a:r>
-            <a:r>
-              <a:rPr lang="en-US" altLang="en-US" sz="2800" dirty="0">
-                <a:solidFill>
-                  <a:srgbClr val="404040"/>
-                </a:solidFill>
-                <a:ea typeface="Calibri" panose="020F0502020204030204" pitchFamily="34" charset="0"/>
-              </a:rPr>
-              <a:t> helped the team quickly build a basic hospital system with patient registration, appointment scheduling, and billing features. Doctors, nurses, and admin staff tested it and gave feedback early on. Thanks to their suggestions, the system could be improved before making the final version. This way, the developers made sure the system fits real hospital needs and avoided bigger problems later.</a:t>
-            </a:r>
-            <a:endParaRPr lang="en-US" altLang="en-US" sz="2800" dirty="0">
-              <a:solidFill>
-                <a:srgbClr val="404040"/>
-              </a:solidFill>
-              <a:ea typeface="Calibri" panose="020F0502020204030204" pitchFamily="34" charset="0"/>
-            </a:endParaRPr>
-          </a:p>
-          <a:p>
-            <a:pPr indent="457200">
-              <a:buFont typeface="Arial" panose="020B0604020202090204" pitchFamily="34" charset="0"/>
-            </a:pPr>
-            <a:endParaRPr lang="en-US" altLang="en-US" sz="2800" dirty="0">
-              <a:solidFill>
-                <a:srgbClr val="404040"/>
-              </a:solidFill>
-              <a:ea typeface="Calibri" panose="020F0502020204030204" pitchFamily="34" charset="0"/>
-            </a:endParaRPr>
-          </a:p>
-          <a:p>
-            <a:pPr indent="457200">
-              <a:buFont typeface="Arial" panose="020B0604020202090204" pitchFamily="34" charset="0"/>
-            </a:pPr>
-            <a:r>
-              <a:rPr lang="en-US" altLang="en-US" sz="2800" b="1" dirty="0">
-                <a:solidFill>
-                  <a:srgbClr val="404040"/>
-                </a:solidFill>
-                <a:ea typeface="Calibri" panose="020F0502020204030204" pitchFamily="34" charset="0"/>
-              </a:rPr>
-              <a:t>The Prototype Model</a:t>
-            </a:r>
-            <a:r>
-              <a:rPr lang="en-US" altLang="en-US" sz="2800" dirty="0">
-                <a:solidFill>
-                  <a:srgbClr val="404040"/>
-                </a:solidFill>
-                <a:ea typeface="Calibri" panose="020F0502020204030204" pitchFamily="34" charset="0"/>
-              </a:rPr>
-              <a:t> made the whole process smoother and helped create a system that’s more useful and ready for real use.</a:t>
-            </a:r>
-            <a:endParaRPr lang="en-US" altLang="en-US" sz="2800" dirty="0">
-              <a:solidFill>
-                <a:srgbClr val="404040"/>
-              </a:solidFill>
-              <a:ea typeface="Calibri" panose="020F0502020204030204" pitchFamily="34" charset="0"/>
-            </a:endParaRPr>
-          </a:p>
-        </p:txBody>
-      </p:sp>
-    </p:spTree>
-  </p:cSld>
-  <p:clrMapOvr>
-    <a:masterClrMapping/>
-  </p:clrMapOvr>
-  <p:transition spd="slow">
-    <p:wipe/>
-  </p:transition>
-</p:sld>
-</file>
-
-<file path=ppt/slides/slide17.xml><?xml version="1.0" encoding="utf-8"?>
 <p:sld xmlns:a="http://schemas.openxmlformats.org/drawingml/2006/main" xmlns:r="http://schemas.openxmlformats.org/officeDocument/2006/relationships" xmlns:p="http://schemas.openxmlformats.org/presentationml/2006/main">
   <p:cSld>
     <p:spTree>
@@ -6404,6 +5530,35 @@
           </a:p>
         </p:txBody>
       </p:sp>
+      <p:sp>
+        <p:nvSpPr>
+          <p:cNvPr id="4" name="Text Box 3"/>
+          <p:cNvSpPr txBox="1"/>
+          <p:nvPr/>
+        </p:nvSpPr>
+        <p:spPr>
+          <a:xfrm>
+            <a:off x="3048000" y="3106420"/>
+            <a:ext cx="6096000" cy="645160"/>
+          </a:xfrm>
+          <a:prstGeom prst="rect">
+            <a:avLst/>
+          </a:prstGeom>
+          <a:noFill/>
+        </p:spPr>
+        <p:txBody>
+          <a:bodyPr wrap="square" rtlCol="0" anchor="t">
+            <a:spAutoFit/>
+          </a:bodyPr>
+          <a:p>
+            <a:r>
+              <a:rPr lang="en-US" altLang="en-US"/>
+              <a:t>https://github.com/McLight-Note/Web-Server-Programming/blob/main/Mid-term/Task-2.html</a:t>
+            </a:r>
+            <a:endParaRPr lang="en-US"/>
+          </a:p>
+        </p:txBody>
+      </p:sp>
     </p:spTree>
   </p:cSld>
   <p:clrMapOvr>
@@ -6836,8 +5991,8 @@
         </p:nvSpPr>
         <p:spPr>
           <a:xfrm>
-            <a:off x="1610360" y="405765"/>
-            <a:ext cx="7923530" cy="645160"/>
+            <a:off x="3450590" y="329565"/>
+            <a:ext cx="4799330" cy="946785"/>
           </a:xfrm>
           <a:prstGeom prst="rect">
             <a:avLst/>
@@ -6849,22 +6004,13 @@
         </p:spPr>
         <p:txBody>
           <a:bodyPr wrap="square" anchor="t">
-            <a:spAutoFit/>
+            <a:noAutofit/>
           </a:bodyPr>
           <a:p>
             <a:pPr>
               <a:buFont typeface="Arial" panose="020B0604020202090204" pitchFamily="34" charset="0"/>
             </a:pPr>
-            <a:r>
-              <a:rPr lang="en-US" altLang="en-US" sz="3600" b="1" dirty="0">
-                <a:solidFill>
-                  <a:srgbClr val="404040"/>
-                </a:solidFill>
-                <a:ea typeface="Calibri" panose="020F0502020204030204" pitchFamily="34" charset="0"/>
-              </a:rPr>
-              <a:t>Design</a:t>
-            </a:r>
-            <a:endParaRPr lang="en-US" altLang="en-US" sz="3600" b="1" dirty="0">
+            <a:endParaRPr lang="en-US" altLang="en-US" sz="3200" b="1" dirty="0">
               <a:solidFill>
                 <a:srgbClr val="404040"/>
               </a:solidFill>
@@ -6881,8 +6027,8 @@
         </p:nvSpPr>
         <p:spPr>
           <a:xfrm>
-            <a:off x="828675" y="1729105"/>
-            <a:ext cx="10515600" cy="4653280"/>
+            <a:off x="255905" y="329565"/>
+            <a:ext cx="11500485" cy="6132195"/>
           </a:xfrm>
           <a:prstGeom prst="rect">
             <a:avLst/>
@@ -6949,14 +6095,14 @@
       </p:sp>
       <p:sp>
         <p:nvSpPr>
-          <p:cNvPr id="10253" name="文本框 6"/>
+          <p:cNvPr id="2" name="文本框 28"/>
           <p:cNvSpPr txBox="1"/>
           <p:nvPr/>
         </p:nvSpPr>
         <p:spPr>
           <a:xfrm>
-            <a:off x="956945" y="1729105"/>
-            <a:ext cx="9671685" cy="929640"/>
+            <a:off x="956310" y="1156335"/>
+            <a:ext cx="3625850" cy="645160"/>
           </a:xfrm>
           <a:prstGeom prst="rect">
             <a:avLst/>
@@ -6968,22 +6114,22 @@
         </p:spPr>
         <p:txBody>
           <a:bodyPr wrap="square" anchor="t">
-            <a:noAutofit/>
+            <a:spAutoFit/>
           </a:bodyPr>
           <a:p>
             <a:pPr>
               <a:buFont typeface="Arial" panose="020B0604020202090204" pitchFamily="34" charset="0"/>
             </a:pPr>
             <a:r>
-              <a:rPr lang="en-US" altLang="en-US" sz="3200" b="1" dirty="0">
+              <a:rPr lang="en-US" altLang="en-US" sz="3600" b="1" dirty="0">
                 <a:solidFill>
                   <a:srgbClr val="404040"/>
                 </a:solidFill>
                 <a:ea typeface="Calibri" panose="020F0502020204030204" pitchFamily="34" charset="0"/>
               </a:rPr>
-              <a:t>The program follows 4 main functions:</a:t>
+              <a:t>Question 4:</a:t>
             </a:r>
-            <a:endParaRPr lang="en-US" altLang="en-US" sz="3200" b="1" dirty="0">
+            <a:endParaRPr lang="en-US" altLang="en-US" sz="3600" b="1" dirty="0">
               <a:solidFill>
                 <a:srgbClr val="404040"/>
               </a:solidFill>
@@ -6994,14 +6140,14 @@
       </p:sp>
       <p:sp>
         <p:nvSpPr>
-          <p:cNvPr id="10255" name="矩形 8"/>
-          <p:cNvSpPr/>
+          <p:cNvPr id="3" name="文本框 28"/>
+          <p:cNvSpPr txBox="1"/>
           <p:nvPr/>
         </p:nvSpPr>
         <p:spPr>
           <a:xfrm>
-            <a:off x="1082675" y="3111500"/>
-            <a:ext cx="9545955" cy="2361565"/>
+            <a:off x="1489075" y="2251710"/>
+            <a:ext cx="8722360" cy="2823845"/>
           </a:xfrm>
           <a:prstGeom prst="rect">
             <a:avLst/>
@@ -7012,176 +6158,57 @@
           </a:ln>
         </p:spPr>
         <p:txBody>
-          <a:bodyPr wrap="square" lIns="0" tIns="0" rIns="0" bIns="0" anchor="t">
-            <a:spAutoFit/>
+          <a:bodyPr wrap="square" anchor="t">
+            <a:noAutofit/>
           </a:bodyPr>
           <a:p>
-            <a:pPr marL="457200" lvl="1" indent="457200" algn="l" defTabSz="1216025">
-              <a:lnSpc>
-                <a:spcPct val="90000"/>
-              </a:lnSpc>
-              <a:spcBef>
-                <a:spcPct val="20000"/>
-              </a:spcBef>
+            <a:pPr indent="457200">
               <a:buFont typeface="Arial" panose="020B0604020202090204" pitchFamily="34" charset="0"/>
             </a:pPr>
             <a:r>
-              <a:rPr lang="en-US" altLang="en-US" sz="2400" dirty="0">
+              <a:rPr lang="en-US" altLang="en-US" sz="3600" b="1" dirty="0">
                 <a:solidFill>
                   <a:srgbClr val="404040"/>
                 </a:solidFill>
                 <a:ea typeface="Calibri" panose="020F0502020204030204" pitchFamily="34" charset="0"/>
-                <a:sym typeface="Arial" panose="020B0604020202090204" pitchFamily="34" charset="0"/>
               </a:rPr>
-              <a:t>A simple layout/mockup is created.</a:t>
+              <a:t>Create a simple HTML form to register a new user (fields: name, email) that sends the data to /register using fetch () and JSON.</a:t>
             </a:r>
-            <a:endParaRPr lang="en-US" altLang="en-US" sz="2400" dirty="0">
+            <a:endParaRPr lang="en-US" altLang="en-US" sz="3600" b="1" dirty="0">
               <a:solidFill>
                 <a:srgbClr val="404040"/>
               </a:solidFill>
               <a:ea typeface="Calibri" panose="020F0502020204030204" pitchFamily="34" charset="0"/>
-              <a:sym typeface="Arial" panose="020B0604020202090204" pitchFamily="34" charset="0"/>
             </a:endParaRPr>
           </a:p>
-          <a:p>
-            <a:pPr marL="457200" lvl="1" indent="457200" algn="l" defTabSz="1216025">
-              <a:lnSpc>
-                <a:spcPct val="90000"/>
-              </a:lnSpc>
-              <a:spcBef>
-                <a:spcPct val="20000"/>
-              </a:spcBef>
-              <a:buFont typeface="Arial" panose="020B0604020202090204" pitchFamily="34" charset="0"/>
-            </a:pPr>
-            <a:endParaRPr lang="en-US" altLang="en-US" sz="2400" b="1" dirty="0">
-              <a:solidFill>
-                <a:srgbClr val="404040"/>
-              </a:solidFill>
-              <a:ea typeface="Calibri" panose="020F0502020204030204" pitchFamily="34" charset="0"/>
-              <a:sym typeface="Arial" panose="020B0604020202090204" pitchFamily="34" charset="0"/>
-            </a:endParaRPr>
-          </a:p>
-          <a:p>
-            <a:pPr marL="457200" lvl="1" indent="457200" algn="l" defTabSz="1216025">
-              <a:lnSpc>
-                <a:spcPct val="90000"/>
-              </a:lnSpc>
-              <a:spcBef>
-                <a:spcPct val="20000"/>
-              </a:spcBef>
-              <a:buFont typeface="Arial" panose="020B0604020202090204" pitchFamily="34" charset="0"/>
-            </a:pPr>
+        </p:txBody>
+      </p:sp>
+      <p:sp>
+        <p:nvSpPr>
+          <p:cNvPr id="4" name="Text Box 3"/>
+          <p:cNvSpPr txBox="1"/>
+          <p:nvPr/>
+        </p:nvSpPr>
+        <p:spPr>
+          <a:xfrm>
+            <a:off x="3048000" y="5254625"/>
+            <a:ext cx="6096000" cy="645160"/>
+          </a:xfrm>
+          <a:prstGeom prst="rect">
+            <a:avLst/>
+          </a:prstGeom>
+          <a:noFill/>
+        </p:spPr>
+        <p:txBody>
+          <a:bodyPr wrap="square" rtlCol="0" anchor="t">
+            <a:spAutoFit/>
+          </a:bodyPr>
+          <a:p>
             <a:r>
-              <a:rPr lang="en-US" altLang="en-US" sz="2400" b="1" dirty="0">
-                <a:solidFill>
-                  <a:srgbClr val="404040"/>
-                </a:solidFill>
-                <a:ea typeface="Calibri" panose="020F0502020204030204" pitchFamily="34" charset="0"/>
-                <a:sym typeface="Arial" panose="020B0604020202090204" pitchFamily="34" charset="0"/>
-              </a:rPr>
-              <a:t>Components:</a:t>
+              <a:rPr lang="en-US" altLang="en-US"/>
+              <a:t>https://github.com/McLight-Note/Web-Server-Programming/blob/main/Mid-term/Task-2.html</a:t>
             </a:r>
-            <a:endParaRPr lang="en-US" altLang="en-US" sz="2400" b="1" dirty="0">
-              <a:solidFill>
-                <a:srgbClr val="404040"/>
-              </a:solidFill>
-              <a:ea typeface="Calibri" panose="020F0502020204030204" pitchFamily="34" charset="0"/>
-              <a:sym typeface="Arial" panose="020B0604020202090204" pitchFamily="34" charset="0"/>
-            </a:endParaRPr>
-          </a:p>
-          <a:p>
-            <a:pPr marL="1371600" lvl="3" indent="457200" algn="l" defTabSz="1216025">
-              <a:lnSpc>
-                <a:spcPct val="90000"/>
-              </a:lnSpc>
-              <a:spcBef>
-                <a:spcPct val="20000"/>
-              </a:spcBef>
-              <a:buFont typeface="Arial" panose="020B0604020202090204" pitchFamily="34" charset="0"/>
-            </a:pPr>
-            <a:r>
-              <a:rPr lang="en-US" altLang="en-US" sz="2400" b="1" dirty="0">
-                <a:solidFill>
-                  <a:srgbClr val="404040"/>
-                </a:solidFill>
-                <a:ea typeface="Calibri" panose="020F0502020204030204" pitchFamily="34" charset="0"/>
-                <a:sym typeface="Arial" panose="020B0604020202090204" pitchFamily="34" charset="0"/>
-              </a:rPr>
-              <a:t>- </a:t>
-            </a:r>
-            <a:r>
-              <a:rPr lang="en-US" altLang="en-US" sz="2400" dirty="0">
-                <a:solidFill>
-                  <a:srgbClr val="404040"/>
-                </a:solidFill>
-                <a:ea typeface="Calibri" panose="020F0502020204030204" pitchFamily="34" charset="0"/>
-                <a:sym typeface="Arial" panose="020B0604020202090204" pitchFamily="34" charset="0"/>
-              </a:rPr>
-              <a:t>Patient Registration Form;</a:t>
-            </a:r>
-            <a:endParaRPr lang="en-US" altLang="en-US" sz="2400" dirty="0">
-              <a:solidFill>
-                <a:srgbClr val="404040"/>
-              </a:solidFill>
-              <a:ea typeface="Calibri" panose="020F0502020204030204" pitchFamily="34" charset="0"/>
-              <a:sym typeface="Arial" panose="020B0604020202090204" pitchFamily="34" charset="0"/>
-            </a:endParaRPr>
-          </a:p>
-          <a:p>
-            <a:pPr marL="1371600" lvl="3" indent="457200" algn="l" defTabSz="1216025">
-              <a:lnSpc>
-                <a:spcPct val="90000"/>
-              </a:lnSpc>
-              <a:spcBef>
-                <a:spcPct val="20000"/>
-              </a:spcBef>
-              <a:buFont typeface="Arial" panose="020B0604020202090204" pitchFamily="34" charset="0"/>
-            </a:pPr>
-            <a:r>
-              <a:rPr lang="en-US" altLang="en-US" sz="2400" dirty="0">
-                <a:solidFill>
-                  <a:srgbClr val="404040"/>
-                </a:solidFill>
-                <a:ea typeface="Calibri" panose="020F0502020204030204" pitchFamily="34" charset="0"/>
-                <a:sym typeface="Arial" panose="020B0604020202090204" pitchFamily="34" charset="0"/>
-              </a:rPr>
-              <a:t>- Appointment Calendar;</a:t>
-            </a:r>
-            <a:endParaRPr lang="en-US" altLang="en-US" sz="2400" dirty="0">
-              <a:solidFill>
-                <a:srgbClr val="404040"/>
-              </a:solidFill>
-              <a:ea typeface="Calibri" panose="020F0502020204030204" pitchFamily="34" charset="0"/>
-              <a:sym typeface="Arial" panose="020B0604020202090204" pitchFamily="34" charset="0"/>
-            </a:endParaRPr>
-          </a:p>
-          <a:p>
-            <a:pPr marL="1371600" lvl="3" indent="457200" algn="l" defTabSz="1216025">
-              <a:lnSpc>
-                <a:spcPct val="90000"/>
-              </a:lnSpc>
-              <a:spcBef>
-                <a:spcPct val="20000"/>
-              </a:spcBef>
-              <a:buFont typeface="Arial" panose="020B0604020202090204" pitchFamily="34" charset="0"/>
-            </a:pPr>
-            <a:r>
-              <a:rPr lang="en-US" altLang="en-US" sz="2400" dirty="0">
-                <a:solidFill>
-                  <a:srgbClr val="404040"/>
-                </a:solidFill>
-                <a:ea typeface="Calibri" panose="020F0502020204030204" pitchFamily="34" charset="0"/>
-                <a:sym typeface="Arial" panose="020B0604020202090204" pitchFamily="34" charset="0"/>
-              </a:rPr>
-              <a:t>- Dummy Billing Interface</a:t>
-            </a:r>
-            <a:endParaRPr lang="en-US" altLang="en-US" sz="2400" dirty="0">
-              <a:solidFill>
-                <a:srgbClr val="404040"/>
-              </a:solidFill>
-              <a:ea typeface="Calibri" panose="020F0502020204030204" pitchFamily="34" charset="0"/>
-              <a:sym typeface="Arial" panose="020B0604020202090204" pitchFamily="34" charset="0"/>
-            </a:endParaRPr>
+            <a:endParaRPr lang="en-US"/>
           </a:p>
         </p:txBody>
       </p:sp>
@@ -7243,8 +6270,8 @@
         </p:nvSpPr>
         <p:spPr>
           <a:xfrm>
-            <a:off x="1610360" y="405765"/>
-            <a:ext cx="7923530" cy="645160"/>
+            <a:off x="0" y="0"/>
+            <a:ext cx="1701800" cy="645160"/>
           </a:xfrm>
           <a:prstGeom prst="rect">
             <a:avLst/>
@@ -7269,7 +6296,7 @@
                 </a:solidFill>
                 <a:ea typeface="Calibri" panose="020F0502020204030204" pitchFamily="34" charset="0"/>
               </a:rPr>
-              <a:t>Build Prototype</a:t>
+              <a:t>Code</a:t>
             </a:r>
             <a:endParaRPr lang="en-US" altLang="en-US" sz="3600" b="1" dirty="0">
               <a:solidFill>
@@ -7282,88 +6309,14 @@
       </p:sp>
       <p:sp>
         <p:nvSpPr>
-          <p:cNvPr id="12" name="矩形 11"/>
+          <p:cNvPr id="11" name="矩形 8"/>
           <p:cNvSpPr/>
           <p:nvPr/>
         </p:nvSpPr>
         <p:spPr>
           <a:xfrm>
-            <a:off x="828675" y="1729105"/>
-            <a:ext cx="10515600" cy="4653280"/>
-          </a:xfrm>
-          <a:prstGeom prst="rect">
-            <a:avLst/>
-          </a:prstGeom>
-          <a:noFill/>
-          <a:ln>
-            <a:solidFill>
-              <a:schemeClr val="tx1"/>
-            </a:solidFill>
-          </a:ln>
-        </p:spPr>
-        <p:style>
-          <a:lnRef idx="2">
-            <a:schemeClr val="accent1">
-              <a:shade val="50000"/>
-            </a:schemeClr>
-          </a:lnRef>
-          <a:fillRef idx="1">
-            <a:schemeClr val="accent1"/>
-          </a:fillRef>
-          <a:effectRef idx="0">
-            <a:schemeClr val="accent1"/>
-          </a:effectRef>
-          <a:fontRef idx="minor">
-            <a:schemeClr val="lt1"/>
-          </a:fontRef>
-        </p:style>
-        <p:txBody>
-          <a:bodyPr anchor="ctr"/>
-          <a:lstStyle/>
-          <a:p>
-            <a:pPr marL="0" marR="0" lvl="0" indent="0" algn="ctr" defTabSz="914400" rtl="0" eaLnBrk="1" fontAlgn="auto" latinLnBrk="0" hangingPunct="1">
-              <a:lnSpc>
-                <a:spcPct val="100000"/>
-              </a:lnSpc>
-              <a:spcBef>
-                <a:spcPts val="0"/>
-              </a:spcBef>
-              <a:spcAft>
-                <a:spcPts val="0"/>
-              </a:spcAft>
-              <a:buClrTx/>
-              <a:buSzTx/>
-              <a:buFontTx/>
-              <a:buNone/>
-              <a:defRPr/>
-            </a:pPr>
-            <a:endParaRPr kumimoji="0" lang="zh-CN" altLang="en-US" sz="1800" b="0" i="0" u="none" strike="noStrike" kern="1200" cap="none" spc="0" normalizeH="0" baseline="0" noProof="0">
-              <a:ln>
-                <a:noFill/>
-              </a:ln>
-              <a:solidFill>
-                <a:schemeClr val="lt1"/>
-              </a:solidFill>
-              <a:effectLst/>
-              <a:uLnTx/>
-              <a:uFillTx/>
-              <a:latin typeface="+mn-lt"/>
-              <a:ea typeface="+mn-ea"/>
-              <a:cs typeface="+mn-cs"/>
-            </a:endParaRPr>
-          </a:p>
-        </p:txBody>
-      </p:sp>
-      <p:sp>
-        <p:nvSpPr>
-          <p:cNvPr id="10253" name="文本框 6"/>
-          <p:cNvSpPr txBox="1"/>
-          <p:nvPr/>
-        </p:nvSpPr>
-        <p:spPr>
-          <a:xfrm>
-            <a:off x="956945" y="1729105"/>
-            <a:ext cx="9671685" cy="929640"/>
+            <a:off x="109220" y="6600190"/>
+            <a:ext cx="11511280" cy="354330"/>
           </a:xfrm>
           <a:prstGeom prst="rect">
             <a:avLst/>
@@ -7374,56 +6327,11 @@
           </a:ln>
         </p:spPr>
         <p:txBody>
-          <a:bodyPr wrap="square" anchor="t">
-            <a:noAutofit/>
-          </a:bodyPr>
-          <a:p>
-            <a:pPr>
-              <a:buFont typeface="Arial" panose="020B0604020202090204" pitchFamily="34" charset="0"/>
-            </a:pPr>
-            <a:r>
-              <a:rPr lang="en-US" altLang="en-US" sz="3200" b="1" dirty="0">
-                <a:solidFill>
-                  <a:srgbClr val="404040"/>
-                </a:solidFill>
-                <a:ea typeface="Calibri" panose="020F0502020204030204" pitchFamily="34" charset="0"/>
-              </a:rPr>
-              <a:t>The program is written in Python and follows these steps:</a:t>
-            </a:r>
-            <a:endParaRPr lang="en-US" altLang="en-US" sz="3200" b="1" dirty="0">
-              <a:solidFill>
-                <a:srgbClr val="404040"/>
-              </a:solidFill>
-              <a:ea typeface="Calibri" panose="020F0502020204030204" pitchFamily="34" charset="0"/>
-            </a:endParaRPr>
-          </a:p>
-        </p:txBody>
-      </p:sp>
-      <p:sp>
-        <p:nvSpPr>
-          <p:cNvPr id="10255" name="矩形 8"/>
-          <p:cNvSpPr/>
-          <p:nvPr/>
-        </p:nvSpPr>
-        <p:spPr>
-          <a:xfrm>
-            <a:off x="1082675" y="3087370"/>
-            <a:ext cx="9545955" cy="1605280"/>
-          </a:xfrm>
-          <a:prstGeom prst="rect">
-            <a:avLst/>
-          </a:prstGeom>
-          <a:noFill/>
-          <a:ln w="9525">
-            <a:noFill/>
-          </a:ln>
-        </p:spPr>
-        <p:txBody>
           <a:bodyPr wrap="square" lIns="0" tIns="0" rIns="0" bIns="0" anchor="t">
             <a:noAutofit/>
           </a:bodyPr>
           <a:p>
-            <a:pPr marL="457200" lvl="1" indent="457200" algn="l" defTabSz="1216025">
+            <a:pPr indent="457200" algn="l" defTabSz="1216025">
               <a:lnSpc>
                 <a:spcPct val="90000"/>
               </a:lnSpc>
@@ -7433,16 +6341,22 @@
               <a:buFont typeface="Arial" panose="020B0604020202090204" pitchFamily="34" charset="0"/>
             </a:pPr>
             <a:r>
-              <a:rPr lang="en-US" altLang="en-US" sz="2400" dirty="0">
+              <a:rPr lang="en-US" altLang="en-US" sz="1400" dirty="0">
                 <a:solidFill>
                   <a:srgbClr val="404040"/>
                 </a:solidFill>
                 <a:ea typeface="Calibri" panose="020F0502020204030204" pitchFamily="34" charset="0"/>
                 <a:sym typeface="Arial" panose="020B0604020202090204" pitchFamily="34" charset="0"/>
               </a:rPr>
-              <a:t>- A working demo is coded (in Python).</a:t>
+              <a:t>Here are all the codes for this application: </a:t>
             </a:r>
-            <a:endParaRPr lang="en-US" altLang="en-US" sz="2400" dirty="0">
+            <a:r>
+              <a:rPr lang="en-US" altLang="en-US" sz="1400">
+                <a:sym typeface="+mn-ea"/>
+              </a:rPr>
+              <a:t>https://github.com/McLight-Note/Web-Server-Programming/blob/main/Mid-term/Task-2.html</a:t>
+            </a:r>
+            <a:endParaRPr lang="en-US" altLang="en-US" sz="1400" dirty="0">
               <a:solidFill>
                 <a:srgbClr val="404040"/>
               </a:solidFill>
@@ -7450,64 +6364,56 @@
               <a:sym typeface="Arial" panose="020B0604020202090204" pitchFamily="34" charset="0"/>
             </a:endParaRPr>
           </a:p>
-          <a:p>
-            <a:pPr marL="457200" lvl="1" indent="457200" algn="l" defTabSz="1216025">
-              <a:lnSpc>
-                <a:spcPct val="90000"/>
-              </a:lnSpc>
-              <a:spcBef>
-                <a:spcPct val="20000"/>
-              </a:spcBef>
-              <a:buFont typeface="Arial" panose="020B0604020202090204" pitchFamily="34" charset="0"/>
-            </a:pPr>
-            <a:r>
-              <a:rPr lang="en-US" altLang="en-US" sz="2400" dirty="0">
-                <a:solidFill>
-                  <a:srgbClr val="404040"/>
-                </a:solidFill>
-                <a:ea typeface="Calibri" panose="020F0502020204030204" pitchFamily="34" charset="0"/>
-                <a:sym typeface="Arial" panose="020B0604020202090204" pitchFamily="34" charset="0"/>
-              </a:rPr>
-              <a:t>(Used Libraries: FastAPI, PyDantic, SQLAlchemy)</a:t>
-            </a:r>
-            <a:endParaRPr lang="en-US" altLang="en-US" sz="2400" dirty="0">
-              <a:solidFill>
-                <a:srgbClr val="404040"/>
-              </a:solidFill>
-              <a:ea typeface="Calibri" panose="020F0502020204030204" pitchFamily="34" charset="0"/>
-              <a:sym typeface="Arial" panose="020B0604020202090204" pitchFamily="34" charset="0"/>
-            </a:endParaRPr>
-          </a:p>
-          <a:p>
-            <a:pPr marL="457200" lvl="1" indent="457200" algn="l" defTabSz="1216025">
-              <a:lnSpc>
-                <a:spcPct val="90000"/>
-              </a:lnSpc>
-              <a:spcBef>
-                <a:spcPct val="20000"/>
-              </a:spcBef>
-              <a:buFont typeface="Arial" panose="020B0604020202090204" pitchFamily="34" charset="0"/>
-            </a:pPr>
-            <a:r>
-              <a:rPr lang="en-US" altLang="en-US" sz="2400" dirty="0">
-                <a:solidFill>
-                  <a:srgbClr val="404040"/>
-                </a:solidFill>
-                <a:ea typeface="Calibri" panose="020F0502020204030204" pitchFamily="34" charset="0"/>
-                <a:sym typeface="Arial" panose="020B0604020202090204" pitchFamily="34" charset="0"/>
-              </a:rPr>
-              <a:t>-	No real database or final design — just enough to test key functionality.</a:t>
-            </a:r>
-            <a:endParaRPr lang="en-US" altLang="en-US" sz="2400" dirty="0">
-              <a:solidFill>
-                <a:srgbClr val="404040"/>
-              </a:solidFill>
-              <a:ea typeface="Calibri" panose="020F0502020204030204" pitchFamily="34" charset="0"/>
-              <a:sym typeface="Arial" panose="020B0604020202090204" pitchFamily="34" charset="0"/>
-            </a:endParaRPr>
-          </a:p>
         </p:txBody>
       </p:sp>
+      <p:pic>
+        <p:nvPicPr>
+          <p:cNvPr id="8" name="Picture 7" descr="Screenshot 2025-10-24 at 1.53.22 PM"/>
+          <p:cNvPicPr>
+            <a:picLocks noChangeAspect="1"/>
+          </p:cNvPicPr>
+          <p:nvPr/>
+        </p:nvPicPr>
+        <p:blipFill>
+          <a:blip r:embed="rId2"/>
+          <a:stretch>
+            <a:fillRect/>
+          </a:stretch>
+        </p:blipFill>
+        <p:spPr>
+          <a:xfrm>
+            <a:off x="241935" y="676275"/>
+            <a:ext cx="5961380" cy="4458335"/>
+          </a:xfrm>
+          <a:prstGeom prst="rect">
+            <a:avLst/>
+          </a:prstGeom>
+        </p:spPr>
+      </p:pic>
+      <p:pic>
+        <p:nvPicPr>
+          <p:cNvPr id="9" name="Picture 8" descr="Screenshot 2025-10-24 at 1.53.40 PM"/>
+          <p:cNvPicPr>
+            <a:picLocks noChangeAspect="1"/>
+          </p:cNvPicPr>
+          <p:nvPr/>
+        </p:nvPicPr>
+        <p:blipFill>
+          <a:blip r:embed="rId3"/>
+          <a:stretch>
+            <a:fillRect/>
+          </a:stretch>
+        </p:blipFill>
+        <p:spPr>
+          <a:xfrm>
+            <a:off x="6406515" y="676275"/>
+            <a:ext cx="5591175" cy="4690745"/>
+          </a:xfrm>
+          <a:prstGeom prst="rect">
+            <a:avLst/>
+          </a:prstGeom>
+        </p:spPr>
+      </p:pic>
     </p:spTree>
   </p:cSld>
   <p:clrMapOvr>

--- a/Mid-term.pptx
+++ b/Mid-term.pptx
@@ -2213,6 +2213,51 @@
           </a:p>
         </p:txBody>
       </p:sp>
+      <p:sp>
+        <p:nvSpPr>
+          <p:cNvPr id="2" name="文本框 9"/>
+          <p:cNvSpPr txBox="1"/>
+          <p:nvPr/>
+        </p:nvSpPr>
+        <p:spPr>
+          <a:xfrm>
+            <a:off x="467995" y="5784215"/>
+            <a:ext cx="11544935" cy="460375"/>
+          </a:xfrm>
+          <a:prstGeom prst="rect">
+            <a:avLst/>
+          </a:prstGeom>
+          <a:noFill/>
+          <a:ln w="9525">
+            <a:noFill/>
+          </a:ln>
+        </p:spPr>
+        <p:txBody>
+          <a:bodyPr wrap="square" anchor="t">
+            <a:spAutoFit/>
+          </a:bodyPr>
+          <a:p>
+            <a:pPr algn="ctr" defTabSz="914400"/>
+            <a:r>
+              <a:rPr lang="en-US" altLang="zh-CN" sz="2400" dirty="0">
+                <a:solidFill>
+                  <a:srgbClr val="404040"/>
+                </a:solidFill>
+                <a:ea typeface="Calibri" panose="020F0502020204030204" pitchFamily="34" charset="0"/>
+                <a:sym typeface="Arial" panose="020B0604020202090204" pitchFamily="34" charset="0"/>
+              </a:rPr>
+              <a:t>Student: Shukirillaev Mukhammadsodik			ID:202438379</a:t>
+            </a:r>
+            <a:endParaRPr lang="en-US" altLang="zh-CN" sz="2400" dirty="0">
+              <a:solidFill>
+                <a:srgbClr val="404040"/>
+              </a:solidFill>
+              <a:ea typeface="Calibri" panose="020F0502020204030204" pitchFamily="34" charset="0"/>
+              <a:sym typeface="Arial" panose="020B0604020202090204" pitchFamily="34" charset="0"/>
+            </a:endParaRPr>
+          </a:p>
+        </p:txBody>
+      </p:sp>
     </p:spTree>
   </p:cSld>
   <p:clrMapOvr>
@@ -2864,7 +2909,7 @@
         </p:blipFill>
         <p:spPr>
           <a:xfrm>
-            <a:off x="193675" y="732790"/>
+            <a:off x="109220" y="645160"/>
             <a:ext cx="6530340" cy="5485130"/>
           </a:xfrm>
           <a:prstGeom prst="rect">
@@ -2872,6 +2917,175 @@
           </a:prstGeom>
         </p:spPr>
       </p:pic>
+      <p:pic>
+        <p:nvPicPr>
+          <p:cNvPr id="3" name="Picture 2" descr="Screenshot 2025-10-24 at 2.01.10 PM"/>
+          <p:cNvPicPr>
+            <a:picLocks noChangeAspect="1"/>
+          </p:cNvPicPr>
+          <p:nvPr/>
+        </p:nvPicPr>
+        <p:blipFill>
+          <a:blip r:embed="rId3"/>
+          <a:stretch>
+            <a:fillRect/>
+          </a:stretch>
+        </p:blipFill>
+        <p:spPr>
+          <a:xfrm>
+            <a:off x="5930265" y="2114550"/>
+            <a:ext cx="5970905" cy="2181225"/>
+          </a:xfrm>
+          <a:prstGeom prst="rect">
+            <a:avLst/>
+          </a:prstGeom>
+        </p:spPr>
+      </p:pic>
+      <p:sp>
+        <p:nvSpPr>
+          <p:cNvPr id="5" name="矩形 8"/>
+          <p:cNvSpPr/>
+          <p:nvPr/>
+        </p:nvSpPr>
+        <p:spPr>
+          <a:xfrm>
+            <a:off x="6757670" y="4645025"/>
+            <a:ext cx="5093970" cy="1153160"/>
+          </a:xfrm>
+          <a:prstGeom prst="rect">
+            <a:avLst/>
+          </a:prstGeom>
+          <a:noFill/>
+          <a:ln w="9525">
+            <a:noFill/>
+          </a:ln>
+        </p:spPr>
+        <p:txBody>
+          <a:bodyPr wrap="square" lIns="0" tIns="0" rIns="0" bIns="0" anchor="t">
+            <a:noAutofit/>
+          </a:bodyPr>
+          <a:p>
+            <a:pPr indent="457200" algn="l" defTabSz="1216025">
+              <a:lnSpc>
+                <a:spcPct val="90000"/>
+              </a:lnSpc>
+              <a:spcBef>
+                <a:spcPct val="20000"/>
+              </a:spcBef>
+              <a:buFont typeface="Arial" panose="020B0604020202090204" pitchFamily="34" charset="0"/>
+            </a:pPr>
+            <a:r>
+              <a:rPr lang="en-US" altLang="en-US" sz="1400" dirty="0">
+                <a:solidFill>
+                  <a:srgbClr val="404040"/>
+                </a:solidFill>
+                <a:ea typeface="Calibri" panose="020F0502020204030204" pitchFamily="34" charset="0"/>
+                <a:sym typeface="Arial" panose="020B0604020202090204" pitchFamily="34" charset="0"/>
+              </a:rPr>
+              <a:t>we have to import:</a:t>
+            </a:r>
+            <a:br>
+              <a:rPr lang="en-US" altLang="en-US" sz="1400" dirty="0">
+                <a:solidFill>
+                  <a:srgbClr val="404040"/>
+                </a:solidFill>
+                <a:ea typeface="Calibri" panose="020F0502020204030204" pitchFamily="34" charset="0"/>
+                <a:sym typeface="Arial" panose="020B0604020202090204" pitchFamily="34" charset="0"/>
+              </a:rPr>
+            </a:br>
+            <a:r>
+              <a:rPr lang="en-US" altLang="en-US" sz="1400" dirty="0">
+                <a:solidFill>
+                  <a:srgbClr val="404040"/>
+                </a:solidFill>
+                <a:ea typeface="Calibri" panose="020F0502020204030204" pitchFamily="34" charset="0"/>
+                <a:sym typeface="Arial" panose="020B0604020202090204" pitchFamily="34" charset="0"/>
+              </a:rPr>
+              <a:t>	org.springframework.web.bind.MethodArgumentNotValidException</a:t>
+            </a:r>
+            <a:br>
+              <a:rPr lang="en-US" altLang="en-US" sz="1400" dirty="0">
+                <a:solidFill>
+                  <a:srgbClr val="404040"/>
+                </a:solidFill>
+                <a:ea typeface="Calibri" panose="020F0502020204030204" pitchFamily="34" charset="0"/>
+                <a:sym typeface="Arial" panose="020B0604020202090204" pitchFamily="34" charset="0"/>
+              </a:rPr>
+            </a:br>
+            <a:r>
+              <a:rPr lang="en-US" altLang="en-US" sz="1400" dirty="0">
+                <a:solidFill>
+                  <a:srgbClr val="404040"/>
+                </a:solidFill>
+                <a:ea typeface="Calibri" panose="020F0502020204030204" pitchFamily="34" charset="0"/>
+                <a:sym typeface="Arial" panose="020B0604020202090204" pitchFamily="34" charset="0"/>
+              </a:rPr>
+              <a:t>	this one as well in order to handle the not valid arguments!</a:t>
+            </a:r>
+            <a:endParaRPr lang="en-US" altLang="en-US" sz="1400" dirty="0">
+              <a:solidFill>
+                <a:srgbClr val="404040"/>
+              </a:solidFill>
+              <a:ea typeface="Calibri" panose="020F0502020204030204" pitchFamily="34" charset="0"/>
+              <a:sym typeface="Arial" panose="020B0604020202090204" pitchFamily="34" charset="0"/>
+            </a:endParaRPr>
+          </a:p>
+        </p:txBody>
+      </p:sp>
+      <p:sp>
+        <p:nvSpPr>
+          <p:cNvPr id="6" name="Rectangles 5"/>
+          <p:cNvSpPr/>
+          <p:nvPr/>
+        </p:nvSpPr>
+        <p:spPr>
+          <a:xfrm>
+            <a:off x="6295390" y="3409950"/>
+            <a:ext cx="5133340" cy="278765"/>
+          </a:xfrm>
+          <a:prstGeom prst="rect">
+            <a:avLst/>
+          </a:prstGeom>
+          <a:noFill/>
+          <a:ln>
+            <a:solidFill>
+              <a:srgbClr val="FF0000"/>
+            </a:solidFill>
+          </a:ln>
+          <a:extLst>
+            <a:ext uri="{909E8E84-426E-40DD-AFC4-6F175D3DCCD1}">
+              <a14:hiddenFill xmlns:a14="http://schemas.microsoft.com/office/drawing/2010/main">
+                <a:solidFill>
+                  <a:schemeClr val="accent1"/>
+                </a:solidFill>
+              </a14:hiddenFill>
+            </a:ext>
+          </a:extLst>
+        </p:spPr>
+        <p:style>
+          <a:lnRef idx="2">
+            <a:schemeClr val="accent1">
+              <a:lumMod val="75000"/>
+            </a:schemeClr>
+          </a:lnRef>
+          <a:fillRef idx="1">
+            <a:schemeClr val="accent1"/>
+          </a:fillRef>
+          <a:effectRef idx="0">
+            <a:srgbClr val="FFFFFF"/>
+          </a:effectRef>
+          <a:fontRef idx="minor">
+            <a:schemeClr val="lt1"/>
+          </a:fontRef>
+        </p:style>
+        <p:txBody>
+          <a:bodyPr rtlCol="0" anchor="ctr"/>
+          <a:p>
+            <a:pPr algn="ctr"/>
+            <a:endParaRPr lang="en-US"/>
+          </a:p>
+        </p:txBody>
+      </p:sp>
     </p:spTree>
   </p:cSld>
   <p:clrMapOvr>
@@ -3192,7 +3406,7 @@
               <a:rPr lang="en-US" altLang="en-US" sz="1400">
                 <a:sym typeface="+mn-ea"/>
               </a:rPr>
-              <a:t>https://github.com/McLight-Note/Web-Server-Programming/blob/main/Mid-term/Task-2.html</a:t>
+              <a:t>https://github.com/McLight-Note/Web-Server-Programming/blob/main/Mid-term/Task-3.html</a:t>
             </a:r>
             <a:endParaRPr lang="en-US" altLang="en-US" sz="1400" dirty="0">
               <a:solidFill>
@@ -3204,6 +3418,64 @@
           </a:p>
         </p:txBody>
       </p:sp>
+      <p:pic>
+        <p:nvPicPr>
+          <p:cNvPr id="5" name="Picture 4" descr="Screenshot 2025-10-24 at 1.59.58 PM"/>
+          <p:cNvPicPr>
+            <a:picLocks noChangeAspect="1"/>
+          </p:cNvPicPr>
+          <p:nvPr/>
+        </p:nvPicPr>
+        <p:blipFill>
+          <a:blip r:embed="rId2"/>
+          <a:stretch>
+            <a:fillRect/>
+          </a:stretch>
+        </p:blipFill>
+        <p:spPr>
+          <a:xfrm>
+            <a:off x="248920" y="877570"/>
+            <a:ext cx="5700395" cy="3491865"/>
+          </a:xfrm>
+          <a:prstGeom prst="rect">
+            <a:avLst/>
+          </a:prstGeom>
+          <a:ln>
+            <a:solidFill>
+              <a:schemeClr val="accent1"/>
+            </a:solidFill>
+          </a:ln>
+        </p:spPr>
+      </p:pic>
+      <p:pic>
+        <p:nvPicPr>
+          <p:cNvPr id="6" name="Picture 5" descr="Screenshot 2025-10-24 at 2.03.38 PM"/>
+          <p:cNvPicPr>
+            <a:picLocks noChangeAspect="1"/>
+          </p:cNvPicPr>
+          <p:nvPr/>
+        </p:nvPicPr>
+        <p:blipFill>
+          <a:blip r:embed="rId3"/>
+          <a:stretch>
+            <a:fillRect/>
+          </a:stretch>
+        </p:blipFill>
+        <p:spPr>
+          <a:xfrm>
+            <a:off x="4951095" y="1758950"/>
+            <a:ext cx="6953885" cy="4525645"/>
+          </a:xfrm>
+          <a:prstGeom prst="rect">
+            <a:avLst/>
+          </a:prstGeom>
+          <a:ln>
+            <a:solidFill>
+              <a:schemeClr val="accent1"/>
+            </a:solidFill>
+          </a:ln>
+        </p:spPr>
+      </p:pic>
     </p:spTree>
   </p:cSld>
   <p:clrMapOvr>
@@ -5532,14 +5804,14 @@
       </p:sp>
       <p:sp>
         <p:nvSpPr>
-          <p:cNvPr id="4" name="Text Box 3"/>
+          <p:cNvPr id="5" name="Text Box 4"/>
           <p:cNvSpPr txBox="1"/>
           <p:nvPr/>
         </p:nvSpPr>
         <p:spPr>
           <a:xfrm>
-            <a:off x="3048000" y="3106420"/>
-            <a:ext cx="6096000" cy="645160"/>
+            <a:off x="758190" y="5941695"/>
+            <a:ext cx="10266045" cy="368300"/>
           </a:xfrm>
           <a:prstGeom prst="rect">
             <a:avLst/>
@@ -5551,11 +5823,32 @@
             <a:spAutoFit/>
           </a:bodyPr>
           <a:p>
-            <a:r>
-              <a:rPr lang="en-US" altLang="en-US"/>
-              <a:t>https://github.com/McLight-Note/Web-Server-Programming/blob/main/Mid-term/Task-2.html</a:t>
-            </a:r>
-            <a:endParaRPr lang="en-US"/>
+            <a:pPr indent="457200" algn="l" defTabSz="1216025">
+              <a:lnSpc>
+                <a:spcPct val="90000"/>
+              </a:lnSpc>
+              <a:spcBef>
+                <a:spcPct val="20000"/>
+              </a:spcBef>
+              <a:buFont typeface="Arial" panose="020B0604020202090204" pitchFamily="34" charset="0"/>
+            </a:pPr>
+            <a:r>
+              <a:rPr lang="en-US" altLang="en-US" sz="2000" dirty="0">
+                <a:solidFill>
+                  <a:srgbClr val="404040"/>
+                </a:solidFill>
+                <a:ea typeface="Calibri" panose="020F0502020204030204" pitchFamily="34" charset="0"/>
+                <a:sym typeface="Arial" panose="020B0604020202090204" pitchFamily="34" charset="0"/>
+              </a:rPr>
+              <a:t>https://github.com/McLight-Note/Web-Server-Programming/tree/main/Mid-term</a:t>
+            </a:r>
+            <a:endParaRPr lang="en-US" altLang="en-US" sz="2000" dirty="0">
+              <a:solidFill>
+                <a:srgbClr val="404040"/>
+              </a:solidFill>
+              <a:ea typeface="Calibri" panose="020F0502020204030204" pitchFamily="34" charset="0"/>
+              <a:sym typeface="Arial" panose="020B0604020202090204" pitchFamily="34" charset="0"/>
+            </a:endParaRPr>
           </a:p>
         </p:txBody>
       </p:sp>
@@ -6271,7 +6564,7 @@
         <p:spPr>
           <a:xfrm>
             <a:off x="0" y="0"/>
-            <a:ext cx="1701800" cy="645160"/>
+            <a:ext cx="11059160" cy="645160"/>
           </a:xfrm>
           <a:prstGeom prst="rect">
             <a:avLst/>
@@ -6296,7 +6589,7 @@
                 </a:solidFill>
                 <a:ea typeface="Calibri" panose="020F0502020204030204" pitchFamily="34" charset="0"/>
               </a:rPr>
-              <a:t>Code</a:t>
+              <a:t>Code samples: Please Check the git.rep as well</a:t>
             </a:r>
             <a:endParaRPr lang="en-US" altLang="en-US" sz="3600" b="1" dirty="0">
               <a:solidFill>
